--- a/submission/architecture-diagram/CareSteps_Architecture_Diagram.pptx
+++ b/submission/architecture-diagram/CareSteps_Architecture_Diagram.pptx
@@ -4,18 +4,21 @@
   <p:sldMasterIdLst>
     <p:sldMasterId id="2147483648" r:id="rId1"/>
   </p:sldMasterIdLst>
+  <p:notesMasterIdLst>
+    <p:notesMasterId r:id="rId11"/>
+  </p:notesMasterIdLst>
   <p:sldIdLst>
-    <p:sldId id="256" r:id="rId7"/>
-    <p:sldId id="257" r:id="rId9"/>
-    <p:sldId id="258" r:id="rId10"/>
-    <p:sldId id="259" r:id="rId11"/>
-    <p:sldId id="260" r:id="rId12"/>
-    <p:sldId id="261" r:id="rId13"/>
-    <p:sldId id="262" r:id="rId14"/>
-    <p:sldId id="263" r:id="rId15"/>
-    <p:sldId id="264" r:id="rId16"/>
+    <p:sldId id="256" r:id="rId2"/>
+    <p:sldId id="257" r:id="rId3"/>
+    <p:sldId id="258" r:id="rId4"/>
+    <p:sldId id="259" r:id="rId5"/>
+    <p:sldId id="260" r:id="rId6"/>
+    <p:sldId id="261" r:id="rId7"/>
+    <p:sldId id="262" r:id="rId8"/>
+    <p:sldId id="263" r:id="rId9"/>
+    <p:sldId id="264" r:id="rId10"/>
   </p:sldIdLst>
-  <p:sldSz cx="14630400" cy="8229600" type="screen4x3"/>
+  <p:sldSz cx="14630400" cy="8229600"/>
   <p:notesSz cx="6858000" cy="9144000"/>
   <p:defaultTextStyle>
     <a:defPPr>
@@ -112,11 +115,27 @@
       </a:defRPr>
     </a:lvl9pPr>
   </p:defaultTextStyle>
+  <p:extLst>
+    <p:ext uri="{EFAFB233-063F-42B5-8137-9DF3F51BA10A}">
+      <p15:sldGuideLst xmlns:p15="http://schemas.microsoft.com/office/powerpoint/2012/main">
+        <p15:guide id="1" orient="horz" pos="2160">
+          <p15:clr>
+            <a:srgbClr val="A4A3A4"/>
+          </p15:clr>
+        </p15:guide>
+        <p15:guide id="2" pos="2880">
+          <p15:clr>
+            <a:srgbClr val="A4A3A4"/>
+          </p15:clr>
+        </p15:guide>
+      </p15:sldGuideLst>
+    </p:ext>
+  </p:extLst>
 </p:presentation>
 </file>
 
 <file path=ppt/notesMasters/notesMaster1.xml><?xml version="1.0" encoding="utf-8"?>
-<p:notesMaster xmlns:a="http://schemas.openxmlformats.org/drawingml/2006/main" xmlns:p="http://schemas.openxmlformats.org/presentationml/2006/main" xmlns:r="http://schemas.openxmlformats.org/officeDocument/2006/relationships">
+<p:notesMaster xmlns:a="http://schemas.openxmlformats.org/drawingml/2006/main" xmlns:r="http://schemas.openxmlformats.org/officeDocument/2006/relationships" xmlns:p="http://schemas.openxmlformats.org/presentationml/2006/main">
   <p:cSld>
     <p:bg>
       <p:bgRef idx="1001">
@@ -137,241 +156,16 @@
           <a:chExt cx="0" cy="0"/>
         </a:xfrm>
       </p:grpSpPr>
-      <p:sp>
-        <p:nvSpPr>
-          <p:cNvPr id="2" name="Header Placeholder 1"/>
-          <p:cNvSpPr>
-            <a:spLocks noGrp="1"/>
-          </p:cNvSpPr>
-          <p:nvPr>
-            <p:ph type="hdr" sz="quarter"/>
-          </p:nvPr>
-        </p:nvSpPr>
-        <p:spPr>
-          <a:xfrm>
-            <a:off x="0" y="0"/>
-            <a:ext cx="2971800" cy="457200"/>
-          </a:xfrm>
-          <a:prstGeom prst="rect">
-            <a:avLst/>
-          </a:prstGeom>
-        </p:spPr>
-        <p:txBody>
-          <a:bodyPr vert="horz" lIns="91440" tIns="45720" rIns="91440" bIns="45720" rtlCol="0"/>
-          <a:lstStyle>
-            <a:lvl1pPr algn="l">
-              <a:defRPr sz="1200"/>
-            </a:lvl1pPr>
-          </a:lstStyle>
-          <a:p>
-            <a:endParaRPr lang="en-US"/>
-          </a:p>
-        </p:txBody>
-      </p:sp>
-      <p:sp>
-        <p:nvSpPr>
-          <p:cNvPr id="3" name="Date Placeholder 2"/>
-          <p:cNvSpPr>
-            <a:spLocks noGrp="1"/>
-          </p:cNvSpPr>
-          <p:nvPr>
-            <p:ph type="dt" idx="1"/>
-          </p:nvPr>
-        </p:nvSpPr>
-        <p:spPr>
-          <a:xfrm>
-            <a:off x="3884613" y="0"/>
-            <a:ext cx="2971800" cy="457200"/>
-          </a:xfrm>
-          <a:prstGeom prst="rect">
-            <a:avLst/>
-          </a:prstGeom>
-        </p:spPr>
-        <p:txBody>
-          <a:bodyPr vert="horz" lIns="91440" tIns="45720" rIns="91440" bIns="45720" rtlCol="0"/>
-          <a:lstStyle>
-            <a:lvl1pPr algn="r">
-              <a:defRPr sz="1200"/>
-            </a:lvl1pPr>
-          </a:lstStyle>
-          <a:p>
-            <a:fld id="{0F89C1C7-3DCD-1040-A9CF-14679D8B5DDD}" type="datetimeFigureOut">
-              <a:rPr lang="en-US" smtClean="0"/>
-              <a:t>10/17/16</a:t>
-            </a:fld>
-            <a:endParaRPr lang="en-US"/>
-          </a:p>
-        </p:txBody>
-      </p:sp>
-      <p:sp>
-        <p:nvSpPr>
-          <p:cNvPr id="4" name="Slide Image Placeholder 3"/>
-          <p:cNvSpPr>
-            <a:spLocks noGrp="1" noRot="1" noChangeAspect="1"/>
-          </p:cNvSpPr>
-          <p:nvPr>
-            <p:ph type="sldImg" idx="2"/>
-          </p:nvPr>
-        </p:nvSpPr>
-        <p:spPr>
-          <a:xfrm>
-            <a:off x="1143000" y="685800"/>
-            <a:ext cx="4572000" cy="3429000"/>
-          </a:xfrm>
-          <a:prstGeom prst="rect">
-            <a:avLst/>
-          </a:prstGeom>
-          <a:noFill/>
-          <a:ln w="12700">
-            <a:solidFill>
-              <a:prstClr val="black"/>
-            </a:solidFill>
-          </a:ln>
-        </p:spPr>
-        <p:txBody>
-          <a:bodyPr vert="horz" lIns="91440" tIns="45720" rIns="91440" bIns="45720" rtlCol="0" anchor="ctr"/>
-          <a:lstStyle/>
-          <a:p>
-            <a:endParaRPr lang="en-US"/>
-          </a:p>
-        </p:txBody>
-      </p:sp>
-      <p:sp>
-        <p:nvSpPr>
-          <p:cNvPr id="5" name="Notes Placeholder 4"/>
-          <p:cNvSpPr>
-            <a:spLocks noGrp="1"/>
-          </p:cNvSpPr>
-          <p:nvPr>
-            <p:ph type="body" sz="quarter" idx="3"/>
-          </p:nvPr>
-        </p:nvSpPr>
-        <p:spPr>
-          <a:xfrm>
-            <a:off x="685800" y="4343400"/>
-            <a:ext cx="5486400" cy="4114800"/>
-          </a:xfrm>
-          <a:prstGeom prst="rect">
-            <a:avLst/>
-          </a:prstGeom>
-        </p:spPr>
-        <p:txBody>
-          <a:bodyPr vert="horz" lIns="91440" tIns="45720" rIns="91440" bIns="45720" rtlCol="0"/>
-          <a:lstStyle/>
-          <a:p>
-            <a:pPr lvl="0"/>
-            <a:r>
-              <a:rPr lang="en-US" smtClean="0"/>
-              <a:t>Click to edit Master text styles</a:t>
-            </a:r>
-          </a:p>
-          <a:p>
-            <a:pPr lvl="1"/>
-            <a:r>
-              <a:rPr lang="en-US" smtClean="0"/>
-              <a:t>Second level</a:t>
-            </a:r>
-          </a:p>
-          <a:p>
-            <a:pPr lvl="2"/>
-            <a:r>
-              <a:rPr lang="en-US" smtClean="0"/>
-              <a:t>Third level</a:t>
-            </a:r>
-          </a:p>
-          <a:p>
-            <a:pPr lvl="3"/>
-            <a:r>
-              <a:rPr lang="en-US" smtClean="0"/>
-              <a:t>Fourth level</a:t>
-            </a:r>
-          </a:p>
-          <a:p>
-            <a:pPr lvl="4"/>
-            <a:r>
-              <a:rPr lang="en-US" smtClean="0"/>
-              <a:t>Fifth level</a:t>
-            </a:r>
-            <a:endParaRPr lang="en-US"/>
-          </a:p>
-        </p:txBody>
-      </p:sp>
-      <p:sp>
-        <p:nvSpPr>
-          <p:cNvPr id="6" name="Footer Placeholder 5"/>
-          <p:cNvSpPr>
-            <a:spLocks noGrp="1"/>
-          </p:cNvSpPr>
-          <p:nvPr>
-            <p:ph type="ftr" sz="quarter" idx="4"/>
-          </p:nvPr>
-        </p:nvSpPr>
-        <p:spPr>
-          <a:xfrm>
-            <a:off x="0" y="8685213"/>
-            <a:ext cx="2971800" cy="457200"/>
-          </a:xfrm>
-          <a:prstGeom prst="rect">
-            <a:avLst/>
-          </a:prstGeom>
-        </p:spPr>
-        <p:txBody>
-          <a:bodyPr vert="horz" lIns="91440" tIns="45720" rIns="91440" bIns="45720" rtlCol="0" anchor="b"/>
-          <a:lstStyle>
-            <a:lvl1pPr algn="l">
-              <a:defRPr sz="1200"/>
-            </a:lvl1pPr>
-          </a:lstStyle>
-          <a:p>
-            <a:endParaRPr lang="en-US"/>
-          </a:p>
-        </p:txBody>
-      </p:sp>
-      <p:sp>
-        <p:nvSpPr>
-          <p:cNvPr id="7" name="Slide Number Placeholder 6"/>
-          <p:cNvSpPr>
-            <a:spLocks noGrp="1"/>
-          </p:cNvSpPr>
-          <p:nvPr>
-            <p:ph type="sldNum" sz="quarter" idx="5"/>
-          </p:nvPr>
-        </p:nvSpPr>
-        <p:spPr>
-          <a:xfrm>
-            <a:off x="3884613" y="8685213"/>
-            <a:ext cx="2971800" cy="457200"/>
-          </a:xfrm>
-          <a:prstGeom prst="rect">
-            <a:avLst/>
-          </a:prstGeom>
-        </p:spPr>
-        <p:txBody>
-          <a:bodyPr vert="horz" lIns="91440" tIns="45720" rIns="91440" bIns="45720" rtlCol="0" anchor="b"/>
-          <a:lstStyle>
-            <a:lvl1pPr algn="r">
-              <a:defRPr sz="1200"/>
-            </a:lvl1pPr>
-          </a:lstStyle>
-          <a:p>
-            <a:fld id="{BB5E49A5-4136-284D-997B-48E1D791AD67}" type="slidenum">
-              <a:rPr lang="en-US" smtClean="0"/>
-              <a:t>‹#›</a:t>
-            </a:fld>
-            <a:endParaRPr lang="en-US"/>
-          </a:p>
-        </p:txBody>
-      </p:sp>
     </p:spTree>
     <p:extLst>
       <p:ext uri="{BB962C8B-B14F-4D97-AF65-F5344CB8AC3E}">
-        <p14:creationId xmlns:p14="http://schemas.microsoft.com/office/powerpoint/2010/main" val="2623252185"/>
+        <p14:creationId xmlns:p14="http://schemas.microsoft.com/office/powerpoint/2010/main" val="1663466479"/>
       </p:ext>
     </p:extLst>
   </p:cSld>
   <p:clrMap bg1="lt1" tx1="dk1" bg2="lt2" tx2="dk2" accent1="accent1" accent2="accent2" accent3="accent3" accent4="accent4" accent5="accent5" accent6="accent6" hlink="hlink" folHlink="folHlink"/>
   <p:notesStyle>
-    <a:lvl1pPr marL="0" algn="l" defTabSz="457200" rtl="0" eaLnBrk="1" latinLnBrk="0" hangingPunct="1">
+    <a:lvl1pPr marL="0" algn="l" defTabSz="914400" rtl="0" eaLnBrk="1" latinLnBrk="0" hangingPunct="1">
       <a:defRPr sz="1200" kern="1200">
         <a:solidFill>
           <a:schemeClr val="tx1"/>
@@ -381,7 +175,7 @@
         <a:cs typeface="+mn-cs"/>
       </a:defRPr>
     </a:lvl1pPr>
-    <a:lvl2pPr marL="457200" algn="l" defTabSz="457200" rtl="0" eaLnBrk="1" latinLnBrk="0" hangingPunct="1">
+    <a:lvl2pPr marL="457200" algn="l" defTabSz="914400" rtl="0" eaLnBrk="1" latinLnBrk="0" hangingPunct="1">
       <a:defRPr sz="1200" kern="1200">
         <a:solidFill>
           <a:schemeClr val="tx1"/>
@@ -391,7 +185,7 @@
         <a:cs typeface="+mn-cs"/>
       </a:defRPr>
     </a:lvl2pPr>
-    <a:lvl3pPr marL="914400" algn="l" defTabSz="457200" rtl="0" eaLnBrk="1" latinLnBrk="0" hangingPunct="1">
+    <a:lvl3pPr marL="914400" algn="l" defTabSz="914400" rtl="0" eaLnBrk="1" latinLnBrk="0" hangingPunct="1">
       <a:defRPr sz="1200" kern="1200">
         <a:solidFill>
           <a:schemeClr val="tx1"/>
@@ -401,7 +195,7 @@
         <a:cs typeface="+mn-cs"/>
       </a:defRPr>
     </a:lvl3pPr>
-    <a:lvl4pPr marL="1371600" algn="l" defTabSz="457200" rtl="0" eaLnBrk="1" latinLnBrk="0" hangingPunct="1">
+    <a:lvl4pPr marL="1371600" algn="l" defTabSz="914400" rtl="0" eaLnBrk="1" latinLnBrk="0" hangingPunct="1">
       <a:defRPr sz="1200" kern="1200">
         <a:solidFill>
           <a:schemeClr val="tx1"/>
@@ -411,7 +205,7 @@
         <a:cs typeface="+mn-cs"/>
       </a:defRPr>
     </a:lvl4pPr>
-    <a:lvl5pPr marL="1828800" algn="l" defTabSz="457200" rtl="0" eaLnBrk="1" latinLnBrk="0" hangingPunct="1">
+    <a:lvl5pPr marL="1828800" algn="l" defTabSz="914400" rtl="0" eaLnBrk="1" latinLnBrk="0" hangingPunct="1">
       <a:defRPr sz="1200" kern="1200">
         <a:solidFill>
           <a:schemeClr val="tx1"/>
@@ -421,7 +215,7 @@
         <a:cs typeface="+mn-cs"/>
       </a:defRPr>
     </a:lvl5pPr>
-    <a:lvl6pPr marL="2286000" algn="l" defTabSz="457200" rtl="0" eaLnBrk="1" latinLnBrk="0" hangingPunct="1">
+    <a:lvl6pPr marL="2286000" algn="l" defTabSz="914400" rtl="0" eaLnBrk="1" latinLnBrk="0" hangingPunct="1">
       <a:defRPr sz="1200" kern="1200">
         <a:solidFill>
           <a:schemeClr val="tx1"/>
@@ -431,7 +225,7 @@
         <a:cs typeface="+mn-cs"/>
       </a:defRPr>
     </a:lvl6pPr>
-    <a:lvl7pPr marL="2743200" algn="l" defTabSz="457200" rtl="0" eaLnBrk="1" latinLnBrk="0" hangingPunct="1">
+    <a:lvl7pPr marL="2743200" algn="l" defTabSz="914400" rtl="0" eaLnBrk="1" latinLnBrk="0" hangingPunct="1">
       <a:defRPr sz="1200" kern="1200">
         <a:solidFill>
           <a:schemeClr val="tx1"/>
@@ -441,7 +235,7 @@
         <a:cs typeface="+mn-cs"/>
       </a:defRPr>
     </a:lvl7pPr>
-    <a:lvl8pPr marL="3200400" algn="l" defTabSz="457200" rtl="0" eaLnBrk="1" latinLnBrk="0" hangingPunct="1">
+    <a:lvl8pPr marL="3200400" algn="l" defTabSz="914400" rtl="0" eaLnBrk="1" latinLnBrk="0" hangingPunct="1">
       <a:defRPr sz="1200" kern="1200">
         <a:solidFill>
           <a:schemeClr val="tx1"/>
@@ -451,7 +245,7 @@
         <a:cs typeface="+mn-cs"/>
       </a:defRPr>
     </a:lvl8pPr>
-    <a:lvl9pPr marL="3657600" algn="l" defTabSz="457200" rtl="0" eaLnBrk="1" latinLnBrk="0" hangingPunct="1">
+    <a:lvl9pPr marL="3657600" algn="l" defTabSz="914400" rtl="0" eaLnBrk="1" latinLnBrk="0" hangingPunct="1">
       <a:defRPr sz="1200" kern="1200">
         <a:solidFill>
           <a:schemeClr val="tx1"/>
@@ -466,7 +260,7 @@
 </file>
 
 <file path=ppt/notesSlides/notesSlide1.xml><?xml version="1.0" encoding="utf-8"?>
-<p:notes xmlns:a="http://schemas.openxmlformats.org/drawingml/2006/main" xmlns:p="http://schemas.openxmlformats.org/presentationml/2006/main" xmlns:r="http://schemas.openxmlformats.org/officeDocument/2006/relationships">
+<p:notes xmlns:a="http://schemas.openxmlformats.org/drawingml/2006/main" xmlns:r="http://schemas.openxmlformats.org/officeDocument/2006/relationships" xmlns:p="http://schemas.openxmlformats.org/presentationml/2006/main">
   <p:cSld>
     <p:spTree>
       <p:nvGrpSpPr>
@@ -486,7 +280,7 @@
         <p:nvSpPr>
           <p:cNvPr id="2" name="Slide Image Placeholder 1"/>
           <p:cNvSpPr>
-            <a:spLocks noGrp="1"/>
+            <a:spLocks noGrp="1" noRot="1" noChangeAspect="1"/>
           </p:cNvSpPr>
           <p:nvPr>
             <p:ph type="sldImg" idx="2"/>
@@ -501,7 +295,7 @@
             <a:spLocks noGrp="1"/>
           </p:cNvSpPr>
           <p:nvPr>
-            <p:ph type="body" idx="3" sz="quarter"/>
+            <p:ph type="body" sz="quarter" idx="3"/>
           </p:nvPr>
         </p:nvSpPr>
         <p:spPr/>
@@ -522,7 +316,7 @@
             <a:spLocks noGrp="1"/>
           </p:cNvSpPr>
           <p:nvPr>
-            <p:ph type="sldNum" idx="5" sz="quarter"/>
+            <p:ph type="sldNum" sz="quarter" idx="5"/>
           </p:nvPr>
         </p:nvSpPr>
         <p:spPr/>
@@ -536,7 +330,7 @@
 </file>
 
 <file path=ppt/notesSlides/notesSlide2.xml><?xml version="1.0" encoding="utf-8"?>
-<p:notes xmlns:a="http://schemas.openxmlformats.org/drawingml/2006/main" xmlns:p="http://schemas.openxmlformats.org/presentationml/2006/main" xmlns:r="http://schemas.openxmlformats.org/officeDocument/2006/relationships">
+<p:notes xmlns:a="http://schemas.openxmlformats.org/drawingml/2006/main" xmlns:r="http://schemas.openxmlformats.org/officeDocument/2006/relationships" xmlns:p="http://schemas.openxmlformats.org/presentationml/2006/main">
   <p:cSld>
     <p:spTree>
       <p:nvGrpSpPr>
@@ -556,7 +350,7 @@
         <p:nvSpPr>
           <p:cNvPr id="2" name="Slide Image Placeholder 1"/>
           <p:cNvSpPr>
-            <a:spLocks noGrp="1"/>
+            <a:spLocks noGrp="1" noRot="1" noChangeAspect="1"/>
           </p:cNvSpPr>
           <p:nvPr>
             <p:ph type="sldImg" idx="2"/>
@@ -571,7 +365,7 @@
             <a:spLocks noGrp="1"/>
           </p:cNvSpPr>
           <p:nvPr>
-            <p:ph type="body" idx="3" sz="quarter"/>
+            <p:ph type="body" sz="quarter" idx="3"/>
           </p:nvPr>
         </p:nvSpPr>
         <p:spPr/>
@@ -592,7 +386,7 @@
             <a:spLocks noGrp="1"/>
           </p:cNvSpPr>
           <p:nvPr>
-            <p:ph type="sldNum" idx="5" sz="quarter"/>
+            <p:ph type="sldNum" sz="quarter" idx="5"/>
           </p:nvPr>
         </p:nvSpPr>
         <p:spPr/>
@@ -606,7 +400,7 @@
 </file>
 
 <file path=ppt/notesSlides/notesSlide3.xml><?xml version="1.0" encoding="utf-8"?>
-<p:notes xmlns:a="http://schemas.openxmlformats.org/drawingml/2006/main" xmlns:p="http://schemas.openxmlformats.org/presentationml/2006/main" xmlns:r="http://schemas.openxmlformats.org/officeDocument/2006/relationships">
+<p:notes xmlns:a="http://schemas.openxmlformats.org/drawingml/2006/main" xmlns:r="http://schemas.openxmlformats.org/officeDocument/2006/relationships" xmlns:p="http://schemas.openxmlformats.org/presentationml/2006/main">
   <p:cSld>
     <p:spTree>
       <p:nvGrpSpPr>
@@ -626,7 +420,7 @@
         <p:nvSpPr>
           <p:cNvPr id="2" name="Slide Image Placeholder 1"/>
           <p:cNvSpPr>
-            <a:spLocks noGrp="1"/>
+            <a:spLocks noGrp="1" noRot="1" noChangeAspect="1"/>
           </p:cNvSpPr>
           <p:nvPr>
             <p:ph type="sldImg" idx="2"/>
@@ -641,7 +435,7 @@
             <a:spLocks noGrp="1"/>
           </p:cNvSpPr>
           <p:nvPr>
-            <p:ph type="body" idx="3" sz="quarter"/>
+            <p:ph type="body" sz="quarter" idx="3"/>
           </p:nvPr>
         </p:nvSpPr>
         <p:spPr/>
@@ -662,7 +456,7 @@
             <a:spLocks noGrp="1"/>
           </p:cNvSpPr>
           <p:nvPr>
-            <p:ph type="sldNum" idx="5" sz="quarter"/>
+            <p:ph type="sldNum" sz="quarter" idx="5"/>
           </p:nvPr>
         </p:nvSpPr>
         <p:spPr/>
@@ -676,7 +470,7 @@
 </file>
 
 <file path=ppt/notesSlides/notesSlide4.xml><?xml version="1.0" encoding="utf-8"?>
-<p:notes xmlns:a="http://schemas.openxmlformats.org/drawingml/2006/main" xmlns:p="http://schemas.openxmlformats.org/presentationml/2006/main" xmlns:r="http://schemas.openxmlformats.org/officeDocument/2006/relationships">
+<p:notes xmlns:a="http://schemas.openxmlformats.org/drawingml/2006/main" xmlns:r="http://schemas.openxmlformats.org/officeDocument/2006/relationships" xmlns:p="http://schemas.openxmlformats.org/presentationml/2006/main">
   <p:cSld>
     <p:spTree>
       <p:nvGrpSpPr>
@@ -696,7 +490,7 @@
         <p:nvSpPr>
           <p:cNvPr id="2" name="Slide Image Placeholder 1"/>
           <p:cNvSpPr>
-            <a:spLocks noGrp="1"/>
+            <a:spLocks noGrp="1" noRot="1" noChangeAspect="1"/>
           </p:cNvSpPr>
           <p:nvPr>
             <p:ph type="sldImg" idx="2"/>
@@ -711,7 +505,7 @@
             <a:spLocks noGrp="1"/>
           </p:cNvSpPr>
           <p:nvPr>
-            <p:ph type="body" idx="3" sz="quarter"/>
+            <p:ph type="body" sz="quarter" idx="3"/>
           </p:nvPr>
         </p:nvSpPr>
         <p:spPr/>
@@ -732,7 +526,7 @@
             <a:spLocks noGrp="1"/>
           </p:cNvSpPr>
           <p:nvPr>
-            <p:ph type="sldNum" idx="5" sz="quarter"/>
+            <p:ph type="sldNum" sz="quarter" idx="5"/>
           </p:nvPr>
         </p:nvSpPr>
         <p:spPr/>
@@ -746,7 +540,7 @@
 </file>
 
 <file path=ppt/notesSlides/notesSlide5.xml><?xml version="1.0" encoding="utf-8"?>
-<p:notes xmlns:a="http://schemas.openxmlformats.org/drawingml/2006/main" xmlns:p="http://schemas.openxmlformats.org/presentationml/2006/main" xmlns:r="http://schemas.openxmlformats.org/officeDocument/2006/relationships">
+<p:notes xmlns:a="http://schemas.openxmlformats.org/drawingml/2006/main" xmlns:r="http://schemas.openxmlformats.org/officeDocument/2006/relationships" xmlns:p="http://schemas.openxmlformats.org/presentationml/2006/main">
   <p:cSld>
     <p:spTree>
       <p:nvGrpSpPr>
@@ -766,7 +560,7 @@
         <p:nvSpPr>
           <p:cNvPr id="2" name="Slide Image Placeholder 1"/>
           <p:cNvSpPr>
-            <a:spLocks noGrp="1"/>
+            <a:spLocks noGrp="1" noRot="1" noChangeAspect="1"/>
           </p:cNvSpPr>
           <p:nvPr>
             <p:ph type="sldImg" idx="2"/>
@@ -781,7 +575,7 @@
             <a:spLocks noGrp="1"/>
           </p:cNvSpPr>
           <p:nvPr>
-            <p:ph type="body" idx="3" sz="quarter"/>
+            <p:ph type="body" sz="quarter" idx="3"/>
           </p:nvPr>
         </p:nvSpPr>
         <p:spPr/>
@@ -802,7 +596,7 @@
             <a:spLocks noGrp="1"/>
           </p:cNvSpPr>
           <p:nvPr>
-            <p:ph type="sldNum" idx="5" sz="quarter"/>
+            <p:ph type="sldNum" sz="quarter" idx="5"/>
           </p:nvPr>
         </p:nvSpPr>
         <p:spPr/>
@@ -816,7 +610,7 @@
 </file>
 
 <file path=ppt/notesSlides/notesSlide6.xml><?xml version="1.0" encoding="utf-8"?>
-<p:notes xmlns:a="http://schemas.openxmlformats.org/drawingml/2006/main" xmlns:p="http://schemas.openxmlformats.org/presentationml/2006/main" xmlns:r="http://schemas.openxmlformats.org/officeDocument/2006/relationships">
+<p:notes xmlns:a="http://schemas.openxmlformats.org/drawingml/2006/main" xmlns:r="http://schemas.openxmlformats.org/officeDocument/2006/relationships" xmlns:p="http://schemas.openxmlformats.org/presentationml/2006/main">
   <p:cSld>
     <p:spTree>
       <p:nvGrpSpPr>
@@ -836,7 +630,7 @@
         <p:nvSpPr>
           <p:cNvPr id="2" name="Slide Image Placeholder 1"/>
           <p:cNvSpPr>
-            <a:spLocks noGrp="1"/>
+            <a:spLocks noGrp="1" noRot="1" noChangeAspect="1"/>
           </p:cNvSpPr>
           <p:nvPr>
             <p:ph type="sldImg" idx="2"/>
@@ -851,7 +645,7 @@
             <a:spLocks noGrp="1"/>
           </p:cNvSpPr>
           <p:nvPr>
-            <p:ph type="body" idx="3" sz="quarter"/>
+            <p:ph type="body" sz="quarter" idx="3"/>
           </p:nvPr>
         </p:nvSpPr>
         <p:spPr/>
@@ -872,7 +666,7 @@
             <a:spLocks noGrp="1"/>
           </p:cNvSpPr>
           <p:nvPr>
-            <p:ph type="sldNum" idx="5" sz="quarter"/>
+            <p:ph type="sldNum" sz="quarter" idx="5"/>
           </p:nvPr>
         </p:nvSpPr>
         <p:spPr/>
@@ -886,7 +680,7 @@
 </file>
 
 <file path=ppt/notesSlides/notesSlide7.xml><?xml version="1.0" encoding="utf-8"?>
-<p:notes xmlns:a="http://schemas.openxmlformats.org/drawingml/2006/main" xmlns:p="http://schemas.openxmlformats.org/presentationml/2006/main" xmlns:r="http://schemas.openxmlformats.org/officeDocument/2006/relationships">
+<p:notes xmlns:a="http://schemas.openxmlformats.org/drawingml/2006/main" xmlns:r="http://schemas.openxmlformats.org/officeDocument/2006/relationships" xmlns:p="http://schemas.openxmlformats.org/presentationml/2006/main">
   <p:cSld>
     <p:spTree>
       <p:nvGrpSpPr>
@@ -906,7 +700,7 @@
         <p:nvSpPr>
           <p:cNvPr id="2" name="Slide Image Placeholder 1"/>
           <p:cNvSpPr>
-            <a:spLocks noGrp="1"/>
+            <a:spLocks noGrp="1" noRot="1" noChangeAspect="1"/>
           </p:cNvSpPr>
           <p:nvPr>
             <p:ph type="sldImg" idx="2"/>
@@ -921,7 +715,7 @@
             <a:spLocks noGrp="1"/>
           </p:cNvSpPr>
           <p:nvPr>
-            <p:ph type="body" idx="3" sz="quarter"/>
+            <p:ph type="body" sz="quarter" idx="3"/>
           </p:nvPr>
         </p:nvSpPr>
         <p:spPr/>
@@ -942,7 +736,7 @@
             <a:spLocks noGrp="1"/>
           </p:cNvSpPr>
           <p:nvPr>
-            <p:ph type="sldNum" idx="5" sz="quarter"/>
+            <p:ph type="sldNum" sz="quarter" idx="5"/>
           </p:nvPr>
         </p:nvSpPr>
         <p:spPr/>
@@ -956,7 +750,7 @@
 </file>
 
 <file path=ppt/notesSlides/notesSlide8.xml><?xml version="1.0" encoding="utf-8"?>
-<p:notes xmlns:a="http://schemas.openxmlformats.org/drawingml/2006/main" xmlns:p="http://schemas.openxmlformats.org/presentationml/2006/main" xmlns:r="http://schemas.openxmlformats.org/officeDocument/2006/relationships">
+<p:notes xmlns:a="http://schemas.openxmlformats.org/drawingml/2006/main" xmlns:r="http://schemas.openxmlformats.org/officeDocument/2006/relationships" xmlns:p="http://schemas.openxmlformats.org/presentationml/2006/main">
   <p:cSld>
     <p:spTree>
       <p:nvGrpSpPr>
@@ -976,7 +770,7 @@
         <p:nvSpPr>
           <p:cNvPr id="2" name="Slide Image Placeholder 1"/>
           <p:cNvSpPr>
-            <a:spLocks noGrp="1"/>
+            <a:spLocks noGrp="1" noRot="1" noChangeAspect="1"/>
           </p:cNvSpPr>
           <p:nvPr>
             <p:ph type="sldImg" idx="2"/>
@@ -991,7 +785,7 @@
             <a:spLocks noGrp="1"/>
           </p:cNvSpPr>
           <p:nvPr>
-            <p:ph type="body" idx="3" sz="quarter"/>
+            <p:ph type="body" sz="quarter" idx="3"/>
           </p:nvPr>
         </p:nvSpPr>
         <p:spPr/>
@@ -1012,7 +806,7 @@
             <a:spLocks noGrp="1"/>
           </p:cNvSpPr>
           <p:nvPr>
-            <p:ph type="sldNum" idx="5" sz="quarter"/>
+            <p:ph type="sldNum" sz="quarter" idx="5"/>
           </p:nvPr>
         </p:nvSpPr>
         <p:spPr/>
@@ -1026,7 +820,7 @@
 </file>
 
 <file path=ppt/notesSlides/notesSlide9.xml><?xml version="1.0" encoding="utf-8"?>
-<p:notes xmlns:a="http://schemas.openxmlformats.org/drawingml/2006/main" xmlns:p="http://schemas.openxmlformats.org/presentationml/2006/main" xmlns:r="http://schemas.openxmlformats.org/officeDocument/2006/relationships">
+<p:notes xmlns:a="http://schemas.openxmlformats.org/drawingml/2006/main" xmlns:r="http://schemas.openxmlformats.org/officeDocument/2006/relationships" xmlns:p="http://schemas.openxmlformats.org/presentationml/2006/main">
   <p:cSld>
     <p:spTree>
       <p:nvGrpSpPr>
@@ -1046,7 +840,7 @@
         <p:nvSpPr>
           <p:cNvPr id="2" name="Slide Image Placeholder 1"/>
           <p:cNvSpPr>
-            <a:spLocks noGrp="1"/>
+            <a:spLocks noGrp="1" noRot="1" noChangeAspect="1"/>
           </p:cNvSpPr>
           <p:nvPr>
             <p:ph type="sldImg" idx="2"/>
@@ -1061,7 +855,7 @@
             <a:spLocks noGrp="1"/>
           </p:cNvSpPr>
           <p:nvPr>
-            <p:ph type="body" idx="3" sz="quarter"/>
+            <p:ph type="body" sz="quarter" idx="3"/>
           </p:nvPr>
         </p:nvSpPr>
         <p:spPr/>
@@ -1082,7 +876,7 @@
             <a:spLocks noGrp="1"/>
           </p:cNvSpPr>
           <p:nvPr>
-            <p:ph type="sldNum" idx="5" sz="quarter"/>
+            <p:ph type="sldNum" sz="quarter" idx="5"/>
           </p:nvPr>
         </p:nvSpPr>
         <p:spPr/>
@@ -1133,10 +927,9 @@
           <a:lstStyle/>
           <a:p>
             <a:r>
-              <a:rPr lang="en-US" smtClean="0"/>
+              <a:rPr lang="en-US"/>
               <a:t>Click to edit Master title style</a:t>
             </a:r>
-            <a:endParaRPr lang="en-US"/>
           </a:p>
         </p:txBody>
       </p:sp>
@@ -1252,10 +1045,9 @@
           </a:lstStyle>
           <a:p>
             <a:r>
-              <a:rPr lang="en-US" smtClean="0"/>
+              <a:rPr lang="en-US"/>
               <a:t>Click to edit Master subtitle style</a:t>
             </a:r>
-            <a:endParaRPr lang="en-US"/>
           </a:p>
         </p:txBody>
       </p:sp>
@@ -1276,7 +1068,7 @@
           <a:p>
             <a:fld id="{5BCAD085-E8A6-8845-BD4E-CB4CCA059FC4}" type="datetimeFigureOut">
               <a:rPr lang="en-US" smtClean="0"/>
-              <a:t>1/27/13</a:t>
+              <a:t>10/16/2026</a:t>
             </a:fld>
             <a:endParaRPr lang="en-US"/>
           </a:p>
@@ -1370,10 +1162,9 @@
           <a:lstStyle/>
           <a:p>
             <a:r>
-              <a:rPr lang="en-US" smtClean="0"/>
+              <a:rPr lang="en-US"/>
               <a:t>Click to edit Master title style</a:t>
             </a:r>
-            <a:endParaRPr lang="en-US"/>
           </a:p>
         </p:txBody>
       </p:sp>
@@ -1394,38 +1185,37 @@
           <a:p>
             <a:pPr lvl="0"/>
             <a:r>
-              <a:rPr lang="en-US" smtClean="0"/>
+              <a:rPr lang="en-US"/>
               <a:t>Click to edit Master text styles</a:t>
             </a:r>
           </a:p>
           <a:p>
             <a:pPr lvl="1"/>
             <a:r>
-              <a:rPr lang="en-US" smtClean="0"/>
+              <a:rPr lang="en-US"/>
               <a:t>Second level</a:t>
             </a:r>
           </a:p>
           <a:p>
             <a:pPr lvl="2"/>
             <a:r>
-              <a:rPr lang="en-US" smtClean="0"/>
+              <a:rPr lang="en-US"/>
               <a:t>Third level</a:t>
             </a:r>
           </a:p>
           <a:p>
             <a:pPr lvl="3"/>
             <a:r>
-              <a:rPr lang="en-US" smtClean="0"/>
+              <a:rPr lang="en-US"/>
               <a:t>Fourth level</a:t>
             </a:r>
           </a:p>
           <a:p>
             <a:pPr lvl="4"/>
             <a:r>
-              <a:rPr lang="en-US" smtClean="0"/>
+              <a:rPr lang="en-US"/>
               <a:t>Fifth level</a:t>
             </a:r>
-            <a:endParaRPr lang="en-US"/>
           </a:p>
         </p:txBody>
       </p:sp>
@@ -1446,7 +1236,7 @@
           <a:p>
             <a:fld id="{5BCAD085-E8A6-8845-BD4E-CB4CCA059FC4}" type="datetimeFigureOut">
               <a:rPr lang="en-US" smtClean="0"/>
-              <a:t>1/27/13</a:t>
+              <a:t>10/16/2026</a:t>
             </a:fld>
             <a:endParaRPr lang="en-US"/>
           </a:p>
@@ -1545,10 +1335,9 @@
           <a:lstStyle/>
           <a:p>
             <a:r>
-              <a:rPr lang="en-US" smtClean="0"/>
+              <a:rPr lang="en-US"/>
               <a:t>Click to edit Master title style</a:t>
             </a:r>
-            <a:endParaRPr lang="en-US"/>
           </a:p>
         </p:txBody>
       </p:sp>
@@ -1574,38 +1363,37 @@
           <a:p>
             <a:pPr lvl="0"/>
             <a:r>
-              <a:rPr lang="en-US" smtClean="0"/>
+              <a:rPr lang="en-US"/>
               <a:t>Click to edit Master text styles</a:t>
             </a:r>
           </a:p>
           <a:p>
             <a:pPr lvl="1"/>
             <a:r>
-              <a:rPr lang="en-US" smtClean="0"/>
+              <a:rPr lang="en-US"/>
               <a:t>Second level</a:t>
             </a:r>
           </a:p>
           <a:p>
             <a:pPr lvl="2"/>
             <a:r>
-              <a:rPr lang="en-US" smtClean="0"/>
+              <a:rPr lang="en-US"/>
               <a:t>Third level</a:t>
             </a:r>
           </a:p>
           <a:p>
             <a:pPr lvl="3"/>
             <a:r>
-              <a:rPr lang="en-US" smtClean="0"/>
+              <a:rPr lang="en-US"/>
               <a:t>Fourth level</a:t>
             </a:r>
           </a:p>
           <a:p>
             <a:pPr lvl="4"/>
             <a:r>
-              <a:rPr lang="en-US" smtClean="0"/>
+              <a:rPr lang="en-US"/>
               <a:t>Fifth level</a:t>
             </a:r>
-            <a:endParaRPr lang="en-US"/>
           </a:p>
         </p:txBody>
       </p:sp>
@@ -1626,7 +1414,7 @@
           <a:p>
             <a:fld id="{5BCAD085-E8A6-8845-BD4E-CB4CCA059FC4}" type="datetimeFigureOut">
               <a:rPr lang="en-US" smtClean="0"/>
-              <a:t>1/27/13</a:t>
+              <a:t>10/16/2026</a:t>
             </a:fld>
             <a:endParaRPr lang="en-US"/>
           </a:p>
@@ -1720,10 +1508,9 @@
           <a:lstStyle/>
           <a:p>
             <a:r>
-              <a:rPr lang="en-US" smtClean="0"/>
+              <a:rPr lang="en-US"/>
               <a:t>Click to edit Master title style</a:t>
             </a:r>
-            <a:endParaRPr lang="en-US"/>
           </a:p>
         </p:txBody>
       </p:sp>
@@ -1744,38 +1531,37 @@
           <a:p>
             <a:pPr lvl="0"/>
             <a:r>
-              <a:rPr lang="en-US" smtClean="0"/>
+              <a:rPr lang="en-US"/>
               <a:t>Click to edit Master text styles</a:t>
             </a:r>
           </a:p>
           <a:p>
             <a:pPr lvl="1"/>
             <a:r>
-              <a:rPr lang="en-US" smtClean="0"/>
+              <a:rPr lang="en-US"/>
               <a:t>Second level</a:t>
             </a:r>
           </a:p>
           <a:p>
             <a:pPr lvl="2"/>
             <a:r>
-              <a:rPr lang="en-US" smtClean="0"/>
+              <a:rPr lang="en-US"/>
               <a:t>Third level</a:t>
             </a:r>
           </a:p>
           <a:p>
             <a:pPr lvl="3"/>
             <a:r>
-              <a:rPr lang="en-US" smtClean="0"/>
+              <a:rPr lang="en-US"/>
               <a:t>Fourth level</a:t>
             </a:r>
           </a:p>
           <a:p>
             <a:pPr lvl="4"/>
             <a:r>
-              <a:rPr lang="en-US" smtClean="0"/>
+              <a:rPr lang="en-US"/>
               <a:t>Fifth level</a:t>
             </a:r>
-            <a:endParaRPr lang="en-US"/>
           </a:p>
         </p:txBody>
       </p:sp>
@@ -1796,7 +1582,7 @@
           <a:p>
             <a:fld id="{5BCAD085-E8A6-8845-BD4E-CB4CCA059FC4}" type="datetimeFigureOut">
               <a:rPr lang="en-US" smtClean="0"/>
-              <a:t>1/27/13</a:t>
+              <a:t>10/16/2026</a:t>
             </a:fld>
             <a:endParaRPr lang="en-US"/>
           </a:p>
@@ -1899,10 +1685,9 @@
           </a:lstStyle>
           <a:p>
             <a:r>
-              <a:rPr lang="en-US" smtClean="0"/>
+              <a:rPr lang="en-US"/>
               <a:t>Click to edit Master title style</a:t>
             </a:r>
-            <a:endParaRPr lang="en-US"/>
           </a:p>
         </p:txBody>
       </p:sp>
@@ -2019,7 +1804,7 @@
           <a:p>
             <a:pPr lvl="0"/>
             <a:r>
-              <a:rPr lang="en-US" smtClean="0"/>
+              <a:rPr lang="en-US"/>
               <a:t>Click to edit Master text styles</a:t>
             </a:r>
           </a:p>
@@ -2042,7 +1827,7 @@
           <a:p>
             <a:fld id="{5BCAD085-E8A6-8845-BD4E-CB4CCA059FC4}" type="datetimeFigureOut">
               <a:rPr lang="en-US" smtClean="0"/>
-              <a:t>1/27/13</a:t>
+              <a:t>10/16/2026</a:t>
             </a:fld>
             <a:endParaRPr lang="en-US"/>
           </a:p>
@@ -2136,10 +1921,9 @@
           <a:lstStyle/>
           <a:p>
             <a:r>
-              <a:rPr lang="en-US" smtClean="0"/>
+              <a:rPr lang="en-US"/>
               <a:t>Click to edit Master title style</a:t>
             </a:r>
-            <a:endParaRPr lang="en-US"/>
           </a:p>
         </p:txBody>
       </p:sp>
@@ -2193,38 +1977,37 @@
           <a:p>
             <a:pPr lvl="0"/>
             <a:r>
-              <a:rPr lang="en-US" smtClean="0"/>
+              <a:rPr lang="en-US"/>
               <a:t>Click to edit Master text styles</a:t>
             </a:r>
           </a:p>
           <a:p>
             <a:pPr lvl="1"/>
             <a:r>
-              <a:rPr lang="en-US" smtClean="0"/>
+              <a:rPr lang="en-US"/>
               <a:t>Second level</a:t>
             </a:r>
           </a:p>
           <a:p>
             <a:pPr lvl="2"/>
             <a:r>
-              <a:rPr lang="en-US" smtClean="0"/>
+              <a:rPr lang="en-US"/>
               <a:t>Third level</a:t>
             </a:r>
           </a:p>
           <a:p>
             <a:pPr lvl="3"/>
             <a:r>
-              <a:rPr lang="en-US" smtClean="0"/>
+              <a:rPr lang="en-US"/>
               <a:t>Fourth level</a:t>
             </a:r>
           </a:p>
           <a:p>
             <a:pPr lvl="4"/>
             <a:r>
-              <a:rPr lang="en-US" smtClean="0"/>
+              <a:rPr lang="en-US"/>
               <a:t>Fifth level</a:t>
             </a:r>
-            <a:endParaRPr lang="en-US"/>
           </a:p>
         </p:txBody>
       </p:sp>
@@ -2278,38 +2061,37 @@
           <a:p>
             <a:pPr lvl="0"/>
             <a:r>
-              <a:rPr lang="en-US" smtClean="0"/>
+              <a:rPr lang="en-US"/>
               <a:t>Click to edit Master text styles</a:t>
             </a:r>
           </a:p>
           <a:p>
             <a:pPr lvl="1"/>
             <a:r>
-              <a:rPr lang="en-US" smtClean="0"/>
+              <a:rPr lang="en-US"/>
               <a:t>Second level</a:t>
             </a:r>
           </a:p>
           <a:p>
             <a:pPr lvl="2"/>
             <a:r>
-              <a:rPr lang="en-US" smtClean="0"/>
+              <a:rPr lang="en-US"/>
               <a:t>Third level</a:t>
             </a:r>
           </a:p>
           <a:p>
             <a:pPr lvl="3"/>
             <a:r>
-              <a:rPr lang="en-US" smtClean="0"/>
+              <a:rPr lang="en-US"/>
               <a:t>Fourth level</a:t>
             </a:r>
           </a:p>
           <a:p>
             <a:pPr lvl="4"/>
             <a:r>
-              <a:rPr lang="en-US" smtClean="0"/>
+              <a:rPr lang="en-US"/>
               <a:t>Fifth level</a:t>
             </a:r>
-            <a:endParaRPr lang="en-US"/>
           </a:p>
         </p:txBody>
       </p:sp>
@@ -2330,7 +2112,7 @@
           <a:p>
             <a:fld id="{5BCAD085-E8A6-8845-BD4E-CB4CCA059FC4}" type="datetimeFigureOut">
               <a:rPr lang="en-US" smtClean="0"/>
-              <a:t>1/27/13</a:t>
+              <a:t>10/16/2026</a:t>
             </a:fld>
             <a:endParaRPr lang="en-US"/>
           </a:p>
@@ -2428,10 +2210,9 @@
           </a:lstStyle>
           <a:p>
             <a:r>
-              <a:rPr lang="en-US" smtClean="0"/>
+              <a:rPr lang="en-US"/>
               <a:t>Click to edit Master title style</a:t>
             </a:r>
-            <a:endParaRPr lang="en-US"/>
           </a:p>
         </p:txBody>
       </p:sp>
@@ -2494,7 +2275,7 @@
           <a:p>
             <a:pPr lvl="0"/>
             <a:r>
-              <a:rPr lang="en-US" smtClean="0"/>
+              <a:rPr lang="en-US"/>
               <a:t>Click to edit Master text styles</a:t>
             </a:r>
           </a:p>
@@ -2550,38 +2331,37 @@
           <a:p>
             <a:pPr lvl="0"/>
             <a:r>
-              <a:rPr lang="en-US" smtClean="0"/>
+              <a:rPr lang="en-US"/>
               <a:t>Click to edit Master text styles</a:t>
             </a:r>
           </a:p>
           <a:p>
             <a:pPr lvl="1"/>
             <a:r>
-              <a:rPr lang="en-US" smtClean="0"/>
+              <a:rPr lang="en-US"/>
               <a:t>Second level</a:t>
             </a:r>
           </a:p>
           <a:p>
             <a:pPr lvl="2"/>
             <a:r>
-              <a:rPr lang="en-US" smtClean="0"/>
+              <a:rPr lang="en-US"/>
               <a:t>Third level</a:t>
             </a:r>
           </a:p>
           <a:p>
             <a:pPr lvl="3"/>
             <a:r>
-              <a:rPr lang="en-US" smtClean="0"/>
+              <a:rPr lang="en-US"/>
               <a:t>Fourth level</a:t>
             </a:r>
           </a:p>
           <a:p>
             <a:pPr lvl="4"/>
             <a:r>
-              <a:rPr lang="en-US" smtClean="0"/>
+              <a:rPr lang="en-US"/>
               <a:t>Fifth level</a:t>
             </a:r>
-            <a:endParaRPr lang="en-US"/>
           </a:p>
         </p:txBody>
       </p:sp>
@@ -2644,7 +2424,7 @@
           <a:p>
             <a:pPr lvl="0"/>
             <a:r>
-              <a:rPr lang="en-US" smtClean="0"/>
+              <a:rPr lang="en-US"/>
               <a:t>Click to edit Master text styles</a:t>
             </a:r>
           </a:p>
@@ -2700,38 +2480,37 @@
           <a:p>
             <a:pPr lvl="0"/>
             <a:r>
-              <a:rPr lang="en-US" smtClean="0"/>
+              <a:rPr lang="en-US"/>
               <a:t>Click to edit Master text styles</a:t>
             </a:r>
           </a:p>
           <a:p>
             <a:pPr lvl="1"/>
             <a:r>
-              <a:rPr lang="en-US" smtClean="0"/>
+              <a:rPr lang="en-US"/>
               <a:t>Second level</a:t>
             </a:r>
           </a:p>
           <a:p>
             <a:pPr lvl="2"/>
             <a:r>
-              <a:rPr lang="en-US" smtClean="0"/>
+              <a:rPr lang="en-US"/>
               <a:t>Third level</a:t>
             </a:r>
           </a:p>
           <a:p>
             <a:pPr lvl="3"/>
             <a:r>
-              <a:rPr lang="en-US" smtClean="0"/>
+              <a:rPr lang="en-US"/>
               <a:t>Fourth level</a:t>
             </a:r>
           </a:p>
           <a:p>
             <a:pPr lvl="4"/>
             <a:r>
-              <a:rPr lang="en-US" smtClean="0"/>
+              <a:rPr lang="en-US"/>
               <a:t>Fifth level</a:t>
             </a:r>
-            <a:endParaRPr lang="en-US"/>
           </a:p>
         </p:txBody>
       </p:sp>
@@ -2752,7 +2531,7 @@
           <a:p>
             <a:fld id="{5BCAD085-E8A6-8845-BD4E-CB4CCA059FC4}" type="datetimeFigureOut">
               <a:rPr lang="en-US" smtClean="0"/>
-              <a:t>1/27/13</a:t>
+              <a:t>10/16/2026</a:t>
             </a:fld>
             <a:endParaRPr lang="en-US"/>
           </a:p>
@@ -2846,10 +2625,9 @@
           <a:lstStyle/>
           <a:p>
             <a:r>
-              <a:rPr lang="en-US" smtClean="0"/>
+              <a:rPr lang="en-US"/>
               <a:t>Click to edit Master title style</a:t>
             </a:r>
-            <a:endParaRPr lang="en-US"/>
           </a:p>
         </p:txBody>
       </p:sp>
@@ -2870,7 +2648,7 @@
           <a:p>
             <a:fld id="{5BCAD085-E8A6-8845-BD4E-CB4CCA059FC4}" type="datetimeFigureOut">
               <a:rPr lang="en-US" smtClean="0"/>
-              <a:t>1/27/13</a:t>
+              <a:t>10/16/2026</a:t>
             </a:fld>
             <a:endParaRPr lang="en-US"/>
           </a:p>
@@ -2965,7 +2743,7 @@
           <a:p>
             <a:fld id="{5BCAD085-E8A6-8845-BD4E-CB4CCA059FC4}" type="datetimeFigureOut">
               <a:rPr lang="en-US" smtClean="0"/>
-              <a:t>1/27/13</a:t>
+              <a:t>10/16/2026</a:t>
             </a:fld>
             <a:endParaRPr lang="en-US"/>
           </a:p>
@@ -3068,10 +2846,9 @@
           </a:lstStyle>
           <a:p>
             <a:r>
-              <a:rPr lang="en-US" smtClean="0"/>
+              <a:rPr lang="en-US"/>
               <a:t>Click to edit Master title style</a:t>
             </a:r>
-            <a:endParaRPr lang="en-US"/>
           </a:p>
         </p:txBody>
       </p:sp>
@@ -3125,38 +2902,37 @@
           <a:p>
             <a:pPr lvl="0"/>
             <a:r>
-              <a:rPr lang="en-US" smtClean="0"/>
+              <a:rPr lang="en-US"/>
               <a:t>Click to edit Master text styles</a:t>
             </a:r>
           </a:p>
           <a:p>
             <a:pPr lvl="1"/>
             <a:r>
-              <a:rPr lang="en-US" smtClean="0"/>
+              <a:rPr lang="en-US"/>
               <a:t>Second level</a:t>
             </a:r>
           </a:p>
           <a:p>
             <a:pPr lvl="2"/>
             <a:r>
-              <a:rPr lang="en-US" smtClean="0"/>
+              <a:rPr lang="en-US"/>
               <a:t>Third level</a:t>
             </a:r>
           </a:p>
           <a:p>
             <a:pPr lvl="3"/>
             <a:r>
-              <a:rPr lang="en-US" smtClean="0"/>
+              <a:rPr lang="en-US"/>
               <a:t>Fourth level</a:t>
             </a:r>
           </a:p>
           <a:p>
             <a:pPr lvl="4"/>
             <a:r>
-              <a:rPr lang="en-US" smtClean="0"/>
+              <a:rPr lang="en-US"/>
               <a:t>Fifth level</a:t>
             </a:r>
-            <a:endParaRPr lang="en-US"/>
           </a:p>
         </p:txBody>
       </p:sp>
@@ -3219,7 +2995,7 @@
           <a:p>
             <a:pPr lvl="0"/>
             <a:r>
-              <a:rPr lang="en-US" smtClean="0"/>
+              <a:rPr lang="en-US"/>
               <a:t>Click to edit Master text styles</a:t>
             </a:r>
           </a:p>
@@ -3242,7 +3018,7 @@
           <a:p>
             <a:fld id="{5BCAD085-E8A6-8845-BD4E-CB4CCA059FC4}" type="datetimeFigureOut">
               <a:rPr lang="en-US" smtClean="0"/>
-              <a:t>1/27/13</a:t>
+              <a:t>10/16/2026</a:t>
             </a:fld>
             <a:endParaRPr lang="en-US"/>
           </a:p>
@@ -3345,10 +3121,9 @@
           </a:lstStyle>
           <a:p>
             <a:r>
-              <a:rPr lang="en-US" smtClean="0"/>
+              <a:rPr lang="en-US"/>
               <a:t>Click to edit Master title style</a:t>
             </a:r>
-            <a:endParaRPr lang="en-US"/>
           </a:p>
         </p:txBody>
       </p:sp>
@@ -3472,7 +3247,7 @@
           <a:p>
             <a:pPr lvl="0"/>
             <a:r>
-              <a:rPr lang="en-US" smtClean="0"/>
+              <a:rPr lang="en-US"/>
               <a:t>Click to edit Master text styles</a:t>
             </a:r>
           </a:p>
@@ -3495,7 +3270,7 @@
           <a:p>
             <a:fld id="{5BCAD085-E8A6-8845-BD4E-CB4CCA059FC4}" type="datetimeFigureOut">
               <a:rPr lang="en-US" smtClean="0"/>
-              <a:t>1/27/13</a:t>
+              <a:t>10/16/2026</a:t>
             </a:fld>
             <a:endParaRPr lang="en-US"/>
           </a:p>
@@ -3604,10 +3379,9 @@
           <a:lstStyle/>
           <a:p>
             <a:r>
-              <a:rPr lang="en-US" smtClean="0"/>
+              <a:rPr lang="en-US"/>
               <a:t>Click to edit Master title style</a:t>
             </a:r>
-            <a:endParaRPr lang="en-US"/>
           </a:p>
         </p:txBody>
       </p:sp>
@@ -3638,38 +3412,37 @@
           <a:p>
             <a:pPr lvl="0"/>
             <a:r>
-              <a:rPr lang="en-US" smtClean="0"/>
+              <a:rPr lang="en-US"/>
               <a:t>Click to edit Master text styles</a:t>
             </a:r>
           </a:p>
           <a:p>
             <a:pPr lvl="1"/>
             <a:r>
-              <a:rPr lang="en-US" smtClean="0"/>
+              <a:rPr lang="en-US"/>
               <a:t>Second level</a:t>
             </a:r>
           </a:p>
           <a:p>
             <a:pPr lvl="2"/>
             <a:r>
-              <a:rPr lang="en-US" smtClean="0"/>
+              <a:rPr lang="en-US"/>
               <a:t>Third level</a:t>
             </a:r>
           </a:p>
           <a:p>
             <a:pPr lvl="3"/>
             <a:r>
-              <a:rPr lang="en-US" smtClean="0"/>
+              <a:rPr lang="en-US"/>
               <a:t>Fourth level</a:t>
             </a:r>
           </a:p>
           <a:p>
             <a:pPr lvl="4"/>
             <a:r>
-              <a:rPr lang="en-US" smtClean="0"/>
+              <a:rPr lang="en-US"/>
               <a:t>Fifth level</a:t>
             </a:r>
-            <a:endParaRPr lang="en-US"/>
           </a:p>
         </p:txBody>
       </p:sp>
@@ -3708,7 +3481,7 @@
           <a:p>
             <a:fld id="{5BCAD085-E8A6-8845-BD4E-CB4CCA059FC4}" type="datetimeFigureOut">
               <a:rPr lang="en-US" smtClean="0"/>
-              <a:t>1/27/13</a:t>
+              <a:t>10/16/2026</a:t>
             </a:fld>
             <a:endParaRPr lang="en-US"/>
           </a:p>
@@ -4067,7 +3840,7 @@
 </file>
 
 <file path=ppt/slides/slide1.xml><?xml version="1.0" encoding="utf-8"?>
-<p:sld xmlns:a="http://schemas.openxmlformats.org/drawingml/2006/main" xmlns:p="http://schemas.openxmlformats.org/presentationml/2006/main" xmlns:r="http://schemas.openxmlformats.org/officeDocument/2006/relationships">
+<p:sld xmlns:a="http://schemas.openxmlformats.org/drawingml/2006/main" xmlns:r="http://schemas.openxmlformats.org/officeDocument/2006/relationships" xmlns:p="http://schemas.openxmlformats.org/presentationml/2006/main">
   <p:cSld>
     <p:spTree>
       <p:nvGrpSpPr>
@@ -4075,7 +3848,14 @@
         <p:cNvGrpSpPr/>
         <p:nvPr/>
       </p:nvGrpSpPr>
-      <p:grpSpPr/>
+      <p:grpSpPr>
+        <a:xfrm>
+          <a:off x="0" y="0"/>
+          <a:ext cx="0" cy="0"/>
+          <a:chOff x="0" y="0"/>
+          <a:chExt cx="0" cy="0"/>
+        </a:xfrm>
+      </p:grpSpPr>
       <p:pic>
         <p:nvPicPr>
           <p:cNvPr id="2" name="Picture 1" descr="template2_background.png"/>
@@ -4085,7 +3865,7 @@
           <p:nvPr/>
         </p:nvPicPr>
         <p:blipFill>
-          <a:blip r:embed="rId2"/>
+          <a:blip r:embed="rId3"/>
           <a:stretch>
             <a:fillRect/>
           </a:stretch>
@@ -4117,7 +3897,7 @@
           <a:noFill/>
         </p:spPr>
         <p:txBody>
-          <a:bodyPr wrap="square" lIns="13716" rIns="13716" tIns="13716" bIns="13716" anchor="t">
+          <a:bodyPr wrap="square" lIns="13716" tIns="13716" rIns="13716" bIns="13716" anchor="t">
             <a:noAutofit/>
           </a:bodyPr>
           <a:lstStyle/>
@@ -4171,6 +3951,7 @@
           <a:lstStyle/>
           <a:p>
             <a:pPr algn="ctr"/>
+            <a:endParaRPr/>
           </a:p>
         </p:txBody>
       </p:sp>
@@ -4191,7 +3972,7 @@
           <a:noFill/>
         </p:spPr>
         <p:txBody>
-          <a:bodyPr wrap="square" lIns="13716" rIns="13716" tIns="13716" bIns="13716" anchor="t">
+          <a:bodyPr wrap="square" lIns="13716" tIns="13716" rIns="13716" bIns="13716" anchor="t">
             <a:noAutofit/>
           </a:bodyPr>
           <a:lstStyle/>
@@ -4236,31 +4017,23 @@
           <a:noFill/>
         </p:spPr>
         <p:txBody>
-          <a:bodyPr wrap="square" lIns="13716" rIns="13716" tIns="13716" bIns="13716" anchor="t">
-            <a:noAutofit/>
-          </a:bodyPr>
-          <a:lstStyle/>
-          <a:p>
-            <a:pPr algn="l">
-              <a:lnSpc>
-                <a:spcPct val="108000"/>
-              </a:lnSpc>
-              <a:spcBef>
-                <a:spcPts val="0"/>
-              </a:spcBef>
-              <a:spcAft>
-                <a:spcPts val="200"/>
-              </a:spcAft>
-            </a:pPr>
-            <a:r>
-              <a:rPr sz="3100" b="1">
-                <a:solidFill>
-                  <a:srgbClr val="2F2D29"/>
-                </a:solidFill>
-                <a:latin typeface="Arimo"/>
-              </a:rPr>
-              <a:t/>
-            </a:r>
+          <a:bodyPr wrap="square" lIns="13716" tIns="13716" rIns="13716" bIns="13716" anchor="t">
+            <a:noAutofit/>
+          </a:bodyPr>
+          <a:lstStyle/>
+          <a:p>
+            <a:pPr algn="l">
+              <a:lnSpc>
+                <a:spcPct val="108000"/>
+              </a:lnSpc>
+              <a:spcBef>
+                <a:spcPts val="0"/>
+              </a:spcBef>
+              <a:spcAft>
+                <a:spcPts val="200"/>
+              </a:spcAft>
+            </a:pPr>
+            <a:endParaRPr/>
           </a:p>
         </p:txBody>
       </p:sp>
@@ -4281,31 +4054,23 @@
           <a:noFill/>
         </p:spPr>
         <p:txBody>
-          <a:bodyPr wrap="square" lIns="13716" rIns="13716" tIns="13716" bIns="13716" anchor="t">
-            <a:noAutofit/>
-          </a:bodyPr>
-          <a:lstStyle/>
-          <a:p>
-            <a:pPr algn="l">
-              <a:lnSpc>
-                <a:spcPct val="108000"/>
-              </a:lnSpc>
-              <a:spcBef>
-                <a:spcPts val="0"/>
-              </a:spcBef>
-              <a:spcAft>
-                <a:spcPts val="200"/>
-              </a:spcAft>
-            </a:pPr>
-            <a:r>
-              <a:rPr sz="1550" b="0">
-                <a:solidFill>
-                  <a:srgbClr val="6B6861"/>
-                </a:solidFill>
-                <a:latin typeface="Arimo"/>
-              </a:rPr>
-              <a:t/>
-            </a:r>
+          <a:bodyPr wrap="square" lIns="13716" tIns="13716" rIns="13716" bIns="13716" anchor="t">
+            <a:noAutofit/>
+          </a:bodyPr>
+          <a:lstStyle/>
+          <a:p>
+            <a:pPr algn="l">
+              <a:lnSpc>
+                <a:spcPct val="108000"/>
+              </a:lnSpc>
+              <a:spcBef>
+                <a:spcPts val="0"/>
+              </a:spcBef>
+              <a:spcAft>
+                <a:spcPts val="200"/>
+              </a:spcAft>
+            </a:pPr>
+            <a:endParaRPr/>
           </a:p>
         </p:txBody>
       </p:sp>
@@ -4335,6 +4100,7 @@
           <a:lstStyle/>
           <a:p>
             <a:pPr algn="ctr"/>
+            <a:endParaRPr/>
           </a:p>
         </p:txBody>
       </p:sp>
@@ -4355,7 +4121,7 @@
           <a:noFill/>
         </p:spPr>
         <p:txBody>
-          <a:bodyPr wrap="square" lIns="13716" rIns="13716" tIns="13716" bIns="13716" anchor="t">
+          <a:bodyPr wrap="square" lIns="13716" tIns="13716" rIns="13716" bIns="13716" anchor="t">
             <a:noAutofit/>
           </a:bodyPr>
           <a:lstStyle/>
@@ -4400,7 +4166,7 @@
           <a:noFill/>
         </p:spPr>
         <p:txBody>
-          <a:bodyPr wrap="square" lIns="13716" rIns="13716" tIns="13716" bIns="13716" anchor="t">
+          <a:bodyPr wrap="square" lIns="13716" tIns="13716" rIns="13716" bIns="13716" anchor="t">
             <a:noAutofit/>
           </a:bodyPr>
           <a:lstStyle/>
@@ -4445,7 +4211,7 @@
           <a:noFill/>
         </p:spPr>
         <p:txBody>
-          <a:bodyPr wrap="square" lIns="13716" rIns="13716" tIns="13716" bIns="13716" anchor="t">
+          <a:bodyPr wrap="square" lIns="13716" tIns="13716" rIns="13716" bIns="13716" anchor="t">
             <a:noAutofit/>
           </a:bodyPr>
           <a:lstStyle/>
@@ -4490,7 +4256,7 @@
           <a:noFill/>
         </p:spPr>
         <p:txBody>
-          <a:bodyPr wrap="square" lIns="13716" rIns="13716" tIns="13716" bIns="13716" anchor="t">
+          <a:bodyPr wrap="square" lIns="13716" tIns="13716" rIns="13716" bIns="13716" anchor="t">
             <a:noAutofit/>
           </a:bodyPr>
           <a:lstStyle/>
@@ -4535,7 +4301,7 @@
           <a:noFill/>
         </p:spPr>
         <p:txBody>
-          <a:bodyPr wrap="square" lIns="13716" rIns="13716" tIns="13716" bIns="13716" anchor="t">
+          <a:bodyPr wrap="square" lIns="13716" tIns="13716" rIns="13716" bIns="13716" anchor="t">
             <a:noAutofit/>
           </a:bodyPr>
           <a:lstStyle/>
@@ -4580,7 +4346,7 @@
           <a:noFill/>
         </p:spPr>
         <p:txBody>
-          <a:bodyPr wrap="square" lIns="13716" rIns="13716" tIns="13716" bIns="13716" anchor="t">
+          <a:bodyPr wrap="square" lIns="13716" tIns="13716" rIns="13716" bIns="13716" anchor="t">
             <a:noAutofit/>
           </a:bodyPr>
           <a:lstStyle/>
@@ -4647,7 +4413,7 @@
           <a:noFill/>
         </p:spPr>
         <p:txBody>
-          <a:bodyPr wrap="square" lIns="13716" rIns="13716" tIns="13716" bIns="13716" anchor="t">
+          <a:bodyPr wrap="square" lIns="13716" tIns="13716" rIns="13716" bIns="13716" anchor="t">
             <a:noAutofit/>
           </a:bodyPr>
           <a:lstStyle/>
@@ -4714,7 +4480,7 @@
           <a:noFill/>
         </p:spPr>
         <p:txBody>
-          <a:bodyPr wrap="square" lIns="13716" rIns="13716" tIns="13716" bIns="13716" anchor="t">
+          <a:bodyPr wrap="square" lIns="13716" tIns="13716" rIns="13716" bIns="13716" anchor="t">
             <a:noAutofit/>
           </a:bodyPr>
           <a:lstStyle/>
@@ -4777,6 +4543,7 @@
           <a:lstStyle/>
           <a:p>
             <a:pPr algn="ctr"/>
+            <a:endParaRPr/>
           </a:p>
         </p:txBody>
       </p:sp>
@@ -4788,33 +4555,33 @@
         </p:nvSpPr>
         <p:spPr>
           <a:xfrm>
-            <a:off x="850392" y="5120640"/>
-            <a:ext cx="1325880" cy="384048"/>
-          </a:xfrm>
-          <a:prstGeom prst="rect">
-            <a:avLst/>
-          </a:prstGeom>
-          <a:noFill/>
-        </p:spPr>
-        <p:txBody>
-          <a:bodyPr wrap="square" lIns="13716" rIns="13716" tIns="13716" bIns="13716" anchor="t">
-            <a:noAutofit/>
-          </a:bodyPr>
-          <a:lstStyle/>
-          <a:p>
-            <a:pPr algn="l">
-              <a:lnSpc>
-                <a:spcPct val="108000"/>
-              </a:lnSpc>
-              <a:spcBef>
-                <a:spcPts val="0"/>
-              </a:spcBef>
-              <a:spcAft>
-                <a:spcPts val="200"/>
-              </a:spcAft>
-            </a:pPr>
-            <a:r>
-              <a:rPr sz="3000" b="1">
+            <a:off x="850392" y="5084064"/>
+            <a:ext cx="1325880" cy="475488"/>
+          </a:xfrm>
+          <a:prstGeom prst="rect">
+            <a:avLst/>
+          </a:prstGeom>
+          <a:noFill/>
+        </p:spPr>
+        <p:txBody>
+          <a:bodyPr wrap="square" lIns="13716" tIns="13716" rIns="13716" bIns="13716" anchor="t">
+            <a:noAutofit/>
+          </a:bodyPr>
+          <a:lstStyle/>
+          <a:p>
+            <a:pPr algn="l">
+              <a:lnSpc>
+                <a:spcPct val="108000"/>
+              </a:lnSpc>
+              <a:spcBef>
+                <a:spcPts val="0"/>
+              </a:spcBef>
+              <a:spcAft>
+                <a:spcPts val="200"/>
+              </a:spcAft>
+            </a:pPr>
+            <a:r>
+              <a:rPr sz="2800" b="1">
                 <a:solidFill>
                   <a:srgbClr val="0B61C9"/>
                 </a:solidFill>
@@ -4842,7 +4609,7 @@
           <a:noFill/>
         </p:spPr>
         <p:txBody>
-          <a:bodyPr wrap="square" lIns="13716" rIns="13716" tIns="13716" bIns="13716" anchor="t">
+          <a:bodyPr wrap="square" lIns="13716" tIns="13716" rIns="13716" bIns="13716" anchor="t">
             <a:noAutofit/>
           </a:bodyPr>
           <a:lstStyle/>
@@ -4905,6 +4672,7 @@
           <a:lstStyle/>
           <a:p>
             <a:pPr algn="ctr"/>
+            <a:endParaRPr/>
           </a:p>
         </p:txBody>
       </p:sp>
@@ -4916,33 +4684,33 @@
         </p:nvSpPr>
         <p:spPr>
           <a:xfrm>
-            <a:off x="2807208" y="5120640"/>
-            <a:ext cx="1325880" cy="384048"/>
-          </a:xfrm>
-          <a:prstGeom prst="rect">
-            <a:avLst/>
-          </a:prstGeom>
-          <a:noFill/>
-        </p:spPr>
-        <p:txBody>
-          <a:bodyPr wrap="square" lIns="13716" rIns="13716" tIns="13716" bIns="13716" anchor="t">
-            <a:noAutofit/>
-          </a:bodyPr>
-          <a:lstStyle/>
-          <a:p>
-            <a:pPr algn="l">
-              <a:lnSpc>
-                <a:spcPct val="108000"/>
-              </a:lnSpc>
-              <a:spcBef>
-                <a:spcPts val="0"/>
-              </a:spcBef>
-              <a:spcAft>
-                <a:spcPts val="200"/>
-              </a:spcAft>
-            </a:pPr>
-            <a:r>
-              <a:rPr sz="3000" b="1">
+            <a:off x="2807208" y="5084064"/>
+            <a:ext cx="1325880" cy="475488"/>
+          </a:xfrm>
+          <a:prstGeom prst="rect">
+            <a:avLst/>
+          </a:prstGeom>
+          <a:noFill/>
+        </p:spPr>
+        <p:txBody>
+          <a:bodyPr wrap="square" lIns="13716" tIns="13716" rIns="13716" bIns="13716" anchor="t">
+            <a:noAutofit/>
+          </a:bodyPr>
+          <a:lstStyle/>
+          <a:p>
+            <a:pPr algn="l">
+              <a:lnSpc>
+                <a:spcPct val="108000"/>
+              </a:lnSpc>
+              <a:spcBef>
+                <a:spcPts val="0"/>
+              </a:spcBef>
+              <a:spcAft>
+                <a:spcPts val="200"/>
+              </a:spcAft>
+            </a:pPr>
+            <a:r>
+              <a:rPr sz="2800" b="1">
                 <a:solidFill>
                   <a:srgbClr val="0B61C9"/>
                 </a:solidFill>
@@ -4970,7 +4738,7 @@
           <a:noFill/>
         </p:spPr>
         <p:txBody>
-          <a:bodyPr wrap="square" lIns="13716" rIns="13716" tIns="13716" bIns="13716" anchor="t">
+          <a:bodyPr wrap="square" lIns="13716" tIns="13716" rIns="13716" bIns="13716" anchor="t">
             <a:noAutofit/>
           </a:bodyPr>
           <a:lstStyle/>
@@ -5033,6 +4801,7 @@
           <a:lstStyle/>
           <a:p>
             <a:pPr algn="ctr"/>
+            <a:endParaRPr/>
           </a:p>
         </p:txBody>
       </p:sp>
@@ -5044,33 +4813,33 @@
         </p:nvSpPr>
         <p:spPr>
           <a:xfrm>
-            <a:off x="4764024" y="5120640"/>
-            <a:ext cx="1325880" cy="384048"/>
-          </a:xfrm>
-          <a:prstGeom prst="rect">
-            <a:avLst/>
-          </a:prstGeom>
-          <a:noFill/>
-        </p:spPr>
-        <p:txBody>
-          <a:bodyPr wrap="square" lIns="13716" rIns="13716" tIns="13716" bIns="13716" anchor="t">
-            <a:noAutofit/>
-          </a:bodyPr>
-          <a:lstStyle/>
-          <a:p>
-            <a:pPr algn="l">
-              <a:lnSpc>
-                <a:spcPct val="108000"/>
-              </a:lnSpc>
-              <a:spcBef>
-                <a:spcPts val="0"/>
-              </a:spcBef>
-              <a:spcAft>
-                <a:spcPts val="200"/>
-              </a:spcAft>
-            </a:pPr>
-            <a:r>
-              <a:rPr sz="3000" b="1">
+            <a:off x="4764024" y="5084064"/>
+            <a:ext cx="1325880" cy="475488"/>
+          </a:xfrm>
+          <a:prstGeom prst="rect">
+            <a:avLst/>
+          </a:prstGeom>
+          <a:noFill/>
+        </p:spPr>
+        <p:txBody>
+          <a:bodyPr wrap="square" lIns="13716" tIns="13716" rIns="13716" bIns="13716" anchor="t">
+            <a:noAutofit/>
+          </a:bodyPr>
+          <a:lstStyle/>
+          <a:p>
+            <a:pPr algn="l">
+              <a:lnSpc>
+                <a:spcPct val="108000"/>
+              </a:lnSpc>
+              <a:spcBef>
+                <a:spcPts val="0"/>
+              </a:spcBef>
+              <a:spcAft>
+                <a:spcPts val="200"/>
+              </a:spcAft>
+            </a:pPr>
+            <a:r>
+              <a:rPr sz="2800" b="1">
                 <a:solidFill>
                   <a:srgbClr val="0B61C9"/>
                 </a:solidFill>
@@ -5098,7 +4867,7 @@
           <a:noFill/>
         </p:spPr>
         <p:txBody>
-          <a:bodyPr wrap="square" lIns="13716" rIns="13716" tIns="13716" bIns="13716" anchor="t">
+          <a:bodyPr wrap="square" lIns="13716" tIns="13716" rIns="13716" bIns="13716" anchor="t">
             <a:noAutofit/>
           </a:bodyPr>
           <a:lstStyle/>
@@ -5257,6 +5026,7 @@
           <a:lstStyle/>
           <a:p>
             <a:pPr algn="ctr"/>
+            <a:endParaRPr/>
           </a:p>
         </p:txBody>
       </p:sp>
@@ -5286,6 +5056,7 @@
           <a:lstStyle/>
           <a:p>
             <a:pPr algn="ctr"/>
+            <a:endParaRPr/>
           </a:p>
         </p:txBody>
       </p:sp>
@@ -5306,7 +5077,7 @@
           <a:noFill/>
         </p:spPr>
         <p:txBody>
-          <a:bodyPr wrap="square" lIns="13716" rIns="13716" tIns="13716" bIns="13716" anchor="t">
+          <a:bodyPr wrap="square" lIns="13716" tIns="13716" rIns="13716" bIns="13716" anchor="t">
             <a:noAutofit/>
           </a:bodyPr>
           <a:lstStyle/>
@@ -5342,33 +5113,33 @@
         </p:nvSpPr>
         <p:spPr>
           <a:xfrm>
-            <a:off x="8668511" y="5998464"/>
-            <a:ext cx="4764024" cy="164591"/>
-          </a:xfrm>
-          <a:prstGeom prst="rect">
-            <a:avLst/>
-          </a:prstGeom>
-          <a:noFill/>
-        </p:spPr>
-        <p:txBody>
-          <a:bodyPr wrap="square" lIns="13716" rIns="13716" tIns="13716" bIns="13716" anchor="t">
-            <a:noAutofit/>
-          </a:bodyPr>
-          <a:lstStyle/>
-          <a:p>
-            <a:pPr algn="l">
-              <a:lnSpc>
-                <a:spcPct val="108000"/>
-              </a:lnSpc>
-              <a:spcBef>
-                <a:spcPts val="0"/>
-              </a:spcBef>
-              <a:spcAft>
-                <a:spcPts val="200"/>
-              </a:spcAft>
-            </a:pPr>
-            <a:r>
-              <a:rPr sz="1400" b="0">
+            <a:off x="8668511" y="5907024"/>
+            <a:ext cx="4764024" cy="310896"/>
+          </a:xfrm>
+          <a:prstGeom prst="rect">
+            <a:avLst/>
+          </a:prstGeom>
+          <a:noFill/>
+        </p:spPr>
+        <p:txBody>
+          <a:bodyPr wrap="square" lIns="13716" tIns="13716" rIns="13716" bIns="13716" anchor="t">
+            <a:noAutofit/>
+          </a:bodyPr>
+          <a:lstStyle/>
+          <a:p>
+            <a:pPr algn="l">
+              <a:lnSpc>
+                <a:spcPct val="108000"/>
+              </a:lnSpc>
+              <a:spcBef>
+                <a:spcPts val="0"/>
+              </a:spcBef>
+              <a:spcAft>
+                <a:spcPts val="200"/>
+              </a:spcAft>
+            </a:pPr>
+            <a:r>
+              <a:rPr sz="1400" b="0" dirty="0">
                 <a:solidFill>
                   <a:srgbClr val="6B6861"/>
                 </a:solidFill>
@@ -5405,6 +5176,7 @@
           <a:lstStyle/>
           <a:p>
             <a:pPr algn="ctr"/>
+            <a:endParaRPr/>
           </a:p>
         </p:txBody>
       </p:sp>
@@ -5434,6 +5206,7 @@
           <a:lstStyle/>
           <a:p>
             <a:pPr algn="ctr"/>
+            <a:endParaRPr/>
           </a:p>
         </p:txBody>
       </p:sp>
@@ -5454,7 +5227,7 @@
           <a:noFill/>
         </p:spPr>
         <p:txBody>
-          <a:bodyPr wrap="square" lIns="13716" rIns="13716" tIns="13716" bIns="13716" anchor="t">
+          <a:bodyPr wrap="square" lIns="13716" tIns="13716" rIns="13716" bIns="13716" anchor="t">
             <a:noAutofit/>
           </a:bodyPr>
           <a:lstStyle/>
@@ -5491,7 +5264,7 @@
 </file>
 
 <file path=ppt/slides/slide2.xml><?xml version="1.0" encoding="utf-8"?>
-<p:sld xmlns:a="http://schemas.openxmlformats.org/drawingml/2006/main" xmlns:p="http://schemas.openxmlformats.org/presentationml/2006/main" xmlns:r="http://schemas.openxmlformats.org/officeDocument/2006/relationships">
+<p:sld xmlns:a="http://schemas.openxmlformats.org/drawingml/2006/main" xmlns:r="http://schemas.openxmlformats.org/officeDocument/2006/relationships" xmlns:p="http://schemas.openxmlformats.org/presentationml/2006/main">
   <p:cSld>
     <p:spTree>
       <p:nvGrpSpPr>
@@ -5499,7 +5272,14 @@
         <p:cNvGrpSpPr/>
         <p:nvPr/>
       </p:nvGrpSpPr>
-      <p:grpSpPr/>
+      <p:grpSpPr>
+        <a:xfrm>
+          <a:off x="0" y="0"/>
+          <a:ext cx="0" cy="0"/>
+          <a:chOff x="0" y="0"/>
+          <a:chExt cx="0" cy="0"/>
+        </a:xfrm>
+      </p:grpSpPr>
       <p:pic>
         <p:nvPicPr>
           <p:cNvPr id="2" name="Picture 1" descr="template2_background.png"/>
@@ -5509,7 +5289,7 @@
           <p:nvPr/>
         </p:nvPicPr>
         <p:blipFill>
-          <a:blip r:embed="rId2"/>
+          <a:blip r:embed="rId3"/>
           <a:stretch>
             <a:fillRect/>
           </a:stretch>
@@ -5541,7 +5321,7 @@
           <a:noFill/>
         </p:spPr>
         <p:txBody>
-          <a:bodyPr wrap="square" lIns="13716" rIns="13716" tIns="13716" bIns="13716" anchor="t">
+          <a:bodyPr wrap="square" lIns="13716" tIns="13716" rIns="13716" bIns="13716" anchor="t">
             <a:noAutofit/>
           </a:bodyPr>
           <a:lstStyle/>
@@ -5595,6 +5375,7 @@
           <a:lstStyle/>
           <a:p>
             <a:pPr algn="ctr"/>
+            <a:endParaRPr/>
           </a:p>
         </p:txBody>
       </p:sp>
@@ -5615,7 +5396,7 @@
           <a:noFill/>
         </p:spPr>
         <p:txBody>
-          <a:bodyPr wrap="square" lIns="13716" rIns="13716" tIns="13716" bIns="13716" anchor="t">
+          <a:bodyPr wrap="square" lIns="13716" tIns="13716" rIns="13716" bIns="13716" anchor="t">
             <a:noAutofit/>
           </a:bodyPr>
           <a:lstStyle/>
@@ -5660,7 +5441,7 @@
           <a:noFill/>
         </p:spPr>
         <p:txBody>
-          <a:bodyPr wrap="square" lIns="13716" rIns="13716" tIns="13716" bIns="13716" anchor="t">
+          <a:bodyPr wrap="square" lIns="13716" tIns="13716" rIns="13716" bIns="13716" anchor="t">
             <a:noAutofit/>
           </a:bodyPr>
           <a:lstStyle/>
@@ -5696,7 +5477,7 @@
         </p:nvSpPr>
         <p:spPr>
           <a:xfrm>
-            <a:off x="685800" y="1161288"/>
+            <a:off x="685800" y="1156264"/>
             <a:ext cx="12710160" cy="384048"/>
           </a:xfrm>
           <a:prstGeom prst="rect">
@@ -5705,7 +5486,7 @@
           <a:noFill/>
         </p:spPr>
         <p:txBody>
-          <a:bodyPr wrap="square" lIns="13716" rIns="13716" tIns="13716" bIns="13716" anchor="t">
+          <a:bodyPr wrap="square" lIns="13716" tIns="13716" rIns="13716" bIns="13716" anchor="t">
             <a:noAutofit/>
           </a:bodyPr>
           <a:lstStyle/>
@@ -5759,6 +5540,7 @@
           <a:lstStyle/>
           <a:p>
             <a:pPr algn="ctr"/>
+            <a:endParaRPr/>
           </a:p>
         </p:txBody>
       </p:sp>
@@ -5779,7 +5561,7 @@
           <a:noFill/>
         </p:spPr>
         <p:txBody>
-          <a:bodyPr wrap="square" lIns="13716" rIns="13716" tIns="13716" bIns="13716" anchor="t">
+          <a:bodyPr wrap="square" lIns="13716" tIns="13716" rIns="13716" bIns="13716" anchor="t">
             <a:noAutofit/>
           </a:bodyPr>
           <a:lstStyle/>
@@ -5824,7 +5606,7 @@
           <a:noFill/>
         </p:spPr>
         <p:txBody>
-          <a:bodyPr wrap="square" lIns="13716" rIns="13716" tIns="13716" bIns="13716" anchor="t">
+          <a:bodyPr wrap="square" lIns="13716" tIns="13716" rIns="13716" bIns="13716" anchor="t">
             <a:noAutofit/>
           </a:bodyPr>
           <a:lstStyle/>
@@ -5869,7 +5651,7 @@
           <a:noFill/>
         </p:spPr>
         <p:txBody>
-          <a:bodyPr wrap="square" lIns="13716" rIns="13716" tIns="13716" bIns="13716" anchor="t">
+          <a:bodyPr wrap="square" lIns="13716" tIns="13716" rIns="13716" bIns="13716" anchor="t">
             <a:noAutofit/>
           </a:bodyPr>
           <a:lstStyle/>
@@ -5905,7 +5687,7 @@
         </p:nvSpPr>
         <p:spPr>
           <a:xfrm>
-            <a:off x="658368" y="1993392"/>
+            <a:off x="658368" y="2546053"/>
             <a:ext cx="2148840" cy="932688"/>
           </a:xfrm>
           <a:prstGeom prst="roundRect">
@@ -5932,6 +5714,7 @@
           <a:lstStyle/>
           <a:p>
             <a:pPr algn="ctr"/>
+            <a:endParaRPr/>
           </a:p>
         </p:txBody>
       </p:sp>
@@ -5943,7 +5726,7 @@
         </p:nvSpPr>
         <p:spPr>
           <a:xfrm>
-            <a:off x="658368" y="1993392"/>
+            <a:off x="658368" y="2546053"/>
             <a:ext cx="50292" cy="932688"/>
           </a:xfrm>
           <a:prstGeom prst="rect">
@@ -5961,6 +5744,7 @@
           <a:lstStyle/>
           <a:p>
             <a:pPr algn="ctr"/>
+            <a:endParaRPr/>
           </a:p>
         </p:txBody>
       </p:sp>
@@ -5972,7 +5756,7 @@
         </p:nvSpPr>
         <p:spPr>
           <a:xfrm>
-            <a:off x="841247" y="2112264"/>
+            <a:off x="841247" y="2664925"/>
             <a:ext cx="1819656" cy="310896"/>
           </a:xfrm>
           <a:prstGeom prst="rect">
@@ -5981,7 +5765,7 @@
           <a:noFill/>
         </p:spPr>
         <p:txBody>
-          <a:bodyPr wrap="square" lIns="13716" rIns="13716" tIns="13716" bIns="13716" anchor="t">
+          <a:bodyPr wrap="square" lIns="13716" tIns="13716" rIns="13716" bIns="13716" anchor="t">
             <a:noAutofit/>
           </a:bodyPr>
           <a:lstStyle/>
@@ -6017,7 +5801,7 @@
         </p:nvSpPr>
         <p:spPr>
           <a:xfrm>
-            <a:off x="841247" y="2505456"/>
+            <a:off x="841247" y="3058117"/>
             <a:ext cx="1837944" cy="329184"/>
           </a:xfrm>
           <a:prstGeom prst="rect">
@@ -6026,7 +5810,7 @@
           <a:noFill/>
         </p:spPr>
         <p:txBody>
-          <a:bodyPr wrap="square" lIns="13716" rIns="13716" tIns="13716" bIns="13716" anchor="t">
+          <a:bodyPr wrap="square" lIns="13716" tIns="13716" rIns="13716" bIns="13716" anchor="t">
             <a:noAutofit/>
           </a:bodyPr>
           <a:lstStyle/>
@@ -6062,7 +5846,7 @@
         </p:nvCxnSpPr>
         <p:spPr>
           <a:xfrm>
-            <a:off x="2834640" y="2459736"/>
+            <a:off x="2834640" y="3012397"/>
             <a:ext cx="475488" cy="0"/>
           </a:xfrm>
           <a:prstGeom prst="line">
@@ -6073,7 +5857,6 @@
               <a:srgbClr val="0B61C9"/>
             </a:solidFill>
             <a:tailEnd type="triangle" w="sm" len="sm"/>
-            <a:headEnd type="triangle" w="sm" len="sm"/>
           </a:ln>
         </p:spPr>
       </p:cxnSp>
@@ -6085,8 +5868,8 @@
         </p:nvSpPr>
         <p:spPr>
           <a:xfrm>
-            <a:off x="3310128" y="1664208"/>
-            <a:ext cx="7635240" cy="5166360"/>
+            <a:off x="3310128" y="1980732"/>
+            <a:ext cx="7635240" cy="4575816"/>
           </a:xfrm>
           <a:prstGeom prst="roundRect">
             <a:avLst/>
@@ -6105,6 +5888,7 @@
           <a:lstStyle/>
           <a:p>
             <a:pPr algn="ctr"/>
+            <a:endParaRPr/>
           </a:p>
         </p:txBody>
       </p:sp>
@@ -6116,7 +5900,7 @@
         </p:nvSpPr>
         <p:spPr>
           <a:xfrm>
-            <a:off x="3566160" y="1847088"/>
+            <a:off x="3566160" y="2399749"/>
             <a:ext cx="6995160" cy="228600"/>
           </a:xfrm>
           <a:prstGeom prst="rect">
@@ -6125,7 +5909,7 @@
           <a:noFill/>
         </p:spPr>
         <p:txBody>
-          <a:bodyPr wrap="square" lIns="13716" rIns="13716" tIns="13716" bIns="13716" anchor="t">
+          <a:bodyPr wrap="square" lIns="13716" tIns="13716" rIns="13716" bIns="13716" anchor="t">
             <a:noAutofit/>
           </a:bodyPr>
           <a:lstStyle/>
@@ -6161,7 +5945,7 @@
         </p:nvSpPr>
         <p:spPr>
           <a:xfrm>
-            <a:off x="3584448" y="2240280"/>
+            <a:off x="3584448" y="2792941"/>
             <a:ext cx="2084831" cy="786384"/>
           </a:xfrm>
           <a:prstGeom prst="roundRect">
@@ -6188,6 +5972,7 @@
           <a:lstStyle/>
           <a:p>
             <a:pPr algn="ctr"/>
+            <a:endParaRPr/>
           </a:p>
         </p:txBody>
       </p:sp>
@@ -6199,7 +5984,7 @@
         </p:nvSpPr>
         <p:spPr>
           <a:xfrm>
-            <a:off x="3584448" y="2240280"/>
+            <a:off x="3584448" y="2792941"/>
             <a:ext cx="50292" cy="786384"/>
           </a:xfrm>
           <a:prstGeom prst="rect">
@@ -6217,6 +6002,7 @@
           <a:lstStyle/>
           <a:p>
             <a:pPr algn="ctr"/>
+            <a:endParaRPr/>
           </a:p>
         </p:txBody>
       </p:sp>
@@ -6228,7 +6014,7 @@
         </p:nvSpPr>
         <p:spPr>
           <a:xfrm>
-            <a:off x="3767328" y="2359152"/>
+            <a:off x="3767328" y="2911813"/>
             <a:ext cx="1755648" cy="310896"/>
           </a:xfrm>
           <a:prstGeom prst="rect">
@@ -6237,7 +6023,7 @@
           <a:noFill/>
         </p:spPr>
         <p:txBody>
-          <a:bodyPr wrap="square" lIns="13716" rIns="13716" tIns="13716" bIns="13716" anchor="t">
+          <a:bodyPr wrap="square" lIns="13716" tIns="13716" rIns="13716" bIns="13716" anchor="t">
             <a:noAutofit/>
           </a:bodyPr>
           <a:lstStyle/>
@@ -6273,7 +6059,7 @@
         </p:nvSpPr>
         <p:spPr>
           <a:xfrm>
-            <a:off x="3767328" y="2752344"/>
+            <a:off x="3767328" y="3305005"/>
             <a:ext cx="1773935" cy="182879"/>
           </a:xfrm>
           <a:prstGeom prst="rect">
@@ -6282,7 +6068,7 @@
           <a:noFill/>
         </p:spPr>
         <p:txBody>
-          <a:bodyPr wrap="square" lIns="13716" rIns="13716" tIns="13716" bIns="13716" anchor="t">
+          <a:bodyPr wrap="square" lIns="13716" tIns="13716" rIns="13716" bIns="13716" anchor="t">
             <a:noAutofit/>
           </a:bodyPr>
           <a:lstStyle/>
@@ -6318,7 +6104,7 @@
         </p:nvSpPr>
         <p:spPr>
           <a:xfrm>
-            <a:off x="5989320" y="2240280"/>
+            <a:off x="5989320" y="2792941"/>
             <a:ext cx="2331720" cy="786384"/>
           </a:xfrm>
           <a:prstGeom prst="roundRect">
@@ -6345,6 +6131,7 @@
           <a:lstStyle/>
           <a:p>
             <a:pPr algn="ctr"/>
+            <a:endParaRPr/>
           </a:p>
         </p:txBody>
       </p:sp>
@@ -6356,7 +6143,7 @@
         </p:nvSpPr>
         <p:spPr>
           <a:xfrm>
-            <a:off x="5989320" y="2240280"/>
+            <a:off x="5989320" y="2792941"/>
             <a:ext cx="50292" cy="786384"/>
           </a:xfrm>
           <a:prstGeom prst="rect">
@@ -6374,6 +6161,7 @@
           <a:lstStyle/>
           <a:p>
             <a:pPr algn="ctr"/>
+            <a:endParaRPr/>
           </a:p>
         </p:txBody>
       </p:sp>
@@ -6385,7 +6173,7 @@
         </p:nvSpPr>
         <p:spPr>
           <a:xfrm>
-            <a:off x="6172200" y="2359152"/>
+            <a:off x="6172200" y="2911813"/>
             <a:ext cx="2002536" cy="310896"/>
           </a:xfrm>
           <a:prstGeom prst="rect">
@@ -6394,7 +6182,7 @@
           <a:noFill/>
         </p:spPr>
         <p:txBody>
-          <a:bodyPr wrap="square" lIns="13716" rIns="13716" tIns="13716" bIns="13716" anchor="t">
+          <a:bodyPr wrap="square" lIns="13716" tIns="13716" rIns="13716" bIns="13716" anchor="t">
             <a:noAutofit/>
           </a:bodyPr>
           <a:lstStyle/>
@@ -6430,7 +6218,7 @@
         </p:nvSpPr>
         <p:spPr>
           <a:xfrm>
-            <a:off x="6172200" y="2752344"/>
+            <a:off x="6172200" y="3305005"/>
             <a:ext cx="2020824" cy="182879"/>
           </a:xfrm>
           <a:prstGeom prst="rect">
@@ -6439,7 +6227,7 @@
           <a:noFill/>
         </p:spPr>
         <p:txBody>
-          <a:bodyPr wrap="square" lIns="13716" rIns="13716" tIns="13716" bIns="13716" anchor="t">
+          <a:bodyPr wrap="square" lIns="13716" tIns="13716" rIns="13716" bIns="13716" anchor="t">
             <a:noAutofit/>
           </a:bodyPr>
           <a:lstStyle/>
@@ -6475,7 +6263,7 @@
         </p:nvSpPr>
         <p:spPr>
           <a:xfrm>
-            <a:off x="8659368" y="2240280"/>
+            <a:off x="8659368" y="2792941"/>
             <a:ext cx="1984248" cy="786384"/>
           </a:xfrm>
           <a:prstGeom prst="roundRect">
@@ -6502,6 +6290,7 @@
           <a:lstStyle/>
           <a:p>
             <a:pPr algn="ctr"/>
+            <a:endParaRPr/>
           </a:p>
         </p:txBody>
       </p:sp>
@@ -6513,7 +6302,7 @@
         </p:nvSpPr>
         <p:spPr>
           <a:xfrm>
-            <a:off x="8659368" y="2240280"/>
+            <a:off x="8659368" y="2792941"/>
             <a:ext cx="50292" cy="786384"/>
           </a:xfrm>
           <a:prstGeom prst="rect">
@@ -6531,6 +6320,7 @@
           <a:lstStyle/>
           <a:p>
             <a:pPr algn="ctr"/>
+            <a:endParaRPr/>
           </a:p>
         </p:txBody>
       </p:sp>
@@ -6542,7 +6332,7 @@
         </p:nvSpPr>
         <p:spPr>
           <a:xfrm>
-            <a:off x="8842248" y="2359152"/>
+            <a:off x="8842248" y="2911813"/>
             <a:ext cx="1655064" cy="310896"/>
           </a:xfrm>
           <a:prstGeom prst="rect">
@@ -6551,7 +6341,7 @@
           <a:noFill/>
         </p:spPr>
         <p:txBody>
-          <a:bodyPr wrap="square" lIns="13716" rIns="13716" tIns="13716" bIns="13716" anchor="t">
+          <a:bodyPr wrap="square" lIns="13716" tIns="13716" rIns="13716" bIns="13716" anchor="t">
             <a:noAutofit/>
           </a:bodyPr>
           <a:lstStyle/>
@@ -6587,7 +6377,7 @@
         </p:nvSpPr>
         <p:spPr>
           <a:xfrm>
-            <a:off x="8842248" y="2752344"/>
+            <a:off x="8842248" y="3305005"/>
             <a:ext cx="1673351" cy="182879"/>
           </a:xfrm>
           <a:prstGeom prst="rect">
@@ -6596,7 +6386,7 @@
           <a:noFill/>
         </p:spPr>
         <p:txBody>
-          <a:bodyPr wrap="square" lIns="13716" rIns="13716" tIns="13716" bIns="13716" anchor="t">
+          <a:bodyPr wrap="square" lIns="13716" tIns="13716" rIns="13716" bIns="13716" anchor="t">
             <a:noAutofit/>
           </a:bodyPr>
           <a:lstStyle/>
@@ -6632,7 +6422,7 @@
         </p:nvCxnSpPr>
         <p:spPr>
           <a:xfrm>
-            <a:off x="5696712" y="2633472"/>
+            <a:off x="5696712" y="3186133"/>
             <a:ext cx="246888" cy="0"/>
           </a:xfrm>
           <a:prstGeom prst="line">
@@ -6654,7 +6444,7 @@
         </p:nvCxnSpPr>
         <p:spPr>
           <a:xfrm>
-            <a:off x="8339327" y="2633472"/>
+            <a:off x="8339327" y="3186133"/>
             <a:ext cx="283465" cy="0"/>
           </a:xfrm>
           <a:prstGeom prst="line">
@@ -6676,7 +6466,7 @@
         </p:nvSpPr>
         <p:spPr>
           <a:xfrm>
-            <a:off x="3584448" y="3456432"/>
+            <a:off x="3584448" y="4009093"/>
             <a:ext cx="2084831" cy="786384"/>
           </a:xfrm>
           <a:prstGeom prst="roundRect">
@@ -6703,6 +6493,7 @@
           <a:lstStyle/>
           <a:p>
             <a:pPr algn="ctr"/>
+            <a:endParaRPr/>
           </a:p>
         </p:txBody>
       </p:sp>
@@ -6714,7 +6505,7 @@
         </p:nvSpPr>
         <p:spPr>
           <a:xfrm>
-            <a:off x="3584448" y="3456432"/>
+            <a:off x="3584448" y="4009093"/>
             <a:ext cx="50292" cy="786384"/>
           </a:xfrm>
           <a:prstGeom prst="rect">
@@ -6732,6 +6523,7 @@
           <a:lstStyle/>
           <a:p>
             <a:pPr algn="ctr"/>
+            <a:endParaRPr/>
           </a:p>
         </p:txBody>
       </p:sp>
@@ -6743,7 +6535,7 @@
         </p:nvSpPr>
         <p:spPr>
           <a:xfrm>
-            <a:off x="3767328" y="3575303"/>
+            <a:off x="3767328" y="4127964"/>
             <a:ext cx="1755648" cy="310896"/>
           </a:xfrm>
           <a:prstGeom prst="rect">
@@ -6752,7 +6544,7 @@
           <a:noFill/>
         </p:spPr>
         <p:txBody>
-          <a:bodyPr wrap="square" lIns="13716" rIns="13716" tIns="13716" bIns="13716" anchor="t">
+          <a:bodyPr wrap="square" lIns="13716" tIns="13716" rIns="13716" bIns="13716" anchor="t">
             <a:noAutofit/>
           </a:bodyPr>
           <a:lstStyle/>
@@ -6788,7 +6580,7 @@
         </p:nvSpPr>
         <p:spPr>
           <a:xfrm>
-            <a:off x="3767328" y="3968496"/>
+            <a:off x="3767328" y="4521157"/>
             <a:ext cx="1773935" cy="182879"/>
           </a:xfrm>
           <a:prstGeom prst="rect">
@@ -6797,7 +6589,7 @@
           <a:noFill/>
         </p:spPr>
         <p:txBody>
-          <a:bodyPr wrap="square" lIns="13716" rIns="13716" tIns="13716" bIns="13716" anchor="t">
+          <a:bodyPr wrap="square" lIns="13716" tIns="13716" rIns="13716" bIns="13716" anchor="t">
             <a:noAutofit/>
           </a:bodyPr>
           <a:lstStyle/>
@@ -6833,7 +6625,7 @@
         </p:nvSpPr>
         <p:spPr>
           <a:xfrm>
-            <a:off x="5989320" y="3456432"/>
+            <a:off x="5989320" y="4009093"/>
             <a:ext cx="2331720" cy="786384"/>
           </a:xfrm>
           <a:prstGeom prst="roundRect">
@@ -6860,6 +6652,7 @@
           <a:lstStyle/>
           <a:p>
             <a:pPr algn="ctr"/>
+            <a:endParaRPr/>
           </a:p>
         </p:txBody>
       </p:sp>
@@ -6871,7 +6664,7 @@
         </p:nvSpPr>
         <p:spPr>
           <a:xfrm>
-            <a:off x="5989320" y="3456432"/>
+            <a:off x="5989320" y="4009093"/>
             <a:ext cx="50292" cy="786384"/>
           </a:xfrm>
           <a:prstGeom prst="rect">
@@ -6889,6 +6682,7 @@
           <a:lstStyle/>
           <a:p>
             <a:pPr algn="ctr"/>
+            <a:endParaRPr/>
           </a:p>
         </p:txBody>
       </p:sp>
@@ -6900,7 +6694,7 @@
         </p:nvSpPr>
         <p:spPr>
           <a:xfrm>
-            <a:off x="6172200" y="3575303"/>
+            <a:off x="6172200" y="4127964"/>
             <a:ext cx="2002536" cy="310896"/>
           </a:xfrm>
           <a:prstGeom prst="rect">
@@ -6909,7 +6703,7 @@
           <a:noFill/>
         </p:spPr>
         <p:txBody>
-          <a:bodyPr wrap="square" lIns="13716" rIns="13716" tIns="13716" bIns="13716" anchor="t">
+          <a:bodyPr wrap="square" lIns="13716" tIns="13716" rIns="13716" bIns="13716" anchor="t">
             <a:noAutofit/>
           </a:bodyPr>
           <a:lstStyle/>
@@ -6945,7 +6739,7 @@
         </p:nvSpPr>
         <p:spPr>
           <a:xfrm>
-            <a:off x="6172200" y="3968496"/>
+            <a:off x="6172200" y="4521157"/>
             <a:ext cx="2020824" cy="182879"/>
           </a:xfrm>
           <a:prstGeom prst="rect">
@@ -6954,7 +6748,7 @@
           <a:noFill/>
         </p:spPr>
         <p:txBody>
-          <a:bodyPr wrap="square" lIns="13716" rIns="13716" tIns="13716" bIns="13716" anchor="t">
+          <a:bodyPr wrap="square" lIns="13716" tIns="13716" rIns="13716" bIns="13716" anchor="t">
             <a:noAutofit/>
           </a:bodyPr>
           <a:lstStyle/>
@@ -6990,7 +6784,7 @@
         </p:nvSpPr>
         <p:spPr>
           <a:xfrm>
-            <a:off x="8659368" y="3456432"/>
+            <a:off x="8659368" y="4009093"/>
             <a:ext cx="1984248" cy="786384"/>
           </a:xfrm>
           <a:prstGeom prst="roundRect">
@@ -7017,6 +6811,7 @@
           <a:lstStyle/>
           <a:p>
             <a:pPr algn="ctr"/>
+            <a:endParaRPr/>
           </a:p>
         </p:txBody>
       </p:sp>
@@ -7028,7 +6823,7 @@
         </p:nvSpPr>
         <p:spPr>
           <a:xfrm>
-            <a:off x="8659368" y="3456432"/>
+            <a:off x="8659368" y="4009093"/>
             <a:ext cx="50292" cy="786384"/>
           </a:xfrm>
           <a:prstGeom prst="rect">
@@ -7046,6 +6841,7 @@
           <a:lstStyle/>
           <a:p>
             <a:pPr algn="ctr"/>
+            <a:endParaRPr/>
           </a:p>
         </p:txBody>
       </p:sp>
@@ -7057,7 +6853,7 @@
         </p:nvSpPr>
         <p:spPr>
           <a:xfrm>
-            <a:off x="8842248" y="3575303"/>
+            <a:off x="8842248" y="4127964"/>
             <a:ext cx="1655064" cy="310896"/>
           </a:xfrm>
           <a:prstGeom prst="rect">
@@ -7066,7 +6862,7 @@
           <a:noFill/>
         </p:spPr>
         <p:txBody>
-          <a:bodyPr wrap="square" lIns="13716" rIns="13716" tIns="13716" bIns="13716" anchor="t">
+          <a:bodyPr wrap="square" lIns="13716" tIns="13716" rIns="13716" bIns="13716" anchor="t">
             <a:noAutofit/>
           </a:bodyPr>
           <a:lstStyle/>
@@ -7102,7 +6898,7 @@
         </p:nvSpPr>
         <p:spPr>
           <a:xfrm>
-            <a:off x="8842248" y="3968496"/>
+            <a:off x="8842248" y="4521157"/>
             <a:ext cx="1673351" cy="182879"/>
           </a:xfrm>
           <a:prstGeom prst="rect">
@@ -7111,7 +6907,7 @@
           <a:noFill/>
         </p:spPr>
         <p:txBody>
-          <a:bodyPr wrap="square" lIns="13716" rIns="13716" tIns="13716" bIns="13716" anchor="t">
+          <a:bodyPr wrap="square" lIns="13716" tIns="13716" rIns="13716" bIns="13716" anchor="t">
             <a:noAutofit/>
           </a:bodyPr>
           <a:lstStyle/>
@@ -7139,50 +6935,6 @@
           </a:p>
         </p:txBody>
       </p:sp>
-      <p:cxnSp>
-        <p:nvCxnSpPr>
-          <p:cNvPr id="45" name="Connector 44"/>
-          <p:cNvCxnSpPr/>
-          <p:nvPr/>
-        </p:nvCxnSpPr>
-        <p:spPr>
-          <a:xfrm>
-            <a:off x="9646920" y="3054096"/>
-            <a:ext cx="0" cy="365760"/>
-          </a:xfrm>
-          <a:prstGeom prst="line">
-            <a:avLst/>
-          </a:prstGeom>
-          <a:ln w="21590">
-            <a:solidFill>
-              <a:srgbClr val="138F98"/>
-            </a:solidFill>
-            <a:tailEnd type="triangle" w="sm" len="sm"/>
-          </a:ln>
-        </p:spPr>
-      </p:cxnSp>
-      <p:cxnSp>
-        <p:nvCxnSpPr>
-          <p:cNvPr id="46" name="Connector 45"/>
-          <p:cNvCxnSpPr/>
-          <p:nvPr/>
-        </p:nvCxnSpPr>
-        <p:spPr>
-          <a:xfrm flipH="1">
-            <a:off x="8357616" y="3849624"/>
-            <a:ext cx="265176" cy="0"/>
-          </a:xfrm>
-          <a:prstGeom prst="line">
-            <a:avLst/>
-          </a:prstGeom>
-          <a:ln w="21590">
-            <a:solidFill>
-              <a:srgbClr val="138F98"/>
-            </a:solidFill>
-            <a:tailEnd type="triangle" w="sm" len="sm"/>
-          </a:ln>
-        </p:spPr>
-      </p:cxnSp>
       <p:cxnSp>
         <p:nvCxnSpPr>
           <p:cNvPr id="47" name="Connector 46"/>
@@ -7191,7 +6943,7 @@
         </p:nvCxnSpPr>
         <p:spPr>
           <a:xfrm flipH="1">
-            <a:off x="5696712" y="3849624"/>
+            <a:off x="5696712" y="4402285"/>
             <a:ext cx="246888" cy="0"/>
           </a:xfrm>
           <a:prstGeom prst="line">
@@ -7213,7 +6965,7 @@
         </p:nvSpPr>
         <p:spPr>
           <a:xfrm>
-            <a:off x="5989320" y="4800600"/>
+            <a:off x="5989320" y="5353261"/>
             <a:ext cx="2331720" cy="786384"/>
           </a:xfrm>
           <a:prstGeom prst="roundRect">
@@ -7240,6 +6992,7 @@
           <a:lstStyle/>
           <a:p>
             <a:pPr algn="ctr"/>
+            <a:endParaRPr/>
           </a:p>
         </p:txBody>
       </p:sp>
@@ -7251,7 +7004,7 @@
         </p:nvSpPr>
         <p:spPr>
           <a:xfrm>
-            <a:off x="5989320" y="4800600"/>
+            <a:off x="5989320" y="5353261"/>
             <a:ext cx="50292" cy="786384"/>
           </a:xfrm>
           <a:prstGeom prst="rect">
@@ -7269,6 +7022,7 @@
           <a:lstStyle/>
           <a:p>
             <a:pPr algn="ctr"/>
+            <a:endParaRPr/>
           </a:p>
         </p:txBody>
       </p:sp>
@@ -7280,7 +7034,7 @@
         </p:nvSpPr>
         <p:spPr>
           <a:xfrm>
-            <a:off x="6172200" y="4919472"/>
+            <a:off x="6172200" y="5472133"/>
             <a:ext cx="2002536" cy="310896"/>
           </a:xfrm>
           <a:prstGeom prst="rect">
@@ -7289,7 +7043,7 @@
           <a:noFill/>
         </p:spPr>
         <p:txBody>
-          <a:bodyPr wrap="square" lIns="13716" rIns="13716" tIns="13716" bIns="13716" anchor="t">
+          <a:bodyPr wrap="square" lIns="13716" tIns="13716" rIns="13716" bIns="13716" anchor="t">
             <a:noAutofit/>
           </a:bodyPr>
           <a:lstStyle/>
@@ -7325,7 +7079,7 @@
         </p:nvSpPr>
         <p:spPr>
           <a:xfrm>
-            <a:off x="6172200" y="5312664"/>
+            <a:off x="6172200" y="5865325"/>
             <a:ext cx="2020824" cy="182879"/>
           </a:xfrm>
           <a:prstGeom prst="rect">
@@ -7334,7 +7088,7 @@
           <a:noFill/>
         </p:spPr>
         <p:txBody>
-          <a:bodyPr wrap="square" lIns="13716" rIns="13716" tIns="13716" bIns="13716" anchor="t">
+          <a:bodyPr wrap="square" lIns="13716" tIns="13716" rIns="13716" bIns="13716" anchor="t">
             <a:noAutofit/>
           </a:bodyPr>
           <a:lstStyle/>
@@ -7362,29 +7116,6 @@
           </a:p>
         </p:txBody>
       </p:sp>
-      <p:cxnSp>
-        <p:nvCxnSpPr>
-          <p:cNvPr id="52" name="Connector 51"/>
-          <p:cNvCxnSpPr/>
-          <p:nvPr/>
-        </p:nvCxnSpPr>
-        <p:spPr>
-          <a:xfrm>
-            <a:off x="7315200" y="4270248"/>
-            <a:ext cx="0" cy="484632"/>
-          </a:xfrm>
-          <a:prstGeom prst="line">
-            <a:avLst/>
-          </a:prstGeom>
-          <a:ln w="21590">
-            <a:solidFill>
-              <a:srgbClr val="0B61C9"/>
-            </a:solidFill>
-            <a:tailEnd type="triangle" w="sm" len="sm"/>
-            <a:headEnd type="triangle" w="sm" len="sm"/>
-          </a:ln>
-        </p:spPr>
-      </p:cxnSp>
       <p:sp>
         <p:nvSpPr>
           <p:cNvPr id="53" name="Rounded Rectangle 52"/>
@@ -7393,7 +7124,7 @@
         </p:nvSpPr>
         <p:spPr>
           <a:xfrm>
-            <a:off x="8659368" y="4800600"/>
+            <a:off x="8659368" y="5353261"/>
             <a:ext cx="1984248" cy="786384"/>
           </a:xfrm>
           <a:prstGeom prst="roundRect">
@@ -7420,6 +7151,7 @@
           <a:lstStyle/>
           <a:p>
             <a:pPr algn="ctr"/>
+            <a:endParaRPr/>
           </a:p>
         </p:txBody>
       </p:sp>
@@ -7431,7 +7163,7 @@
         </p:nvSpPr>
         <p:spPr>
           <a:xfrm>
-            <a:off x="8659368" y="4800600"/>
+            <a:off x="8659368" y="5353261"/>
             <a:ext cx="50292" cy="786384"/>
           </a:xfrm>
           <a:prstGeom prst="rect">
@@ -7449,6 +7181,7 @@
           <a:lstStyle/>
           <a:p>
             <a:pPr algn="ctr"/>
+            <a:endParaRPr/>
           </a:p>
         </p:txBody>
       </p:sp>
@@ -7460,7 +7193,7 @@
         </p:nvSpPr>
         <p:spPr>
           <a:xfrm>
-            <a:off x="8842248" y="4919472"/>
+            <a:off x="8842248" y="5472133"/>
             <a:ext cx="1655064" cy="310896"/>
           </a:xfrm>
           <a:prstGeom prst="rect">
@@ -7469,7 +7202,7 @@
           <a:noFill/>
         </p:spPr>
         <p:txBody>
-          <a:bodyPr wrap="square" lIns="13716" rIns="13716" tIns="13716" bIns="13716" anchor="t">
+          <a:bodyPr wrap="square" lIns="13716" tIns="13716" rIns="13716" bIns="13716" anchor="t">
             <a:noAutofit/>
           </a:bodyPr>
           <a:lstStyle/>
@@ -7505,7 +7238,7 @@
         </p:nvSpPr>
         <p:spPr>
           <a:xfrm>
-            <a:off x="8842248" y="5312664"/>
+            <a:off x="8842248" y="5865325"/>
             <a:ext cx="1673351" cy="182879"/>
           </a:xfrm>
           <a:prstGeom prst="rect">
@@ -7514,7 +7247,7 @@
           <a:noFill/>
         </p:spPr>
         <p:txBody>
-          <a:bodyPr wrap="square" lIns="13716" rIns="13716" tIns="13716" bIns="13716" anchor="t">
+          <a:bodyPr wrap="square" lIns="13716" tIns="13716" rIns="13716" bIns="13716" anchor="t">
             <a:noAutofit/>
           </a:bodyPr>
           <a:lstStyle/>
@@ -7542,29 +7275,6 @@
           </a:p>
         </p:txBody>
       </p:sp>
-      <p:cxnSp>
-        <p:nvCxnSpPr>
-          <p:cNvPr id="57" name="Connector 56"/>
-          <p:cNvCxnSpPr/>
-          <p:nvPr/>
-        </p:nvCxnSpPr>
-        <p:spPr>
-          <a:xfrm>
-            <a:off x="9646920" y="4270248"/>
-            <a:ext cx="0" cy="484632"/>
-          </a:xfrm>
-          <a:prstGeom prst="line">
-            <a:avLst/>
-          </a:prstGeom>
-          <a:ln w="21590">
-            <a:solidFill>
-              <a:srgbClr val="A77722"/>
-            </a:solidFill>
-            <a:prstDash val="dash"/>
-            <a:tailEnd type="triangle" w="sm" len="sm"/>
-          </a:ln>
-        </p:spPr>
-      </p:cxnSp>
       <p:sp>
         <p:nvSpPr>
           <p:cNvPr id="58" name="Rounded Rectangle 57"/>
@@ -7573,7 +7283,7 @@
         </p:nvSpPr>
         <p:spPr>
           <a:xfrm>
-            <a:off x="11384280" y="2249424"/>
+            <a:off x="11384280" y="2802085"/>
             <a:ext cx="2578608" cy="786384"/>
           </a:xfrm>
           <a:prstGeom prst="roundRect">
@@ -7600,6 +7310,7 @@
           <a:lstStyle/>
           <a:p>
             <a:pPr algn="ctr"/>
+            <a:endParaRPr/>
           </a:p>
         </p:txBody>
       </p:sp>
@@ -7611,7 +7322,7 @@
         </p:nvSpPr>
         <p:spPr>
           <a:xfrm>
-            <a:off x="11384280" y="2249424"/>
+            <a:off x="11384280" y="2802085"/>
             <a:ext cx="50292" cy="786384"/>
           </a:xfrm>
           <a:prstGeom prst="rect">
@@ -7629,6 +7340,7 @@
           <a:lstStyle/>
           <a:p>
             <a:pPr algn="ctr"/>
+            <a:endParaRPr/>
           </a:p>
         </p:txBody>
       </p:sp>
@@ -7640,7 +7352,7 @@
         </p:nvSpPr>
         <p:spPr>
           <a:xfrm>
-            <a:off x="11567159" y="2368296"/>
+            <a:off x="11567159" y="2920957"/>
             <a:ext cx="2249424" cy="310896"/>
           </a:xfrm>
           <a:prstGeom prst="rect">
@@ -7649,7 +7361,7 @@
           <a:noFill/>
         </p:spPr>
         <p:txBody>
-          <a:bodyPr wrap="square" lIns="13716" rIns="13716" tIns="13716" bIns="13716" anchor="t">
+          <a:bodyPr wrap="square" lIns="13716" tIns="13716" rIns="13716" bIns="13716" anchor="t">
             <a:noAutofit/>
           </a:bodyPr>
           <a:lstStyle/>
@@ -7685,7 +7397,7 @@
         </p:nvSpPr>
         <p:spPr>
           <a:xfrm>
-            <a:off x="11567159" y="2761488"/>
+            <a:off x="11567159" y="3314149"/>
             <a:ext cx="2267712" cy="182879"/>
           </a:xfrm>
           <a:prstGeom prst="rect">
@@ -7694,7 +7406,7 @@
           <a:noFill/>
         </p:spPr>
         <p:txBody>
-          <a:bodyPr wrap="square" lIns="13716" rIns="13716" tIns="13716" bIns="13716" anchor="t">
+          <a:bodyPr wrap="square" lIns="13716" tIns="13716" rIns="13716" bIns="13716" anchor="t">
             <a:noAutofit/>
           </a:bodyPr>
           <a:lstStyle/>
@@ -7730,7 +7442,7 @@
         </p:nvCxnSpPr>
         <p:spPr>
           <a:xfrm>
-            <a:off x="10661904" y="2633472"/>
+            <a:off x="10661904" y="3186133"/>
             <a:ext cx="676656" cy="0"/>
           </a:xfrm>
           <a:prstGeom prst="line">
@@ -7742,7 +7454,6 @@
             </a:solidFill>
             <a:prstDash val="dash"/>
             <a:tailEnd type="triangle" w="sm" len="sm"/>
-            <a:headEnd type="triangle" w="sm" len="sm"/>
           </a:ln>
         </p:spPr>
       </p:cxnSp>
@@ -7754,7 +7465,7 @@
         </p:nvSpPr>
         <p:spPr>
           <a:xfrm>
-            <a:off x="11375136" y="3236976"/>
+            <a:off x="11375136" y="3789637"/>
             <a:ext cx="2514600" cy="640080"/>
           </a:xfrm>
           <a:prstGeom prst="rect">
@@ -7763,7 +7474,7 @@
           <a:noFill/>
         </p:spPr>
         <p:txBody>
-          <a:bodyPr wrap="square" lIns="13716" rIns="13716" tIns="13716" bIns="13716" anchor="t">
+          <a:bodyPr wrap="square" lIns="13716" tIns="13716" rIns="13716" bIns="13716" anchor="t">
             <a:noAutofit/>
           </a:bodyPr>
           <a:lstStyle/>
@@ -7839,6 +7550,7 @@
           <a:lstStyle/>
           <a:p>
             <a:pPr algn="ctr"/>
+            <a:endParaRPr/>
           </a:p>
         </p:txBody>
       </p:sp>
@@ -7868,6 +7580,7 @@
           <a:lstStyle/>
           <a:p>
             <a:pPr algn="ctr"/>
+            <a:endParaRPr/>
           </a:p>
         </p:txBody>
       </p:sp>
@@ -7888,7 +7601,7 @@
           <a:noFill/>
         </p:spPr>
         <p:txBody>
-          <a:bodyPr wrap="square" lIns="13716" rIns="13716" tIns="13716" bIns="13716" anchor="t">
+          <a:bodyPr wrap="square" lIns="13716" tIns="13716" rIns="13716" bIns="13716" anchor="t">
             <a:noAutofit/>
           </a:bodyPr>
           <a:lstStyle/>
@@ -7916,6 +7629,180 @@
           </a:p>
         </p:txBody>
       </p:sp>
+      <p:cxnSp>
+        <p:nvCxnSpPr>
+          <p:cNvPr id="67" name="Connector 66"/>
+          <p:cNvCxnSpPr/>
+          <p:nvPr/>
+        </p:nvCxnSpPr>
+        <p:spPr>
+          <a:xfrm>
+            <a:off x="9646920" y="3606757"/>
+            <a:ext cx="0" cy="155448"/>
+          </a:xfrm>
+          <a:prstGeom prst="line">
+            <a:avLst/>
+          </a:prstGeom>
+          <a:ln w="21590">
+            <a:solidFill>
+              <a:srgbClr val="138F98"/>
+            </a:solidFill>
+          </a:ln>
+        </p:spPr>
+      </p:cxnSp>
+      <p:cxnSp>
+        <p:nvCxnSpPr>
+          <p:cNvPr id="68" name="Connector 67"/>
+          <p:cNvCxnSpPr/>
+          <p:nvPr/>
+        </p:nvCxnSpPr>
+        <p:spPr>
+          <a:xfrm flipH="1">
+            <a:off x="7150608" y="3762205"/>
+            <a:ext cx="2496312" cy="0"/>
+          </a:xfrm>
+          <a:prstGeom prst="line">
+            <a:avLst/>
+          </a:prstGeom>
+          <a:ln w="21590">
+            <a:solidFill>
+              <a:srgbClr val="138F98"/>
+            </a:solidFill>
+          </a:ln>
+        </p:spPr>
+      </p:cxnSp>
+      <p:cxnSp>
+        <p:nvCxnSpPr>
+          <p:cNvPr id="69" name="Connector 68"/>
+          <p:cNvCxnSpPr/>
+          <p:nvPr/>
+        </p:nvCxnSpPr>
+        <p:spPr>
+          <a:xfrm>
+            <a:off x="7150608" y="3762205"/>
+            <a:ext cx="0" cy="210312"/>
+          </a:xfrm>
+          <a:prstGeom prst="line">
+            <a:avLst/>
+          </a:prstGeom>
+          <a:ln w="21590">
+            <a:solidFill>
+              <a:srgbClr val="138F98"/>
+            </a:solidFill>
+            <a:tailEnd type="triangle" w="sm" len="sm"/>
+          </a:ln>
+        </p:spPr>
+      </p:cxnSp>
+      <p:cxnSp>
+        <p:nvCxnSpPr>
+          <p:cNvPr id="70" name="Connector 69"/>
+          <p:cNvCxnSpPr/>
+          <p:nvPr/>
+        </p:nvCxnSpPr>
+        <p:spPr>
+          <a:xfrm>
+            <a:off x="8357616" y="4402285"/>
+            <a:ext cx="265176" cy="0"/>
+          </a:xfrm>
+          <a:prstGeom prst="line">
+            <a:avLst/>
+          </a:prstGeom>
+          <a:ln w="21590">
+            <a:solidFill>
+              <a:srgbClr val="138F98"/>
+            </a:solidFill>
+            <a:tailEnd type="triangle" w="sm" len="sm"/>
+          </a:ln>
+        </p:spPr>
+      </p:cxnSp>
+      <p:cxnSp>
+        <p:nvCxnSpPr>
+          <p:cNvPr id="71" name="Connector 70"/>
+          <p:cNvCxnSpPr/>
+          <p:nvPr/>
+        </p:nvCxnSpPr>
+        <p:spPr>
+          <a:xfrm>
+            <a:off x="9646920" y="4822909"/>
+            <a:ext cx="0" cy="283464"/>
+          </a:xfrm>
+          <a:prstGeom prst="line">
+            <a:avLst/>
+          </a:prstGeom>
+          <a:ln w="21590">
+            <a:solidFill>
+              <a:srgbClr val="0B61C9"/>
+            </a:solidFill>
+            <a:headEnd type="triangle" w="sm" len="sm"/>
+          </a:ln>
+        </p:spPr>
+      </p:cxnSp>
+      <p:cxnSp>
+        <p:nvCxnSpPr>
+          <p:cNvPr id="72" name="Connector 71"/>
+          <p:cNvCxnSpPr/>
+          <p:nvPr/>
+        </p:nvCxnSpPr>
+        <p:spPr>
+          <a:xfrm flipH="1">
+            <a:off x="7150608" y="5106373"/>
+            <a:ext cx="2496312" cy="0"/>
+          </a:xfrm>
+          <a:prstGeom prst="line">
+            <a:avLst/>
+          </a:prstGeom>
+          <a:ln w="21590">
+            <a:solidFill>
+              <a:srgbClr val="0B61C9"/>
+            </a:solidFill>
+          </a:ln>
+        </p:spPr>
+      </p:cxnSp>
+      <p:cxnSp>
+        <p:nvCxnSpPr>
+          <p:cNvPr id="73" name="Connector 72"/>
+          <p:cNvCxnSpPr/>
+          <p:nvPr/>
+        </p:nvCxnSpPr>
+        <p:spPr>
+          <a:xfrm>
+            <a:off x="7150608" y="5106373"/>
+            <a:ext cx="0" cy="201168"/>
+          </a:xfrm>
+          <a:prstGeom prst="line">
+            <a:avLst/>
+          </a:prstGeom>
+          <a:ln w="21590">
+            <a:solidFill>
+              <a:srgbClr val="0B61C9"/>
+            </a:solidFill>
+            <a:tailEnd type="triangle" w="sm" len="sm"/>
+          </a:ln>
+        </p:spPr>
+      </p:cxnSp>
+      <p:cxnSp>
+        <p:nvCxnSpPr>
+          <p:cNvPr id="74" name="Connector 73"/>
+          <p:cNvCxnSpPr/>
+          <p:nvPr/>
+        </p:nvCxnSpPr>
+        <p:spPr>
+          <a:xfrm flipH="1">
+            <a:off x="8357616" y="5746453"/>
+            <a:ext cx="265176" cy="0"/>
+          </a:xfrm>
+          <a:prstGeom prst="line">
+            <a:avLst/>
+          </a:prstGeom>
+          <a:ln w="21590">
+            <a:solidFill>
+              <a:srgbClr val="A77722"/>
+            </a:solidFill>
+            <a:prstDash val="dash"/>
+            <a:tailEnd type="triangle" w="sm" len="sm"/>
+          </a:ln>
+        </p:spPr>
+      </p:cxnSp>
     </p:spTree>
   </p:cSld>
   <p:clrMapOvr>
@@ -7925,7 +7812,7 @@
 </file>
 
 <file path=ppt/slides/slide3.xml><?xml version="1.0" encoding="utf-8"?>
-<p:sld xmlns:a="http://schemas.openxmlformats.org/drawingml/2006/main" xmlns:p="http://schemas.openxmlformats.org/presentationml/2006/main" xmlns:r="http://schemas.openxmlformats.org/officeDocument/2006/relationships">
+<p:sld xmlns:a="http://schemas.openxmlformats.org/drawingml/2006/main" xmlns:r="http://schemas.openxmlformats.org/officeDocument/2006/relationships" xmlns:p="http://schemas.openxmlformats.org/presentationml/2006/main">
   <p:cSld>
     <p:spTree>
       <p:nvGrpSpPr>
@@ -7933,7 +7820,14 @@
         <p:cNvGrpSpPr/>
         <p:nvPr/>
       </p:nvGrpSpPr>
-      <p:grpSpPr/>
+      <p:grpSpPr>
+        <a:xfrm>
+          <a:off x="0" y="0"/>
+          <a:ext cx="0" cy="0"/>
+          <a:chOff x="0" y="0"/>
+          <a:chExt cx="0" cy="0"/>
+        </a:xfrm>
+      </p:grpSpPr>
       <p:pic>
         <p:nvPicPr>
           <p:cNvPr id="2" name="Picture 1" descr="template2_background.png"/>
@@ -7943,7 +7837,7 @@
           <p:nvPr/>
         </p:nvPicPr>
         <p:blipFill>
-          <a:blip r:embed="rId2"/>
+          <a:blip r:embed="rId3"/>
           <a:stretch>
             <a:fillRect/>
           </a:stretch>
@@ -7975,7 +7869,7 @@
           <a:noFill/>
         </p:spPr>
         <p:txBody>
-          <a:bodyPr wrap="square" lIns="13716" rIns="13716" tIns="13716" bIns="13716" anchor="t">
+          <a:bodyPr wrap="square" lIns="13716" tIns="13716" rIns="13716" bIns="13716" anchor="t">
             <a:noAutofit/>
           </a:bodyPr>
           <a:lstStyle/>
@@ -8029,6 +7923,7 @@
           <a:lstStyle/>
           <a:p>
             <a:pPr algn="ctr"/>
+            <a:endParaRPr/>
           </a:p>
         </p:txBody>
       </p:sp>
@@ -8049,7 +7944,7 @@
           <a:noFill/>
         </p:spPr>
         <p:txBody>
-          <a:bodyPr wrap="square" lIns="13716" rIns="13716" tIns="13716" bIns="13716" anchor="t">
+          <a:bodyPr wrap="square" lIns="13716" tIns="13716" rIns="13716" bIns="13716" anchor="t">
             <a:noAutofit/>
           </a:bodyPr>
           <a:lstStyle/>
@@ -8094,7 +7989,7 @@
           <a:noFill/>
         </p:spPr>
         <p:txBody>
-          <a:bodyPr wrap="square" lIns="13716" rIns="13716" tIns="13716" bIns="13716" anchor="t">
+          <a:bodyPr wrap="square" lIns="13716" tIns="13716" rIns="13716" bIns="13716" anchor="t">
             <a:noAutofit/>
           </a:bodyPr>
           <a:lstStyle/>
@@ -8139,7 +8034,7 @@
           <a:noFill/>
         </p:spPr>
         <p:txBody>
-          <a:bodyPr wrap="square" lIns="13716" rIns="13716" tIns="13716" bIns="13716" anchor="t">
+          <a:bodyPr wrap="square" lIns="13716" tIns="13716" rIns="13716" bIns="13716" anchor="t">
             <a:noAutofit/>
           </a:bodyPr>
           <a:lstStyle/>
@@ -8193,6 +8088,7 @@
           <a:lstStyle/>
           <a:p>
             <a:pPr algn="ctr"/>
+            <a:endParaRPr/>
           </a:p>
         </p:txBody>
       </p:sp>
@@ -8213,7 +8109,7 @@
           <a:noFill/>
         </p:spPr>
         <p:txBody>
-          <a:bodyPr wrap="square" lIns="13716" rIns="13716" tIns="13716" bIns="13716" anchor="t">
+          <a:bodyPr wrap="square" lIns="13716" tIns="13716" rIns="13716" bIns="13716" anchor="t">
             <a:noAutofit/>
           </a:bodyPr>
           <a:lstStyle/>
@@ -8258,7 +8154,7 @@
           <a:noFill/>
         </p:spPr>
         <p:txBody>
-          <a:bodyPr wrap="square" lIns="13716" rIns="13716" tIns="13716" bIns="13716" anchor="t">
+          <a:bodyPr wrap="square" lIns="13716" tIns="13716" rIns="13716" bIns="13716" anchor="t">
             <a:noAutofit/>
           </a:bodyPr>
           <a:lstStyle/>
@@ -8303,7 +8199,7 @@
           <a:noFill/>
         </p:spPr>
         <p:txBody>
-          <a:bodyPr wrap="square" lIns="13716" rIns="13716" tIns="13716" bIns="13716" anchor="t">
+          <a:bodyPr wrap="square" lIns="13716" tIns="13716" rIns="13716" bIns="13716" anchor="t">
             <a:noAutofit/>
           </a:bodyPr>
           <a:lstStyle/>
@@ -8360,6 +8256,7 @@
           <a:lstStyle/>
           <a:p>
             <a:pPr algn="ctr"/>
+            <a:endParaRPr/>
           </a:p>
         </p:txBody>
       </p:sp>
@@ -8380,7 +8277,7 @@
           <a:noFill/>
         </p:spPr>
         <p:txBody>
-          <a:bodyPr wrap="square" lIns="13716" rIns="13716" tIns="13716" bIns="13716" anchor="t">
+          <a:bodyPr wrap="square" lIns="13716" tIns="13716" rIns="13716" bIns="13716" anchor="t">
             <a:noAutofit/>
           </a:bodyPr>
           <a:lstStyle/>
@@ -8443,6 +8340,7 @@
           <a:lstStyle/>
           <a:p>
             <a:pPr algn="ctr"/>
+            <a:endParaRPr/>
           </a:p>
         </p:txBody>
       </p:sp>
@@ -8472,6 +8370,7 @@
           <a:lstStyle/>
           <a:p>
             <a:pPr algn="ctr"/>
+            <a:endParaRPr/>
           </a:p>
         </p:txBody>
       </p:sp>
@@ -8492,7 +8391,7 @@
           <a:noFill/>
         </p:spPr>
         <p:txBody>
-          <a:bodyPr wrap="square" lIns="13716" rIns="13716" tIns="13716" bIns="13716" anchor="t">
+          <a:bodyPr wrap="square" lIns="13716" tIns="13716" rIns="13716" bIns="13716" anchor="t">
             <a:noAutofit/>
           </a:bodyPr>
           <a:lstStyle/>
@@ -8528,16 +8427,16 @@
         </p:nvSpPr>
         <p:spPr>
           <a:xfrm>
-            <a:off x="1051560" y="3291840"/>
-            <a:ext cx="2414016" cy="402336"/>
-          </a:xfrm>
-          <a:prstGeom prst="rect">
-            <a:avLst/>
-          </a:prstGeom>
-          <a:noFill/>
-        </p:spPr>
-        <p:txBody>
-          <a:bodyPr wrap="square" lIns="13716" rIns="13716" tIns="13716" bIns="13716" anchor="t">
+            <a:off x="1051560" y="3218688"/>
+            <a:ext cx="2414016" cy="548640"/>
+          </a:xfrm>
+          <a:prstGeom prst="rect">
+            <a:avLst/>
+          </a:prstGeom>
+          <a:noFill/>
+        </p:spPr>
+        <p:txBody>
+          <a:bodyPr wrap="square" lIns="13716" tIns="13716" rIns="13716" bIns="13716" anchor="t">
             <a:noAutofit/>
           </a:bodyPr>
           <a:lstStyle/>
@@ -8616,6 +8515,7 @@
           <a:lstStyle/>
           <a:p>
             <a:pPr algn="ctr"/>
+            <a:endParaRPr/>
           </a:p>
         </p:txBody>
       </p:sp>
@@ -8636,7 +8536,7 @@
           <a:noFill/>
         </p:spPr>
         <p:txBody>
-          <a:bodyPr wrap="square" lIns="13716" rIns="13716" tIns="13716" bIns="13716" anchor="t">
+          <a:bodyPr wrap="square" lIns="13716" tIns="13716" rIns="13716" bIns="13716" anchor="t">
             <a:noAutofit/>
           </a:bodyPr>
           <a:lstStyle/>
@@ -8699,6 +8599,7 @@
           <a:lstStyle/>
           <a:p>
             <a:pPr algn="ctr"/>
+            <a:endParaRPr/>
           </a:p>
         </p:txBody>
       </p:sp>
@@ -8728,6 +8629,7 @@
           <a:lstStyle/>
           <a:p>
             <a:pPr algn="ctr"/>
+            <a:endParaRPr/>
           </a:p>
         </p:txBody>
       </p:sp>
@@ -8748,7 +8650,7 @@
           <a:noFill/>
         </p:spPr>
         <p:txBody>
-          <a:bodyPr wrap="square" lIns="13716" rIns="13716" tIns="13716" bIns="13716" anchor="t">
+          <a:bodyPr wrap="square" lIns="13716" tIns="13716" rIns="13716" bIns="13716" anchor="t">
             <a:noAutofit/>
           </a:bodyPr>
           <a:lstStyle/>
@@ -8784,16 +8686,16 @@
         </p:nvSpPr>
         <p:spPr>
           <a:xfrm>
-            <a:off x="4416552" y="3291840"/>
-            <a:ext cx="2414016" cy="402336"/>
-          </a:xfrm>
-          <a:prstGeom prst="rect">
-            <a:avLst/>
-          </a:prstGeom>
-          <a:noFill/>
-        </p:spPr>
-        <p:txBody>
-          <a:bodyPr wrap="square" lIns="13716" rIns="13716" tIns="13716" bIns="13716" anchor="t">
+            <a:off x="4416552" y="3218688"/>
+            <a:ext cx="2414016" cy="548640"/>
+          </a:xfrm>
+          <a:prstGeom prst="rect">
+            <a:avLst/>
+          </a:prstGeom>
+          <a:noFill/>
+        </p:spPr>
+        <p:txBody>
+          <a:bodyPr wrap="square" lIns="13716" tIns="13716" rIns="13716" bIns="13716" anchor="t">
             <a:noAutofit/>
           </a:bodyPr>
           <a:lstStyle/>
@@ -8872,6 +8774,7 @@
           <a:lstStyle/>
           <a:p>
             <a:pPr algn="ctr"/>
+            <a:endParaRPr/>
           </a:p>
         </p:txBody>
       </p:sp>
@@ -8892,7 +8795,7 @@
           <a:noFill/>
         </p:spPr>
         <p:txBody>
-          <a:bodyPr wrap="square" lIns="13716" rIns="13716" tIns="13716" bIns="13716" anchor="t">
+          <a:bodyPr wrap="square" lIns="13716" tIns="13716" rIns="13716" bIns="13716" anchor="t">
             <a:noAutofit/>
           </a:bodyPr>
           <a:lstStyle/>
@@ -8955,6 +8858,7 @@
           <a:lstStyle/>
           <a:p>
             <a:pPr algn="ctr"/>
+            <a:endParaRPr/>
           </a:p>
         </p:txBody>
       </p:sp>
@@ -8984,6 +8888,7 @@
           <a:lstStyle/>
           <a:p>
             <a:pPr algn="ctr"/>
+            <a:endParaRPr/>
           </a:p>
         </p:txBody>
       </p:sp>
@@ -9004,7 +8909,7 @@
           <a:noFill/>
         </p:spPr>
         <p:txBody>
-          <a:bodyPr wrap="square" lIns="13716" rIns="13716" tIns="13716" bIns="13716" anchor="t">
+          <a:bodyPr wrap="square" lIns="13716" tIns="13716" rIns="13716" bIns="13716" anchor="t">
             <a:noAutofit/>
           </a:bodyPr>
           <a:lstStyle/>
@@ -9040,16 +8945,16 @@
         </p:nvSpPr>
         <p:spPr>
           <a:xfrm>
-            <a:off x="7799831" y="3291840"/>
-            <a:ext cx="2414016" cy="402336"/>
-          </a:xfrm>
-          <a:prstGeom prst="rect">
-            <a:avLst/>
-          </a:prstGeom>
-          <a:noFill/>
-        </p:spPr>
-        <p:txBody>
-          <a:bodyPr wrap="square" lIns="13716" rIns="13716" tIns="13716" bIns="13716" anchor="t">
+            <a:off x="7799831" y="3218688"/>
+            <a:ext cx="2414016" cy="548640"/>
+          </a:xfrm>
+          <a:prstGeom prst="rect">
+            <a:avLst/>
+          </a:prstGeom>
+          <a:noFill/>
+        </p:spPr>
+        <p:txBody>
+          <a:bodyPr wrap="square" lIns="13716" tIns="13716" rIns="13716" bIns="13716" anchor="t">
             <a:noAutofit/>
           </a:bodyPr>
           <a:lstStyle/>
@@ -9128,6 +9033,7 @@
           <a:lstStyle/>
           <a:p>
             <a:pPr algn="ctr"/>
+            <a:endParaRPr/>
           </a:p>
         </p:txBody>
       </p:sp>
@@ -9148,7 +9054,7 @@
           <a:noFill/>
         </p:spPr>
         <p:txBody>
-          <a:bodyPr wrap="square" lIns="13716" rIns="13716" tIns="13716" bIns="13716" anchor="t">
+          <a:bodyPr wrap="square" lIns="13716" tIns="13716" rIns="13716" bIns="13716" anchor="t">
             <a:noAutofit/>
           </a:bodyPr>
           <a:lstStyle/>
@@ -9211,6 +9117,7 @@
           <a:lstStyle/>
           <a:p>
             <a:pPr algn="ctr"/>
+            <a:endParaRPr/>
           </a:p>
         </p:txBody>
       </p:sp>
@@ -9240,6 +9147,7 @@
           <a:lstStyle/>
           <a:p>
             <a:pPr algn="ctr"/>
+            <a:endParaRPr/>
           </a:p>
         </p:txBody>
       </p:sp>
@@ -9260,7 +9168,7 @@
           <a:noFill/>
         </p:spPr>
         <p:txBody>
-          <a:bodyPr wrap="square" lIns="13716" rIns="13716" tIns="13716" bIns="13716" anchor="t">
+          <a:bodyPr wrap="square" lIns="13716" tIns="13716" rIns="13716" bIns="13716" anchor="t">
             <a:noAutofit/>
           </a:bodyPr>
           <a:lstStyle/>
@@ -9296,16 +9204,16 @@
         </p:nvSpPr>
         <p:spPr>
           <a:xfrm>
-            <a:off x="11183112" y="3291840"/>
-            <a:ext cx="2414016" cy="402336"/>
-          </a:xfrm>
-          <a:prstGeom prst="rect">
-            <a:avLst/>
-          </a:prstGeom>
-          <a:noFill/>
-        </p:spPr>
-        <p:txBody>
-          <a:bodyPr wrap="square" lIns="13716" rIns="13716" tIns="13716" bIns="13716" anchor="t">
+            <a:off x="11183112" y="3218688"/>
+            <a:ext cx="2414016" cy="548640"/>
+          </a:xfrm>
+          <a:prstGeom prst="rect">
+            <a:avLst/>
+          </a:prstGeom>
+          <a:noFill/>
+        </p:spPr>
+        <p:txBody>
+          <a:bodyPr wrap="square" lIns="13716" tIns="13716" rIns="13716" bIns="13716" anchor="t">
             <a:noAutofit/>
           </a:bodyPr>
           <a:lstStyle/>
@@ -9450,6 +9358,7 @@
           <a:lstStyle/>
           <a:p>
             <a:pPr algn="ctr"/>
+            <a:endParaRPr/>
           </a:p>
         </p:txBody>
       </p:sp>
@@ -9479,6 +9388,7 @@
           <a:lstStyle/>
           <a:p>
             <a:pPr algn="ctr"/>
+            <a:endParaRPr/>
           </a:p>
         </p:txBody>
       </p:sp>
@@ -9499,7 +9409,7 @@
           <a:noFill/>
         </p:spPr>
         <p:txBody>
-          <a:bodyPr wrap="square" lIns="13716" rIns="13716" tIns="13716" bIns="13716" anchor="t">
+          <a:bodyPr wrap="square" lIns="13716" tIns="13716" rIns="13716" bIns="13716" anchor="t">
             <a:noAutofit/>
           </a:bodyPr>
           <a:lstStyle/>
@@ -9555,6 +9465,7 @@
           <a:lstStyle/>
           <a:p>
             <a:pPr algn="ctr"/>
+            <a:endParaRPr/>
           </a:p>
         </p:txBody>
       </p:sp>
@@ -9584,6 +9495,7 @@
           <a:lstStyle/>
           <a:p>
             <a:pPr algn="ctr"/>
+            <a:endParaRPr/>
           </a:p>
         </p:txBody>
       </p:sp>
@@ -9604,7 +9516,7 @@
           <a:noFill/>
         </p:spPr>
         <p:txBody>
-          <a:bodyPr wrap="square" lIns="13716" rIns="13716" tIns="13716" bIns="13716" anchor="t">
+          <a:bodyPr wrap="square" lIns="13716" tIns="13716" rIns="13716" bIns="13716" anchor="t">
             <a:noAutofit/>
           </a:bodyPr>
           <a:lstStyle/>
@@ -9660,6 +9572,7 @@
           <a:lstStyle/>
           <a:p>
             <a:pPr algn="ctr"/>
+            <a:endParaRPr/>
           </a:p>
         </p:txBody>
       </p:sp>
@@ -9689,6 +9602,7 @@
           <a:lstStyle/>
           <a:p>
             <a:pPr algn="ctr"/>
+            <a:endParaRPr/>
           </a:p>
         </p:txBody>
       </p:sp>
@@ -9709,7 +9623,7 @@
           <a:noFill/>
         </p:spPr>
         <p:txBody>
-          <a:bodyPr wrap="square" lIns="13716" rIns="13716" tIns="13716" bIns="13716" anchor="t">
+          <a:bodyPr wrap="square" lIns="13716" tIns="13716" rIns="13716" bIns="13716" anchor="t">
             <a:noAutofit/>
           </a:bodyPr>
           <a:lstStyle/>
@@ -9765,6 +9679,7 @@
           <a:lstStyle/>
           <a:p>
             <a:pPr algn="ctr"/>
+            <a:endParaRPr/>
           </a:p>
         </p:txBody>
       </p:sp>
@@ -9794,6 +9709,7 @@
           <a:lstStyle/>
           <a:p>
             <a:pPr algn="ctr"/>
+            <a:endParaRPr/>
           </a:p>
         </p:txBody>
       </p:sp>
@@ -9814,7 +9730,7 @@
           <a:noFill/>
         </p:spPr>
         <p:txBody>
-          <a:bodyPr wrap="square" lIns="13716" rIns="13716" tIns="13716" bIns="13716" anchor="t">
+          <a:bodyPr wrap="square" lIns="13716" tIns="13716" rIns="13716" bIns="13716" anchor="t">
             <a:noAutofit/>
           </a:bodyPr>
           <a:lstStyle/>
@@ -9870,6 +9786,7 @@
           <a:lstStyle/>
           <a:p>
             <a:pPr algn="ctr"/>
+            <a:endParaRPr/>
           </a:p>
         </p:txBody>
       </p:sp>
@@ -9899,6 +9816,7 @@
           <a:lstStyle/>
           <a:p>
             <a:pPr algn="ctr"/>
+            <a:endParaRPr/>
           </a:p>
         </p:txBody>
       </p:sp>
@@ -9919,7 +9837,7 @@
           <a:noFill/>
         </p:spPr>
         <p:txBody>
-          <a:bodyPr wrap="square" lIns="13716" rIns="13716" tIns="13716" bIns="13716" anchor="t">
+          <a:bodyPr wrap="square" lIns="13716" tIns="13716" rIns="13716" bIns="13716" anchor="t">
             <a:noAutofit/>
           </a:bodyPr>
           <a:lstStyle/>
@@ -9975,6 +9893,7 @@
           <a:lstStyle/>
           <a:p>
             <a:pPr algn="ctr"/>
+            <a:endParaRPr/>
           </a:p>
         </p:txBody>
       </p:sp>
@@ -10004,6 +9923,7 @@
           <a:lstStyle/>
           <a:p>
             <a:pPr algn="ctr"/>
+            <a:endParaRPr/>
           </a:p>
         </p:txBody>
       </p:sp>
@@ -10024,7 +9944,7 @@
           <a:noFill/>
         </p:spPr>
         <p:txBody>
-          <a:bodyPr wrap="square" lIns="13716" rIns="13716" tIns="13716" bIns="13716" anchor="t">
+          <a:bodyPr wrap="square" lIns="13716" tIns="13716" rIns="13716" bIns="13716" anchor="t">
             <a:noAutofit/>
           </a:bodyPr>
           <a:lstStyle/>
@@ -10078,6 +9998,7 @@
           <a:lstStyle/>
           <a:p>
             <a:pPr algn="ctr"/>
+            <a:endParaRPr/>
           </a:p>
         </p:txBody>
       </p:sp>
@@ -10107,6 +10028,7 @@
           <a:lstStyle/>
           <a:p>
             <a:pPr algn="ctr"/>
+            <a:endParaRPr/>
           </a:p>
         </p:txBody>
       </p:sp>
@@ -10127,7 +10049,7 @@
           <a:noFill/>
         </p:spPr>
         <p:txBody>
-          <a:bodyPr wrap="square" lIns="13716" rIns="13716" tIns="13716" bIns="13716" anchor="t">
+          <a:bodyPr wrap="square" lIns="13716" tIns="13716" rIns="13716" bIns="13716" anchor="t">
             <a:noAutofit/>
           </a:bodyPr>
           <a:lstStyle/>
@@ -10164,7 +10086,7 @@
 </file>
 
 <file path=ppt/slides/slide4.xml><?xml version="1.0" encoding="utf-8"?>
-<p:sld xmlns:a="http://schemas.openxmlformats.org/drawingml/2006/main" xmlns:p="http://schemas.openxmlformats.org/presentationml/2006/main" xmlns:r="http://schemas.openxmlformats.org/officeDocument/2006/relationships">
+<p:sld xmlns:a="http://schemas.openxmlformats.org/drawingml/2006/main" xmlns:r="http://schemas.openxmlformats.org/officeDocument/2006/relationships" xmlns:p="http://schemas.openxmlformats.org/presentationml/2006/main">
   <p:cSld>
     <p:spTree>
       <p:nvGrpSpPr>
@@ -10172,7 +10094,14 @@
         <p:cNvGrpSpPr/>
         <p:nvPr/>
       </p:nvGrpSpPr>
-      <p:grpSpPr/>
+      <p:grpSpPr>
+        <a:xfrm>
+          <a:off x="0" y="0"/>
+          <a:ext cx="0" cy="0"/>
+          <a:chOff x="0" y="0"/>
+          <a:chExt cx="0" cy="0"/>
+        </a:xfrm>
+      </p:grpSpPr>
       <p:pic>
         <p:nvPicPr>
           <p:cNvPr id="2" name="Picture 1" descr="template2_background.png"/>
@@ -10182,7 +10111,7 @@
           <p:nvPr/>
         </p:nvPicPr>
         <p:blipFill>
-          <a:blip r:embed="rId2"/>
+          <a:blip r:embed="rId3"/>
           <a:stretch>
             <a:fillRect/>
           </a:stretch>
@@ -10214,7 +10143,7 @@
           <a:noFill/>
         </p:spPr>
         <p:txBody>
-          <a:bodyPr wrap="square" lIns="13716" rIns="13716" tIns="13716" bIns="13716" anchor="t">
+          <a:bodyPr wrap="square" lIns="13716" tIns="13716" rIns="13716" bIns="13716" anchor="t">
             <a:noAutofit/>
           </a:bodyPr>
           <a:lstStyle/>
@@ -10268,6 +10197,7 @@
           <a:lstStyle/>
           <a:p>
             <a:pPr algn="ctr"/>
+            <a:endParaRPr/>
           </a:p>
         </p:txBody>
       </p:sp>
@@ -10288,7 +10218,7 @@
           <a:noFill/>
         </p:spPr>
         <p:txBody>
-          <a:bodyPr wrap="square" lIns="13716" rIns="13716" tIns="13716" bIns="13716" anchor="t">
+          <a:bodyPr wrap="square" lIns="13716" tIns="13716" rIns="13716" bIns="13716" anchor="t">
             <a:noAutofit/>
           </a:bodyPr>
           <a:lstStyle/>
@@ -10333,7 +10263,7 @@
           <a:noFill/>
         </p:spPr>
         <p:txBody>
-          <a:bodyPr wrap="square" lIns="13716" rIns="13716" tIns="13716" bIns="13716" anchor="t">
+          <a:bodyPr wrap="square" lIns="13716" tIns="13716" rIns="13716" bIns="13716" anchor="t">
             <a:noAutofit/>
           </a:bodyPr>
           <a:lstStyle/>
@@ -10378,7 +10308,7 @@
           <a:noFill/>
         </p:spPr>
         <p:txBody>
-          <a:bodyPr wrap="square" lIns="13716" rIns="13716" tIns="13716" bIns="13716" anchor="t">
+          <a:bodyPr wrap="square" lIns="13716" tIns="13716" rIns="13716" bIns="13716" anchor="t">
             <a:noAutofit/>
           </a:bodyPr>
           <a:lstStyle/>
@@ -10432,6 +10362,7 @@
           <a:lstStyle/>
           <a:p>
             <a:pPr algn="ctr"/>
+            <a:endParaRPr/>
           </a:p>
         </p:txBody>
       </p:sp>
@@ -10452,7 +10383,7 @@
           <a:noFill/>
         </p:spPr>
         <p:txBody>
-          <a:bodyPr wrap="square" lIns="13716" rIns="13716" tIns="13716" bIns="13716" anchor="t">
+          <a:bodyPr wrap="square" lIns="13716" tIns="13716" rIns="13716" bIns="13716" anchor="t">
             <a:noAutofit/>
           </a:bodyPr>
           <a:lstStyle/>
@@ -10497,7 +10428,7 @@
           <a:noFill/>
         </p:spPr>
         <p:txBody>
-          <a:bodyPr wrap="square" lIns="13716" rIns="13716" tIns="13716" bIns="13716" anchor="t">
+          <a:bodyPr wrap="square" lIns="13716" tIns="13716" rIns="13716" bIns="13716" anchor="t">
             <a:noAutofit/>
           </a:bodyPr>
           <a:lstStyle/>
@@ -10542,7 +10473,7 @@
           <a:noFill/>
         </p:spPr>
         <p:txBody>
-          <a:bodyPr wrap="square" lIns="13716" rIns="13716" tIns="13716" bIns="13716" anchor="t">
+          <a:bodyPr wrap="square" lIns="13716" tIns="13716" rIns="13716" bIns="13716" anchor="t">
             <a:noAutofit/>
           </a:bodyPr>
           <a:lstStyle/>
@@ -10587,7 +10518,7 @@
           <a:noFill/>
         </p:spPr>
         <p:txBody>
-          <a:bodyPr wrap="square" lIns="13716" rIns="13716" tIns="13716" bIns="13716" anchor="t">
+          <a:bodyPr wrap="square" lIns="13716" tIns="13716" rIns="13716" bIns="13716" anchor="t">
             <a:noAutofit/>
           </a:bodyPr>
           <a:lstStyle/>
@@ -10650,6 +10581,7 @@
           <a:lstStyle/>
           <a:p>
             <a:pPr algn="ctr"/>
+            <a:endParaRPr/>
           </a:p>
         </p:txBody>
       </p:sp>
@@ -10679,6 +10611,7 @@
           <a:lstStyle/>
           <a:p>
             <a:pPr algn="ctr"/>
+            <a:endParaRPr/>
           </a:p>
         </p:txBody>
       </p:sp>
@@ -10699,7 +10632,7 @@
           <a:noFill/>
         </p:spPr>
         <p:txBody>
-          <a:bodyPr wrap="square" lIns="13716" rIns="13716" tIns="13716" bIns="13716" anchor="t">
+          <a:bodyPr wrap="square" lIns="13716" tIns="13716" rIns="13716" bIns="13716" anchor="t">
             <a:noAutofit/>
           </a:bodyPr>
           <a:lstStyle/>
@@ -10744,7 +10677,7 @@
           <a:noFill/>
         </p:spPr>
         <p:txBody>
-          <a:bodyPr wrap="square" lIns="13716" rIns="13716" tIns="13716" bIns="13716" anchor="t">
+          <a:bodyPr wrap="square" lIns="13716" tIns="13716" rIns="13716" bIns="13716" anchor="t">
             <a:noAutofit/>
           </a:bodyPr>
           <a:lstStyle/>
@@ -10811,7 +10744,7 @@
           <a:noFill/>
         </p:spPr>
         <p:txBody>
-          <a:bodyPr wrap="square" lIns="13716" rIns="13716" tIns="13716" bIns="13716" anchor="t">
+          <a:bodyPr wrap="square" lIns="13716" tIns="13716" rIns="13716" bIns="13716" anchor="t">
             <a:noAutofit/>
           </a:bodyPr>
           <a:lstStyle/>
@@ -10874,6 +10807,7 @@
           <a:lstStyle/>
           <a:p>
             <a:pPr algn="ctr"/>
+            <a:endParaRPr/>
           </a:p>
         </p:txBody>
       </p:sp>
@@ -10903,6 +10837,7 @@
           <a:lstStyle/>
           <a:p>
             <a:pPr algn="ctr"/>
+            <a:endParaRPr/>
           </a:p>
         </p:txBody>
       </p:sp>
@@ -10923,7 +10858,7 @@
           <a:noFill/>
         </p:spPr>
         <p:txBody>
-          <a:bodyPr wrap="square" lIns="13716" rIns="13716" tIns="13716" bIns="13716" anchor="t">
+          <a:bodyPr wrap="square" lIns="13716" tIns="13716" rIns="13716" bIns="13716" anchor="t">
             <a:noAutofit/>
           </a:bodyPr>
           <a:lstStyle/>
@@ -10968,7 +10903,7 @@
           <a:noFill/>
         </p:spPr>
         <p:txBody>
-          <a:bodyPr wrap="square" lIns="13716" rIns="13716" tIns="13716" bIns="13716" anchor="t">
+          <a:bodyPr wrap="square" lIns="13716" tIns="13716" rIns="13716" bIns="13716" anchor="t">
             <a:noAutofit/>
           </a:bodyPr>
           <a:lstStyle/>
@@ -11035,7 +10970,7 @@
           <a:noFill/>
         </p:spPr>
         <p:txBody>
-          <a:bodyPr wrap="square" lIns="13716" rIns="13716" tIns="13716" bIns="13716" anchor="t">
+          <a:bodyPr wrap="square" lIns="13716" tIns="13716" rIns="13716" bIns="13716" anchor="t">
             <a:noAutofit/>
           </a:bodyPr>
           <a:lstStyle/>
@@ -11098,6 +11033,7 @@
           <a:lstStyle/>
           <a:p>
             <a:pPr algn="ctr"/>
+            <a:endParaRPr/>
           </a:p>
         </p:txBody>
       </p:sp>
@@ -11127,6 +11063,7 @@
           <a:lstStyle/>
           <a:p>
             <a:pPr algn="ctr"/>
+            <a:endParaRPr/>
           </a:p>
         </p:txBody>
       </p:sp>
@@ -11147,7 +11084,7 @@
           <a:noFill/>
         </p:spPr>
         <p:txBody>
-          <a:bodyPr wrap="square" lIns="13716" rIns="13716" tIns="13716" bIns="13716" anchor="t">
+          <a:bodyPr wrap="square" lIns="13716" tIns="13716" rIns="13716" bIns="13716" anchor="t">
             <a:noAutofit/>
           </a:bodyPr>
           <a:lstStyle/>
@@ -11192,7 +11129,7 @@
           <a:noFill/>
         </p:spPr>
         <p:txBody>
-          <a:bodyPr wrap="square" lIns="13716" rIns="13716" tIns="13716" bIns="13716" anchor="t">
+          <a:bodyPr wrap="square" lIns="13716" tIns="13716" rIns="13716" bIns="13716" anchor="t">
             <a:noAutofit/>
           </a:bodyPr>
           <a:lstStyle/>
@@ -11259,7 +11196,7 @@
           <a:noFill/>
         </p:spPr>
         <p:txBody>
-          <a:bodyPr wrap="square" lIns="13716" rIns="13716" tIns="13716" bIns="13716" anchor="t">
+          <a:bodyPr wrap="square" lIns="13716" tIns="13716" rIns="13716" bIns="13716" anchor="t">
             <a:noAutofit/>
           </a:bodyPr>
           <a:lstStyle/>
@@ -11322,6 +11259,7 @@
           <a:lstStyle/>
           <a:p>
             <a:pPr algn="ctr"/>
+            <a:endParaRPr/>
           </a:p>
         </p:txBody>
       </p:sp>
@@ -11351,6 +11289,7 @@
           <a:lstStyle/>
           <a:p>
             <a:pPr algn="ctr"/>
+            <a:endParaRPr/>
           </a:p>
         </p:txBody>
       </p:sp>
@@ -11371,7 +11310,7 @@
           <a:noFill/>
         </p:spPr>
         <p:txBody>
-          <a:bodyPr wrap="square" lIns="13716" rIns="13716" tIns="13716" bIns="13716" anchor="t">
+          <a:bodyPr wrap="square" lIns="13716" tIns="13716" rIns="13716" bIns="13716" anchor="t">
             <a:noAutofit/>
           </a:bodyPr>
           <a:lstStyle/>
@@ -11416,7 +11355,7 @@
           <a:noFill/>
         </p:spPr>
         <p:txBody>
-          <a:bodyPr wrap="square" lIns="13716" rIns="13716" tIns="13716" bIns="13716" anchor="t">
+          <a:bodyPr wrap="square" lIns="13716" tIns="13716" rIns="13716" bIns="13716" anchor="t">
             <a:noAutofit/>
           </a:bodyPr>
           <a:lstStyle/>
@@ -11483,7 +11422,7 @@
           <a:noFill/>
         </p:spPr>
         <p:txBody>
-          <a:bodyPr wrap="square" lIns="13716" rIns="13716" tIns="13716" bIns="13716" anchor="t">
+          <a:bodyPr wrap="square" lIns="13716" tIns="13716" rIns="13716" bIns="13716" anchor="t">
             <a:noAutofit/>
           </a:bodyPr>
           <a:lstStyle/>
@@ -11546,6 +11485,7 @@
           <a:lstStyle/>
           <a:p>
             <a:pPr algn="ctr"/>
+            <a:endParaRPr/>
           </a:p>
         </p:txBody>
       </p:sp>
@@ -11575,6 +11515,7 @@
           <a:lstStyle/>
           <a:p>
             <a:pPr algn="ctr"/>
+            <a:endParaRPr/>
           </a:p>
         </p:txBody>
       </p:sp>
@@ -11595,7 +11536,7 @@
           <a:noFill/>
         </p:spPr>
         <p:txBody>
-          <a:bodyPr wrap="square" lIns="13716" rIns="13716" tIns="13716" bIns="13716" anchor="t">
+          <a:bodyPr wrap="square" lIns="13716" tIns="13716" rIns="13716" bIns="13716" anchor="t">
             <a:noAutofit/>
           </a:bodyPr>
           <a:lstStyle/>
@@ -11640,7 +11581,7 @@
           <a:noFill/>
         </p:spPr>
         <p:txBody>
-          <a:bodyPr wrap="square" lIns="13716" rIns="13716" tIns="13716" bIns="13716" anchor="t">
+          <a:bodyPr wrap="square" lIns="13716" tIns="13716" rIns="13716" bIns="13716" anchor="t">
             <a:noAutofit/>
           </a:bodyPr>
           <a:lstStyle/>
@@ -11707,7 +11648,7 @@
           <a:noFill/>
         </p:spPr>
         <p:txBody>
-          <a:bodyPr wrap="square" lIns="13716" rIns="13716" tIns="13716" bIns="13716" anchor="t">
+          <a:bodyPr wrap="square" lIns="13716" tIns="13716" rIns="13716" bIns="13716" anchor="t">
             <a:noAutofit/>
           </a:bodyPr>
           <a:lstStyle/>
@@ -11770,6 +11711,7 @@
           <a:lstStyle/>
           <a:p>
             <a:pPr algn="ctr"/>
+            <a:endParaRPr/>
           </a:p>
         </p:txBody>
       </p:sp>
@@ -11799,6 +11741,7 @@
           <a:lstStyle/>
           <a:p>
             <a:pPr algn="ctr"/>
+            <a:endParaRPr/>
           </a:p>
         </p:txBody>
       </p:sp>
@@ -11819,7 +11762,7 @@
           <a:noFill/>
         </p:spPr>
         <p:txBody>
-          <a:bodyPr wrap="square" lIns="13716" rIns="13716" tIns="13716" bIns="13716" anchor="t">
+          <a:bodyPr wrap="square" lIns="13716" tIns="13716" rIns="13716" bIns="13716" anchor="t">
             <a:noAutofit/>
           </a:bodyPr>
           <a:lstStyle/>
@@ -11864,7 +11807,7 @@
           <a:noFill/>
         </p:spPr>
         <p:txBody>
-          <a:bodyPr wrap="square" lIns="13716" rIns="13716" tIns="13716" bIns="13716" anchor="t">
+          <a:bodyPr wrap="square" lIns="13716" tIns="13716" rIns="13716" bIns="13716" anchor="t">
             <a:noAutofit/>
           </a:bodyPr>
           <a:lstStyle/>
@@ -11927,6 +11870,7 @@
           <a:lstStyle/>
           <a:p>
             <a:pPr algn="ctr"/>
+            <a:endParaRPr/>
           </a:p>
         </p:txBody>
       </p:sp>
@@ -11947,7 +11891,7 @@
           <a:noFill/>
         </p:spPr>
         <p:txBody>
-          <a:bodyPr wrap="square" lIns="13716" rIns="13716" tIns="13716" bIns="13716" anchor="t">
+          <a:bodyPr wrap="square" lIns="13716" tIns="13716" rIns="13716" bIns="13716" anchor="t">
             <a:noAutofit/>
           </a:bodyPr>
           <a:lstStyle/>
@@ -11984,32 +11928,32 @@
         <p:spPr>
           <a:xfrm>
             <a:off x="10533888" y="2962656"/>
-            <a:ext cx="2962656" cy="1115568"/>
-          </a:xfrm>
-          <a:prstGeom prst="rect">
-            <a:avLst/>
-          </a:prstGeom>
-          <a:noFill/>
-        </p:spPr>
-        <p:txBody>
-          <a:bodyPr wrap="square" lIns="13716" rIns="13716" tIns="13716" bIns="13716" anchor="t">
-            <a:noAutofit/>
-          </a:bodyPr>
-          <a:lstStyle/>
-          <a:p>
-            <a:pPr algn="l">
-              <a:lnSpc>
-                <a:spcPct val="108000"/>
-              </a:lnSpc>
-              <a:spcBef>
-                <a:spcPts val="0"/>
-              </a:spcBef>
-              <a:spcAft>
-                <a:spcPts val="200"/>
-              </a:spcAft>
-            </a:pPr>
-            <a:r>
-              <a:rPr sz="2000" b="0">
+            <a:ext cx="2962656" cy="1353312"/>
+          </a:xfrm>
+          <a:prstGeom prst="rect">
+            <a:avLst/>
+          </a:prstGeom>
+          <a:noFill/>
+        </p:spPr>
+        <p:txBody>
+          <a:bodyPr wrap="square" lIns="13716" tIns="13716" rIns="13716" bIns="13716" anchor="t">
+            <a:noAutofit/>
+          </a:bodyPr>
+          <a:lstStyle/>
+          <a:p>
+            <a:pPr algn="l">
+              <a:lnSpc>
+                <a:spcPct val="108000"/>
+              </a:lnSpc>
+              <a:spcBef>
+                <a:spcPts val="0"/>
+              </a:spcBef>
+              <a:spcAft>
+                <a:spcPts val="200"/>
+              </a:spcAft>
+            </a:pPr>
+            <a:r>
+              <a:rPr sz="1800" b="0">
                 <a:solidFill>
                   <a:srgbClr val="2F2D29"/>
                 </a:solidFill>
@@ -12031,7 +11975,7 @@
               </a:spcAft>
             </a:pPr>
             <a:r>
-              <a:rPr sz="2000" b="0">
+              <a:rPr sz="1800" b="0">
                 <a:solidFill>
                   <a:srgbClr val="2F2D29"/>
                 </a:solidFill>
@@ -12053,7 +11997,7 @@
               </a:spcAft>
             </a:pPr>
             <a:r>
-              <a:rPr sz="2000" b="0">
+              <a:rPr sz="1800" b="0">
                 <a:solidFill>
                   <a:srgbClr val="2F2D29"/>
                 </a:solidFill>
@@ -12081,7 +12025,7 @@
           <a:noFill/>
         </p:spPr>
         <p:txBody>
-          <a:bodyPr wrap="square" lIns="13716" rIns="13716" tIns="13716" bIns="13716" anchor="t">
+          <a:bodyPr wrap="square" lIns="13716" tIns="13716" rIns="13716" bIns="13716" anchor="t">
             <a:noAutofit/>
           </a:bodyPr>
           <a:lstStyle/>
@@ -12135,6 +12079,7 @@
           <a:lstStyle/>
           <a:p>
             <a:pPr algn="ctr"/>
+            <a:endParaRPr/>
           </a:p>
         </p:txBody>
       </p:sp>
@@ -12164,6 +12109,7 @@
           <a:lstStyle/>
           <a:p>
             <a:pPr algn="ctr"/>
+            <a:endParaRPr/>
           </a:p>
         </p:txBody>
       </p:sp>
@@ -12184,7 +12130,7 @@
           <a:noFill/>
         </p:spPr>
         <p:txBody>
-          <a:bodyPr wrap="square" lIns="13716" rIns="13716" tIns="13716" bIns="13716" anchor="t">
+          <a:bodyPr wrap="square" lIns="13716" tIns="13716" rIns="13716" bIns="13716" anchor="t">
             <a:noAutofit/>
           </a:bodyPr>
           <a:lstStyle/>
@@ -12221,7 +12167,7 @@
 </file>
 
 <file path=ppt/slides/slide5.xml><?xml version="1.0" encoding="utf-8"?>
-<p:sld xmlns:a="http://schemas.openxmlformats.org/drawingml/2006/main" xmlns:p="http://schemas.openxmlformats.org/presentationml/2006/main" xmlns:r="http://schemas.openxmlformats.org/officeDocument/2006/relationships">
+<p:sld xmlns:a="http://schemas.openxmlformats.org/drawingml/2006/main" xmlns:r="http://schemas.openxmlformats.org/officeDocument/2006/relationships" xmlns:p="http://schemas.openxmlformats.org/presentationml/2006/main">
   <p:cSld>
     <p:spTree>
       <p:nvGrpSpPr>
@@ -12229,7 +12175,14 @@
         <p:cNvGrpSpPr/>
         <p:nvPr/>
       </p:nvGrpSpPr>
-      <p:grpSpPr/>
+      <p:grpSpPr>
+        <a:xfrm>
+          <a:off x="0" y="0"/>
+          <a:ext cx="0" cy="0"/>
+          <a:chOff x="0" y="0"/>
+          <a:chExt cx="0" cy="0"/>
+        </a:xfrm>
+      </p:grpSpPr>
       <p:pic>
         <p:nvPicPr>
           <p:cNvPr id="2" name="Picture 1" descr="template2_background.png"/>
@@ -12239,7 +12192,7 @@
           <p:nvPr/>
         </p:nvPicPr>
         <p:blipFill>
-          <a:blip r:embed="rId2"/>
+          <a:blip r:embed="rId3"/>
           <a:stretch>
             <a:fillRect/>
           </a:stretch>
@@ -12271,7 +12224,7 @@
           <a:noFill/>
         </p:spPr>
         <p:txBody>
-          <a:bodyPr wrap="square" lIns="13716" rIns="13716" tIns="13716" bIns="13716" anchor="t">
+          <a:bodyPr wrap="square" lIns="13716" tIns="13716" rIns="13716" bIns="13716" anchor="t">
             <a:noAutofit/>
           </a:bodyPr>
           <a:lstStyle/>
@@ -12325,6 +12278,7 @@
           <a:lstStyle/>
           <a:p>
             <a:pPr algn="ctr"/>
+            <a:endParaRPr/>
           </a:p>
         </p:txBody>
       </p:sp>
@@ -12345,7 +12299,7 @@
           <a:noFill/>
         </p:spPr>
         <p:txBody>
-          <a:bodyPr wrap="square" lIns="13716" rIns="13716" tIns="13716" bIns="13716" anchor="t">
+          <a:bodyPr wrap="square" lIns="13716" tIns="13716" rIns="13716" bIns="13716" anchor="t">
             <a:noAutofit/>
           </a:bodyPr>
           <a:lstStyle/>
@@ -12390,7 +12344,7 @@
           <a:noFill/>
         </p:spPr>
         <p:txBody>
-          <a:bodyPr wrap="square" lIns="13716" rIns="13716" tIns="13716" bIns="13716" anchor="t">
+          <a:bodyPr wrap="square" lIns="13716" tIns="13716" rIns="13716" bIns="13716" anchor="t">
             <a:noAutofit/>
           </a:bodyPr>
           <a:lstStyle/>
@@ -12435,7 +12389,7 @@
           <a:noFill/>
         </p:spPr>
         <p:txBody>
-          <a:bodyPr wrap="square" lIns="13716" rIns="13716" tIns="13716" bIns="13716" anchor="t">
+          <a:bodyPr wrap="square" lIns="13716" tIns="13716" rIns="13716" bIns="13716" anchor="t">
             <a:noAutofit/>
           </a:bodyPr>
           <a:lstStyle/>
@@ -12489,6 +12443,7 @@
           <a:lstStyle/>
           <a:p>
             <a:pPr algn="ctr"/>
+            <a:endParaRPr/>
           </a:p>
         </p:txBody>
       </p:sp>
@@ -12509,7 +12464,7 @@
           <a:noFill/>
         </p:spPr>
         <p:txBody>
-          <a:bodyPr wrap="square" lIns="13716" rIns="13716" tIns="13716" bIns="13716" anchor="t">
+          <a:bodyPr wrap="square" lIns="13716" tIns="13716" rIns="13716" bIns="13716" anchor="t">
             <a:noAutofit/>
           </a:bodyPr>
           <a:lstStyle/>
@@ -12554,7 +12509,7 @@
           <a:noFill/>
         </p:spPr>
         <p:txBody>
-          <a:bodyPr wrap="square" lIns="13716" rIns="13716" tIns="13716" bIns="13716" anchor="t">
+          <a:bodyPr wrap="square" lIns="13716" tIns="13716" rIns="13716" bIns="13716" anchor="t">
             <a:noAutofit/>
           </a:bodyPr>
           <a:lstStyle/>
@@ -12599,7 +12554,7 @@
           <a:noFill/>
         </p:spPr>
         <p:txBody>
-          <a:bodyPr wrap="square" lIns="13716" rIns="13716" tIns="13716" bIns="13716" anchor="t">
+          <a:bodyPr wrap="square" lIns="13716" tIns="13716" rIns="13716" bIns="13716" anchor="t">
             <a:noAutofit/>
           </a:bodyPr>
           <a:lstStyle/>
@@ -12644,7 +12599,7 @@
           <a:noFill/>
         </p:spPr>
         <p:txBody>
-          <a:bodyPr wrap="square" lIns="13716" rIns="13716" tIns="13716" bIns="13716" anchor="t">
+          <a:bodyPr wrap="square" lIns="13716" tIns="13716" rIns="13716" bIns="13716" anchor="t">
             <a:noAutofit/>
           </a:bodyPr>
           <a:lstStyle/>
@@ -12689,7 +12644,7 @@
           <a:noFill/>
         </p:spPr>
         <p:txBody>
-          <a:bodyPr wrap="square" lIns="13716" rIns="13716" tIns="13716" bIns="13716" anchor="t">
+          <a:bodyPr wrap="square" lIns="13716" tIns="13716" rIns="13716" bIns="13716" anchor="t">
             <a:noAutofit/>
           </a:bodyPr>
           <a:lstStyle/>
@@ -12752,6 +12707,7 @@
           <a:lstStyle/>
           <a:p>
             <a:pPr algn="ctr"/>
+            <a:endParaRPr/>
           </a:p>
         </p:txBody>
       </p:sp>
@@ -12781,6 +12737,7 @@
           <a:lstStyle/>
           <a:p>
             <a:pPr algn="ctr"/>
+            <a:endParaRPr/>
           </a:p>
         </p:txBody>
       </p:sp>
@@ -12801,7 +12758,7 @@
           <a:noFill/>
         </p:spPr>
         <p:txBody>
-          <a:bodyPr wrap="square" lIns="13716" rIns="13716" tIns="13716" bIns="13716" anchor="t">
+          <a:bodyPr wrap="square" lIns="13716" tIns="13716" rIns="13716" bIns="13716" anchor="t">
             <a:noAutofit/>
           </a:bodyPr>
           <a:lstStyle/>
@@ -12846,7 +12803,7 @@
           <a:noFill/>
         </p:spPr>
         <p:txBody>
-          <a:bodyPr wrap="square" lIns="13716" rIns="13716" tIns="13716" bIns="13716" anchor="t">
+          <a:bodyPr wrap="square" lIns="13716" tIns="13716" rIns="13716" bIns="13716" anchor="t">
             <a:noAutofit/>
           </a:bodyPr>
           <a:lstStyle/>
@@ -12931,6 +12888,7 @@
           <a:lstStyle/>
           <a:p>
             <a:pPr algn="ctr"/>
+            <a:endParaRPr/>
           </a:p>
         </p:txBody>
       </p:sp>
@@ -12960,6 +12918,7 @@
           <a:lstStyle/>
           <a:p>
             <a:pPr algn="ctr"/>
+            <a:endParaRPr/>
           </a:p>
         </p:txBody>
       </p:sp>
@@ -12980,7 +12939,7 @@
           <a:noFill/>
         </p:spPr>
         <p:txBody>
-          <a:bodyPr wrap="square" lIns="13716" rIns="13716" tIns="13716" bIns="13716" anchor="t">
+          <a:bodyPr wrap="square" lIns="13716" tIns="13716" rIns="13716" bIns="13716" anchor="t">
             <a:noAutofit/>
           </a:bodyPr>
           <a:lstStyle/>
@@ -13025,7 +12984,7 @@
           <a:noFill/>
         </p:spPr>
         <p:txBody>
-          <a:bodyPr wrap="square" lIns="13716" rIns="13716" tIns="13716" bIns="13716" anchor="t">
+          <a:bodyPr wrap="square" lIns="13716" tIns="13716" rIns="13716" bIns="13716" anchor="t">
             <a:noAutofit/>
           </a:bodyPr>
           <a:lstStyle/>
@@ -13132,6 +13091,7 @@
           <a:lstStyle/>
           <a:p>
             <a:pPr algn="ctr"/>
+            <a:endParaRPr/>
           </a:p>
         </p:txBody>
       </p:sp>
@@ -13161,6 +13121,7 @@
           <a:lstStyle/>
           <a:p>
             <a:pPr algn="ctr"/>
+            <a:endParaRPr/>
           </a:p>
         </p:txBody>
       </p:sp>
@@ -13181,7 +13142,7 @@
           <a:noFill/>
         </p:spPr>
         <p:txBody>
-          <a:bodyPr wrap="square" lIns="13716" rIns="13716" tIns="13716" bIns="13716" anchor="t">
+          <a:bodyPr wrap="square" lIns="13716" tIns="13716" rIns="13716" bIns="13716" anchor="t">
             <a:noAutofit/>
           </a:bodyPr>
           <a:lstStyle/>
@@ -13226,7 +13187,7 @@
           <a:noFill/>
         </p:spPr>
         <p:txBody>
-          <a:bodyPr wrap="square" lIns="13716" rIns="13716" tIns="13716" bIns="13716" anchor="t">
+          <a:bodyPr wrap="square" lIns="13716" tIns="13716" rIns="13716" bIns="13716" anchor="t">
             <a:noAutofit/>
           </a:bodyPr>
           <a:lstStyle/>
@@ -13333,6 +13294,7 @@
           <a:lstStyle/>
           <a:p>
             <a:pPr algn="ctr"/>
+            <a:endParaRPr/>
           </a:p>
         </p:txBody>
       </p:sp>
@@ -13362,6 +13324,7 @@
           <a:lstStyle/>
           <a:p>
             <a:pPr algn="ctr"/>
+            <a:endParaRPr/>
           </a:p>
         </p:txBody>
       </p:sp>
@@ -13382,7 +13345,7 @@
           <a:noFill/>
         </p:spPr>
         <p:txBody>
-          <a:bodyPr wrap="square" lIns="13716" rIns="13716" tIns="13716" bIns="13716" anchor="t">
+          <a:bodyPr wrap="square" lIns="13716" tIns="13716" rIns="13716" bIns="13716" anchor="t">
             <a:noAutofit/>
           </a:bodyPr>
           <a:lstStyle/>
@@ -13427,7 +13390,7 @@
           <a:noFill/>
         </p:spPr>
         <p:txBody>
-          <a:bodyPr wrap="square" lIns="13716" rIns="13716" tIns="13716" bIns="13716" anchor="t">
+          <a:bodyPr wrap="square" lIns="13716" tIns="13716" rIns="13716" bIns="13716" anchor="t">
             <a:noAutofit/>
           </a:bodyPr>
           <a:lstStyle/>
@@ -13534,6 +13497,7 @@
           <a:lstStyle/>
           <a:p>
             <a:pPr algn="ctr"/>
+            <a:endParaRPr/>
           </a:p>
         </p:txBody>
       </p:sp>
@@ -13563,6 +13527,7 @@
           <a:lstStyle/>
           <a:p>
             <a:pPr algn="ctr"/>
+            <a:endParaRPr/>
           </a:p>
         </p:txBody>
       </p:sp>
@@ -13583,7 +13548,7 @@
           <a:noFill/>
         </p:spPr>
         <p:txBody>
-          <a:bodyPr wrap="square" lIns="13716" rIns="13716" tIns="13716" bIns="13716" anchor="t">
+          <a:bodyPr wrap="square" lIns="13716" tIns="13716" rIns="13716" bIns="13716" anchor="t">
             <a:noAutofit/>
           </a:bodyPr>
           <a:lstStyle/>
@@ -13628,7 +13593,7 @@
           <a:noFill/>
         </p:spPr>
         <p:txBody>
-          <a:bodyPr wrap="square" lIns="13716" rIns="13716" tIns="13716" bIns="13716" anchor="t">
+          <a:bodyPr wrap="square" lIns="13716" tIns="13716" rIns="13716" bIns="13716" anchor="t">
             <a:noAutofit/>
           </a:bodyPr>
           <a:lstStyle/>
@@ -13695,7 +13660,7 @@
           <a:noFill/>
         </p:spPr>
         <p:txBody>
-          <a:bodyPr wrap="square" lIns="13716" rIns="13716" tIns="13716" bIns="13716" anchor="t">
+          <a:bodyPr wrap="square" lIns="13716" tIns="13716" rIns="13716" bIns="13716" anchor="t">
             <a:noAutofit/>
           </a:bodyPr>
           <a:lstStyle/>
@@ -13740,7 +13705,7 @@
           <a:noFill/>
         </p:spPr>
         <p:txBody>
-          <a:bodyPr wrap="square" lIns="13716" rIns="13716" tIns="13716" bIns="13716" anchor="t">
+          <a:bodyPr wrap="square" lIns="13716" tIns="13716" rIns="13716" bIns="13716" anchor="t">
             <a:noAutofit/>
           </a:bodyPr>
           <a:lstStyle/>
@@ -13803,6 +13768,7 @@
           <a:lstStyle/>
           <a:p>
             <a:pPr algn="ctr"/>
+            <a:endParaRPr/>
           </a:p>
         </p:txBody>
       </p:sp>
@@ -13832,6 +13798,7 @@
           <a:lstStyle/>
           <a:p>
             <a:pPr algn="ctr"/>
+            <a:endParaRPr/>
           </a:p>
         </p:txBody>
       </p:sp>
@@ -13852,7 +13819,7 @@
           <a:noFill/>
         </p:spPr>
         <p:txBody>
-          <a:bodyPr wrap="square" lIns="13716" rIns="13716" tIns="13716" bIns="13716" anchor="t">
+          <a:bodyPr wrap="square" lIns="13716" tIns="13716" rIns="13716" bIns="13716" anchor="t">
             <a:noAutofit/>
           </a:bodyPr>
           <a:lstStyle/>
@@ -13897,7 +13864,7 @@
           <a:noFill/>
         </p:spPr>
         <p:txBody>
-          <a:bodyPr wrap="square" lIns="13716" rIns="13716" tIns="13716" bIns="13716" anchor="t">
+          <a:bodyPr wrap="square" lIns="13716" tIns="13716" rIns="13716" bIns="13716" anchor="t">
             <a:noAutofit/>
           </a:bodyPr>
           <a:lstStyle/>
@@ -14004,6 +13971,7 @@
           <a:lstStyle/>
           <a:p>
             <a:pPr algn="ctr"/>
+            <a:endParaRPr/>
           </a:p>
         </p:txBody>
       </p:sp>
@@ -14033,6 +14001,7 @@
           <a:lstStyle/>
           <a:p>
             <a:pPr algn="ctr"/>
+            <a:endParaRPr/>
           </a:p>
         </p:txBody>
       </p:sp>
@@ -14053,7 +14022,7 @@
           <a:noFill/>
         </p:spPr>
         <p:txBody>
-          <a:bodyPr wrap="square" lIns="13716" rIns="13716" tIns="13716" bIns="13716" anchor="t">
+          <a:bodyPr wrap="square" lIns="13716" tIns="13716" rIns="13716" bIns="13716" anchor="t">
             <a:noAutofit/>
           </a:bodyPr>
           <a:lstStyle/>
@@ -14098,7 +14067,7 @@
           <a:noFill/>
         </p:spPr>
         <p:txBody>
-          <a:bodyPr wrap="square" lIns="13716" rIns="13716" tIns="13716" bIns="13716" anchor="t">
+          <a:bodyPr wrap="square" lIns="13716" tIns="13716" rIns="13716" bIns="13716" anchor="t">
             <a:noAutofit/>
           </a:bodyPr>
           <a:lstStyle/>
@@ -14205,6 +14174,7 @@
           <a:lstStyle/>
           <a:p>
             <a:pPr algn="ctr"/>
+            <a:endParaRPr/>
           </a:p>
         </p:txBody>
       </p:sp>
@@ -14234,6 +14204,7 @@
           <a:lstStyle/>
           <a:p>
             <a:pPr algn="ctr"/>
+            <a:endParaRPr/>
           </a:p>
         </p:txBody>
       </p:sp>
@@ -14254,7 +14225,7 @@
           <a:noFill/>
         </p:spPr>
         <p:txBody>
-          <a:bodyPr wrap="square" lIns="13716" rIns="13716" tIns="13716" bIns="13716" anchor="t">
+          <a:bodyPr wrap="square" lIns="13716" tIns="13716" rIns="13716" bIns="13716" anchor="t">
             <a:noAutofit/>
           </a:bodyPr>
           <a:lstStyle/>
@@ -14299,7 +14270,7 @@
           <a:noFill/>
         </p:spPr>
         <p:txBody>
-          <a:bodyPr wrap="square" lIns="13716" rIns="13716" tIns="13716" bIns="13716" anchor="t">
+          <a:bodyPr wrap="square" lIns="13716" tIns="13716" rIns="13716" bIns="13716" anchor="t">
             <a:noAutofit/>
           </a:bodyPr>
           <a:lstStyle/>
@@ -14406,6 +14377,7 @@
           <a:lstStyle/>
           <a:p>
             <a:pPr algn="ctr"/>
+            <a:endParaRPr/>
           </a:p>
         </p:txBody>
       </p:sp>
@@ -14435,6 +14407,7 @@
           <a:lstStyle/>
           <a:p>
             <a:pPr algn="ctr"/>
+            <a:endParaRPr/>
           </a:p>
         </p:txBody>
       </p:sp>
@@ -14455,7 +14428,7 @@
           <a:noFill/>
         </p:spPr>
         <p:txBody>
-          <a:bodyPr wrap="square" lIns="13716" rIns="13716" tIns="13716" bIns="13716" anchor="t">
+          <a:bodyPr wrap="square" lIns="13716" tIns="13716" rIns="13716" bIns="13716" anchor="t">
             <a:noAutofit/>
           </a:bodyPr>
           <a:lstStyle/>
@@ -14500,7 +14473,7 @@
           <a:noFill/>
         </p:spPr>
         <p:txBody>
-          <a:bodyPr wrap="square" lIns="13716" rIns="13716" tIns="13716" bIns="13716" anchor="t">
+          <a:bodyPr wrap="square" lIns="13716" tIns="13716" rIns="13716" bIns="13716" anchor="t">
             <a:noAutofit/>
           </a:bodyPr>
           <a:lstStyle/>
@@ -14600,6 +14573,7 @@
           <a:lstStyle/>
           <a:p>
             <a:pPr algn="ctr"/>
+            <a:endParaRPr/>
           </a:p>
         </p:txBody>
       </p:sp>
@@ -14629,6 +14603,7 @@
           <a:lstStyle/>
           <a:p>
             <a:pPr algn="ctr"/>
+            <a:endParaRPr/>
           </a:p>
         </p:txBody>
       </p:sp>
@@ -14649,7 +14624,7 @@
           <a:noFill/>
         </p:spPr>
         <p:txBody>
-          <a:bodyPr wrap="square" lIns="13716" rIns="13716" tIns="13716" bIns="13716" anchor="t">
+          <a:bodyPr wrap="square" lIns="13716" tIns="13716" rIns="13716" bIns="13716" anchor="t">
             <a:noAutofit/>
           </a:bodyPr>
           <a:lstStyle/>
@@ -14686,7 +14661,7 @@
 </file>
 
 <file path=ppt/slides/slide6.xml><?xml version="1.0" encoding="utf-8"?>
-<p:sld xmlns:a="http://schemas.openxmlformats.org/drawingml/2006/main" xmlns:p="http://schemas.openxmlformats.org/presentationml/2006/main" xmlns:r="http://schemas.openxmlformats.org/officeDocument/2006/relationships">
+<p:sld xmlns:a="http://schemas.openxmlformats.org/drawingml/2006/main" xmlns:r="http://schemas.openxmlformats.org/officeDocument/2006/relationships" xmlns:p="http://schemas.openxmlformats.org/presentationml/2006/main">
   <p:cSld>
     <p:spTree>
       <p:nvGrpSpPr>
@@ -14694,7 +14669,14 @@
         <p:cNvGrpSpPr/>
         <p:nvPr/>
       </p:nvGrpSpPr>
-      <p:grpSpPr/>
+      <p:grpSpPr>
+        <a:xfrm>
+          <a:off x="0" y="0"/>
+          <a:ext cx="0" cy="0"/>
+          <a:chOff x="0" y="0"/>
+          <a:chExt cx="0" cy="0"/>
+        </a:xfrm>
+      </p:grpSpPr>
       <p:pic>
         <p:nvPicPr>
           <p:cNvPr id="2" name="Picture 1" descr="template2_background.png"/>
@@ -14704,7 +14686,7 @@
           <p:nvPr/>
         </p:nvPicPr>
         <p:blipFill>
-          <a:blip r:embed="rId2"/>
+          <a:blip r:embed="rId3"/>
           <a:stretch>
             <a:fillRect/>
           </a:stretch>
@@ -14736,7 +14718,7 @@
           <a:noFill/>
         </p:spPr>
         <p:txBody>
-          <a:bodyPr wrap="square" lIns="13716" rIns="13716" tIns="13716" bIns="13716" anchor="t">
+          <a:bodyPr wrap="square" lIns="13716" tIns="13716" rIns="13716" bIns="13716" anchor="t">
             <a:noAutofit/>
           </a:bodyPr>
           <a:lstStyle/>
@@ -14790,6 +14772,7 @@
           <a:lstStyle/>
           <a:p>
             <a:pPr algn="ctr"/>
+            <a:endParaRPr/>
           </a:p>
         </p:txBody>
       </p:sp>
@@ -14810,7 +14793,7 @@
           <a:noFill/>
         </p:spPr>
         <p:txBody>
-          <a:bodyPr wrap="square" lIns="13716" rIns="13716" tIns="13716" bIns="13716" anchor="t">
+          <a:bodyPr wrap="square" lIns="13716" tIns="13716" rIns="13716" bIns="13716" anchor="t">
             <a:noAutofit/>
           </a:bodyPr>
           <a:lstStyle/>
@@ -14855,7 +14838,7 @@
           <a:noFill/>
         </p:spPr>
         <p:txBody>
-          <a:bodyPr wrap="square" lIns="13716" rIns="13716" tIns="13716" bIns="13716" anchor="t">
+          <a:bodyPr wrap="square" lIns="13716" tIns="13716" rIns="13716" bIns="13716" anchor="t">
             <a:noAutofit/>
           </a:bodyPr>
           <a:lstStyle/>
@@ -14900,7 +14883,7 @@
           <a:noFill/>
         </p:spPr>
         <p:txBody>
-          <a:bodyPr wrap="square" lIns="13716" rIns="13716" tIns="13716" bIns="13716" anchor="t">
+          <a:bodyPr wrap="square" lIns="13716" tIns="13716" rIns="13716" bIns="13716" anchor="t">
             <a:noAutofit/>
           </a:bodyPr>
           <a:lstStyle/>
@@ -14954,6 +14937,7 @@
           <a:lstStyle/>
           <a:p>
             <a:pPr algn="ctr"/>
+            <a:endParaRPr/>
           </a:p>
         </p:txBody>
       </p:sp>
@@ -14974,7 +14958,7 @@
           <a:noFill/>
         </p:spPr>
         <p:txBody>
-          <a:bodyPr wrap="square" lIns="13716" rIns="13716" tIns="13716" bIns="13716" anchor="t">
+          <a:bodyPr wrap="square" lIns="13716" tIns="13716" rIns="13716" bIns="13716" anchor="t">
             <a:noAutofit/>
           </a:bodyPr>
           <a:lstStyle/>
@@ -15019,7 +15003,7 @@
           <a:noFill/>
         </p:spPr>
         <p:txBody>
-          <a:bodyPr wrap="square" lIns="13716" rIns="13716" tIns="13716" bIns="13716" anchor="t">
+          <a:bodyPr wrap="square" lIns="13716" tIns="13716" rIns="13716" bIns="13716" anchor="t">
             <a:noAutofit/>
           </a:bodyPr>
           <a:lstStyle/>
@@ -15064,7 +15048,7 @@
           <a:noFill/>
         </p:spPr>
         <p:txBody>
-          <a:bodyPr wrap="square" lIns="13716" rIns="13716" tIns="13716" bIns="13716" anchor="t">
+          <a:bodyPr wrap="square" lIns="13716" tIns="13716" rIns="13716" bIns="13716" anchor="t">
             <a:noAutofit/>
           </a:bodyPr>
           <a:lstStyle/>
@@ -15127,6 +15111,7 @@
           <a:lstStyle/>
           <a:p>
             <a:pPr algn="ctr"/>
+            <a:endParaRPr/>
           </a:p>
         </p:txBody>
       </p:sp>
@@ -15156,6 +15141,7 @@
           <a:lstStyle/>
           <a:p>
             <a:pPr algn="ctr"/>
+            <a:endParaRPr/>
           </a:p>
         </p:txBody>
       </p:sp>
@@ -15176,7 +15162,7 @@
           <a:noFill/>
         </p:spPr>
         <p:txBody>
-          <a:bodyPr wrap="square" lIns="13716" rIns="13716" tIns="13716" bIns="13716" anchor="t">
+          <a:bodyPr wrap="square" lIns="13716" tIns="13716" rIns="13716" bIns="13716" anchor="t">
             <a:noAutofit/>
           </a:bodyPr>
           <a:lstStyle/>
@@ -15221,7 +15207,7 @@
           <a:noFill/>
         </p:spPr>
         <p:txBody>
-          <a:bodyPr wrap="square" lIns="13716" rIns="13716" tIns="13716" bIns="13716" anchor="t">
+          <a:bodyPr wrap="square" lIns="13716" tIns="13716" rIns="13716" bIns="13716" anchor="t">
             <a:noAutofit/>
           </a:bodyPr>
           <a:lstStyle/>
@@ -15328,6 +15314,7 @@
           <a:lstStyle/>
           <a:p>
             <a:pPr algn="ctr"/>
+            <a:endParaRPr/>
           </a:p>
         </p:txBody>
       </p:sp>
@@ -15357,6 +15344,7 @@
           <a:lstStyle/>
           <a:p>
             <a:pPr algn="ctr"/>
+            <a:endParaRPr/>
           </a:p>
         </p:txBody>
       </p:sp>
@@ -15377,7 +15365,7 @@
           <a:noFill/>
         </p:spPr>
         <p:txBody>
-          <a:bodyPr wrap="square" lIns="13716" rIns="13716" tIns="13716" bIns="13716" anchor="t">
+          <a:bodyPr wrap="square" lIns="13716" tIns="13716" rIns="13716" bIns="13716" anchor="t">
             <a:noAutofit/>
           </a:bodyPr>
           <a:lstStyle/>
@@ -15422,7 +15410,7 @@
           <a:noFill/>
         </p:spPr>
         <p:txBody>
-          <a:bodyPr wrap="square" lIns="13716" rIns="13716" tIns="13716" bIns="13716" anchor="t">
+          <a:bodyPr wrap="square" lIns="13716" tIns="13716" rIns="13716" bIns="13716" anchor="t">
             <a:noAutofit/>
           </a:bodyPr>
           <a:lstStyle/>
@@ -15485,6 +15473,7 @@
           <a:lstStyle/>
           <a:p>
             <a:pPr algn="ctr"/>
+            <a:endParaRPr/>
           </a:p>
         </p:txBody>
       </p:sp>
@@ -15514,6 +15503,7 @@
           <a:lstStyle/>
           <a:p>
             <a:pPr algn="ctr"/>
+            <a:endParaRPr/>
           </a:p>
         </p:txBody>
       </p:sp>
@@ -15534,7 +15524,7 @@
           <a:noFill/>
         </p:spPr>
         <p:txBody>
-          <a:bodyPr wrap="square" lIns="13716" rIns="13716" tIns="13716" bIns="13716" anchor="t">
+          <a:bodyPr wrap="square" lIns="13716" tIns="13716" rIns="13716" bIns="13716" anchor="t">
             <a:noAutofit/>
           </a:bodyPr>
           <a:lstStyle/>
@@ -15579,7 +15569,7 @@
           <a:noFill/>
         </p:spPr>
         <p:txBody>
-          <a:bodyPr wrap="square" lIns="13716" rIns="13716" tIns="13716" bIns="13716" anchor="t">
+          <a:bodyPr wrap="square" lIns="13716" tIns="13716" rIns="13716" bIns="13716" anchor="t">
             <a:noAutofit/>
           </a:bodyPr>
           <a:lstStyle/>
@@ -15686,6 +15676,7 @@
           <a:lstStyle/>
           <a:p>
             <a:pPr algn="ctr"/>
+            <a:endParaRPr/>
           </a:p>
         </p:txBody>
       </p:sp>
@@ -15715,6 +15706,7 @@
           <a:lstStyle/>
           <a:p>
             <a:pPr algn="ctr"/>
+            <a:endParaRPr/>
           </a:p>
         </p:txBody>
       </p:sp>
@@ -15735,7 +15727,7 @@
           <a:noFill/>
         </p:spPr>
         <p:txBody>
-          <a:bodyPr wrap="square" lIns="13716" rIns="13716" tIns="13716" bIns="13716" anchor="t">
+          <a:bodyPr wrap="square" lIns="13716" tIns="13716" rIns="13716" bIns="13716" anchor="t">
             <a:noAutofit/>
           </a:bodyPr>
           <a:lstStyle/>
@@ -15780,7 +15772,7 @@
           <a:noFill/>
         </p:spPr>
         <p:txBody>
-          <a:bodyPr wrap="square" lIns="13716" rIns="13716" tIns="13716" bIns="13716" anchor="t">
+          <a:bodyPr wrap="square" lIns="13716" tIns="13716" rIns="13716" bIns="13716" anchor="t">
             <a:noAutofit/>
           </a:bodyPr>
           <a:lstStyle/>
@@ -15843,6 +15835,7 @@
           <a:lstStyle/>
           <a:p>
             <a:pPr algn="ctr"/>
+            <a:endParaRPr/>
           </a:p>
         </p:txBody>
       </p:sp>
@@ -15872,6 +15865,7 @@
           <a:lstStyle/>
           <a:p>
             <a:pPr algn="ctr"/>
+            <a:endParaRPr/>
           </a:p>
         </p:txBody>
       </p:sp>
@@ -15892,7 +15886,7 @@
           <a:noFill/>
         </p:spPr>
         <p:txBody>
-          <a:bodyPr wrap="square" lIns="13716" rIns="13716" tIns="13716" bIns="13716" anchor="t">
+          <a:bodyPr wrap="square" lIns="13716" tIns="13716" rIns="13716" bIns="13716" anchor="t">
             <a:noAutofit/>
           </a:bodyPr>
           <a:lstStyle/>
@@ -15937,7 +15931,7 @@
           <a:noFill/>
         </p:spPr>
         <p:txBody>
-          <a:bodyPr wrap="square" lIns="13716" rIns="13716" tIns="13716" bIns="13716" anchor="t">
+          <a:bodyPr wrap="square" lIns="13716" tIns="13716" rIns="13716" bIns="13716" anchor="t">
             <a:noAutofit/>
           </a:bodyPr>
           <a:lstStyle/>
@@ -16044,6 +16038,7 @@
           <a:lstStyle/>
           <a:p>
             <a:pPr algn="ctr"/>
+            <a:endParaRPr/>
           </a:p>
         </p:txBody>
       </p:sp>
@@ -16073,6 +16068,7 @@
           <a:lstStyle/>
           <a:p>
             <a:pPr algn="ctr"/>
+            <a:endParaRPr/>
           </a:p>
         </p:txBody>
       </p:sp>
@@ -16093,7 +16089,7 @@
           <a:noFill/>
         </p:spPr>
         <p:txBody>
-          <a:bodyPr wrap="square" lIns="13716" rIns="13716" tIns="13716" bIns="13716" anchor="t">
+          <a:bodyPr wrap="square" lIns="13716" tIns="13716" rIns="13716" bIns="13716" anchor="t">
             <a:noAutofit/>
           </a:bodyPr>
           <a:lstStyle/>
@@ -16138,7 +16134,7 @@
           <a:noFill/>
         </p:spPr>
         <p:txBody>
-          <a:bodyPr wrap="square" lIns="13716" rIns="13716" tIns="13716" bIns="13716" anchor="t">
+          <a:bodyPr wrap="square" lIns="13716" tIns="13716" rIns="13716" bIns="13716" anchor="t">
             <a:noAutofit/>
           </a:bodyPr>
           <a:lstStyle/>
@@ -16183,7 +16179,7 @@
           <a:noFill/>
         </p:spPr>
         <p:txBody>
-          <a:bodyPr wrap="square" lIns="13716" rIns="13716" tIns="13716" bIns="13716" anchor="t">
+          <a:bodyPr wrap="square" lIns="13716" tIns="13716" rIns="13716" bIns="13716" anchor="t">
             <a:noAutofit/>
           </a:bodyPr>
           <a:lstStyle/>
@@ -16239,6 +16235,7 @@
           <a:lstStyle/>
           <a:p>
             <a:pPr algn="ctr"/>
+            <a:endParaRPr/>
           </a:p>
         </p:txBody>
       </p:sp>
@@ -16268,6 +16265,7 @@
           <a:lstStyle/>
           <a:p>
             <a:pPr algn="ctr"/>
+            <a:endParaRPr/>
           </a:p>
         </p:txBody>
       </p:sp>
@@ -16288,7 +16286,7 @@
           <a:noFill/>
         </p:spPr>
         <p:txBody>
-          <a:bodyPr wrap="square" lIns="13716" rIns="13716" tIns="13716" bIns="13716" anchor="t">
+          <a:bodyPr wrap="square" lIns="13716" tIns="13716" rIns="13716" bIns="13716" anchor="t">
             <a:noAutofit/>
           </a:bodyPr>
           <a:lstStyle/>
@@ -16344,6 +16342,7 @@
           <a:lstStyle/>
           <a:p>
             <a:pPr algn="ctr"/>
+            <a:endParaRPr/>
           </a:p>
         </p:txBody>
       </p:sp>
@@ -16373,6 +16372,7 @@
           <a:lstStyle/>
           <a:p>
             <a:pPr algn="ctr"/>
+            <a:endParaRPr/>
           </a:p>
         </p:txBody>
       </p:sp>
@@ -16393,7 +16393,7 @@
           <a:noFill/>
         </p:spPr>
         <p:txBody>
-          <a:bodyPr wrap="square" lIns="13716" rIns="13716" tIns="13716" bIns="13716" anchor="t">
+          <a:bodyPr wrap="square" lIns="13716" tIns="13716" rIns="13716" bIns="13716" anchor="t">
             <a:noAutofit/>
           </a:bodyPr>
           <a:lstStyle/>
@@ -16449,6 +16449,7 @@
           <a:lstStyle/>
           <a:p>
             <a:pPr algn="ctr"/>
+            <a:endParaRPr/>
           </a:p>
         </p:txBody>
       </p:sp>
@@ -16478,6 +16479,7 @@
           <a:lstStyle/>
           <a:p>
             <a:pPr algn="ctr"/>
+            <a:endParaRPr/>
           </a:p>
         </p:txBody>
       </p:sp>
@@ -16498,7 +16500,7 @@
           <a:noFill/>
         </p:spPr>
         <p:txBody>
-          <a:bodyPr wrap="square" lIns="13716" rIns="13716" tIns="13716" bIns="13716" anchor="t">
+          <a:bodyPr wrap="square" lIns="13716" tIns="13716" rIns="13716" bIns="13716" anchor="t">
             <a:noAutofit/>
           </a:bodyPr>
           <a:lstStyle/>
@@ -16554,6 +16556,7 @@
           <a:lstStyle/>
           <a:p>
             <a:pPr algn="ctr"/>
+            <a:endParaRPr/>
           </a:p>
         </p:txBody>
       </p:sp>
@@ -16583,6 +16586,7 @@
           <a:lstStyle/>
           <a:p>
             <a:pPr algn="ctr"/>
+            <a:endParaRPr/>
           </a:p>
         </p:txBody>
       </p:sp>
@@ -16603,7 +16607,7 @@
           <a:noFill/>
         </p:spPr>
         <p:txBody>
-          <a:bodyPr wrap="square" lIns="13716" rIns="13716" tIns="13716" bIns="13716" anchor="t">
+          <a:bodyPr wrap="square" lIns="13716" tIns="13716" rIns="13716" bIns="13716" anchor="t">
             <a:noAutofit/>
           </a:bodyPr>
           <a:lstStyle/>
@@ -16657,6 +16661,7 @@
           <a:lstStyle/>
           <a:p>
             <a:pPr algn="ctr"/>
+            <a:endParaRPr/>
           </a:p>
         </p:txBody>
       </p:sp>
@@ -16686,6 +16691,7 @@
           <a:lstStyle/>
           <a:p>
             <a:pPr algn="ctr"/>
+            <a:endParaRPr/>
           </a:p>
         </p:txBody>
       </p:sp>
@@ -16706,7 +16712,7 @@
           <a:noFill/>
         </p:spPr>
         <p:txBody>
-          <a:bodyPr wrap="square" lIns="13716" rIns="13716" tIns="13716" bIns="13716" anchor="t">
+          <a:bodyPr wrap="square" lIns="13716" tIns="13716" rIns="13716" bIns="13716" anchor="t">
             <a:noAutofit/>
           </a:bodyPr>
           <a:lstStyle/>
@@ -16743,7 +16749,7 @@
 </file>
 
 <file path=ppt/slides/slide7.xml><?xml version="1.0" encoding="utf-8"?>
-<p:sld xmlns:a="http://schemas.openxmlformats.org/drawingml/2006/main" xmlns:p="http://schemas.openxmlformats.org/presentationml/2006/main" xmlns:r="http://schemas.openxmlformats.org/officeDocument/2006/relationships">
+<p:sld xmlns:a="http://schemas.openxmlformats.org/drawingml/2006/main" xmlns:r="http://schemas.openxmlformats.org/officeDocument/2006/relationships" xmlns:p="http://schemas.openxmlformats.org/presentationml/2006/main">
   <p:cSld>
     <p:spTree>
       <p:nvGrpSpPr>
@@ -16751,7 +16757,14 @@
         <p:cNvGrpSpPr/>
         <p:nvPr/>
       </p:nvGrpSpPr>
-      <p:grpSpPr/>
+      <p:grpSpPr>
+        <a:xfrm>
+          <a:off x="0" y="0"/>
+          <a:ext cx="0" cy="0"/>
+          <a:chOff x="0" y="0"/>
+          <a:chExt cx="0" cy="0"/>
+        </a:xfrm>
+      </p:grpSpPr>
       <p:pic>
         <p:nvPicPr>
           <p:cNvPr id="2" name="Picture 1" descr="template2_background.png"/>
@@ -16761,7 +16774,7 @@
           <p:nvPr/>
         </p:nvPicPr>
         <p:blipFill>
-          <a:blip r:embed="rId2"/>
+          <a:blip r:embed="rId3"/>
           <a:stretch>
             <a:fillRect/>
           </a:stretch>
@@ -16793,7 +16806,7 @@
           <a:noFill/>
         </p:spPr>
         <p:txBody>
-          <a:bodyPr wrap="square" lIns="13716" rIns="13716" tIns="13716" bIns="13716" anchor="t">
+          <a:bodyPr wrap="square" lIns="13716" tIns="13716" rIns="13716" bIns="13716" anchor="t">
             <a:noAutofit/>
           </a:bodyPr>
           <a:lstStyle/>
@@ -16847,6 +16860,7 @@
           <a:lstStyle/>
           <a:p>
             <a:pPr algn="ctr"/>
+            <a:endParaRPr/>
           </a:p>
         </p:txBody>
       </p:sp>
@@ -16867,7 +16881,7 @@
           <a:noFill/>
         </p:spPr>
         <p:txBody>
-          <a:bodyPr wrap="square" lIns="13716" rIns="13716" tIns="13716" bIns="13716" anchor="t">
+          <a:bodyPr wrap="square" lIns="13716" tIns="13716" rIns="13716" bIns="13716" anchor="t">
             <a:noAutofit/>
           </a:bodyPr>
           <a:lstStyle/>
@@ -16912,7 +16926,7 @@
           <a:noFill/>
         </p:spPr>
         <p:txBody>
-          <a:bodyPr wrap="square" lIns="13716" rIns="13716" tIns="13716" bIns="13716" anchor="t">
+          <a:bodyPr wrap="square" lIns="13716" tIns="13716" rIns="13716" bIns="13716" anchor="t">
             <a:noAutofit/>
           </a:bodyPr>
           <a:lstStyle/>
@@ -16957,7 +16971,7 @@
           <a:noFill/>
         </p:spPr>
         <p:txBody>
-          <a:bodyPr wrap="square" lIns="13716" rIns="13716" tIns="13716" bIns="13716" anchor="t">
+          <a:bodyPr wrap="square" lIns="13716" tIns="13716" rIns="13716" bIns="13716" anchor="t">
             <a:noAutofit/>
           </a:bodyPr>
           <a:lstStyle/>
@@ -17011,6 +17025,7 @@
           <a:lstStyle/>
           <a:p>
             <a:pPr algn="ctr"/>
+            <a:endParaRPr/>
           </a:p>
         </p:txBody>
       </p:sp>
@@ -17031,7 +17046,7 @@
           <a:noFill/>
         </p:spPr>
         <p:txBody>
-          <a:bodyPr wrap="square" lIns="13716" rIns="13716" tIns="13716" bIns="13716" anchor="t">
+          <a:bodyPr wrap="square" lIns="13716" tIns="13716" rIns="13716" bIns="13716" anchor="t">
             <a:noAutofit/>
           </a:bodyPr>
           <a:lstStyle/>
@@ -17076,7 +17091,7 @@
           <a:noFill/>
         </p:spPr>
         <p:txBody>
-          <a:bodyPr wrap="square" lIns="13716" rIns="13716" tIns="13716" bIns="13716" anchor="t">
+          <a:bodyPr wrap="square" lIns="13716" tIns="13716" rIns="13716" bIns="13716" anchor="t">
             <a:noAutofit/>
           </a:bodyPr>
           <a:lstStyle/>
@@ -17121,7 +17136,7 @@
           <a:noFill/>
         </p:spPr>
         <p:txBody>
-          <a:bodyPr wrap="square" lIns="13716" rIns="13716" tIns="13716" bIns="13716" anchor="t">
+          <a:bodyPr wrap="square" lIns="13716" tIns="13716" rIns="13716" bIns="13716" anchor="t">
             <a:noAutofit/>
           </a:bodyPr>
           <a:lstStyle/>
@@ -17184,6 +17199,7 @@
           <a:lstStyle/>
           <a:p>
             <a:pPr algn="ctr"/>
+            <a:endParaRPr/>
           </a:p>
         </p:txBody>
       </p:sp>
@@ -17213,6 +17229,7 @@
           <a:lstStyle/>
           <a:p>
             <a:pPr algn="ctr"/>
+            <a:endParaRPr/>
           </a:p>
         </p:txBody>
       </p:sp>
@@ -17233,7 +17250,7 @@
           <a:noFill/>
         </p:spPr>
         <p:txBody>
-          <a:bodyPr wrap="square" lIns="13716" rIns="13716" tIns="13716" bIns="13716" anchor="t">
+          <a:bodyPr wrap="square" lIns="13716" tIns="13716" rIns="13716" bIns="13716" anchor="t">
             <a:noAutofit/>
           </a:bodyPr>
           <a:lstStyle/>
@@ -17278,7 +17295,7 @@
           <a:noFill/>
         </p:spPr>
         <p:txBody>
-          <a:bodyPr wrap="square" lIns="13716" rIns="13716" tIns="13716" bIns="13716" anchor="t">
+          <a:bodyPr wrap="square" lIns="13716" tIns="13716" rIns="13716" bIns="13716" anchor="t">
             <a:noAutofit/>
           </a:bodyPr>
           <a:lstStyle/>
@@ -17341,6 +17358,7 @@
           <a:lstStyle/>
           <a:p>
             <a:pPr algn="ctr"/>
+            <a:endParaRPr/>
           </a:p>
         </p:txBody>
       </p:sp>
@@ -17361,7 +17379,7 @@
           <a:noFill/>
         </p:spPr>
         <p:txBody>
-          <a:bodyPr wrap="square" lIns="13716" rIns="13716" tIns="13716" bIns="13716" anchor="t">
+          <a:bodyPr wrap="square" lIns="13716" tIns="13716" rIns="13716" bIns="13716" anchor="t">
             <a:noAutofit/>
           </a:bodyPr>
           <a:lstStyle/>
@@ -17415,6 +17433,7 @@
           <a:lstStyle/>
           <a:p>
             <a:pPr algn="ctr"/>
+            <a:endParaRPr/>
           </a:p>
         </p:txBody>
       </p:sp>
@@ -17426,16 +17445,16 @@
         </p:nvSpPr>
         <p:spPr>
           <a:xfrm>
-            <a:off x="1078992" y="3703320"/>
-            <a:ext cx="3246120" cy="237744"/>
-          </a:xfrm>
-          <a:prstGeom prst="rect">
-            <a:avLst/>
-          </a:prstGeom>
-          <a:noFill/>
-        </p:spPr>
-        <p:txBody>
-          <a:bodyPr wrap="square" lIns="13716" rIns="13716" tIns="13716" bIns="13716" anchor="t">
+            <a:off x="1078992" y="3675888"/>
+            <a:ext cx="3246120" cy="365760"/>
+          </a:xfrm>
+          <a:prstGeom prst="rect">
+            <a:avLst/>
+          </a:prstGeom>
+          <a:noFill/>
+        </p:spPr>
+        <p:txBody>
+          <a:bodyPr wrap="square" lIns="13716" tIns="13716" rIns="13716" bIns="13716" anchor="t">
             <a:noAutofit/>
           </a:bodyPr>
           <a:lstStyle/>
@@ -17489,6 +17508,7 @@
           <a:lstStyle/>
           <a:p>
             <a:pPr algn="ctr"/>
+            <a:endParaRPr/>
           </a:p>
         </p:txBody>
       </p:sp>
@@ -17500,16 +17520,16 @@
         </p:nvSpPr>
         <p:spPr>
           <a:xfrm>
-            <a:off x="1078992" y="4270248"/>
-            <a:ext cx="3246120" cy="237744"/>
-          </a:xfrm>
-          <a:prstGeom prst="rect">
-            <a:avLst/>
-          </a:prstGeom>
-          <a:noFill/>
-        </p:spPr>
-        <p:txBody>
-          <a:bodyPr wrap="square" lIns="13716" rIns="13716" tIns="13716" bIns="13716" anchor="t">
+            <a:off x="1078992" y="4242816"/>
+            <a:ext cx="3246120" cy="365760"/>
+          </a:xfrm>
+          <a:prstGeom prst="rect">
+            <a:avLst/>
+          </a:prstGeom>
+          <a:noFill/>
+        </p:spPr>
+        <p:txBody>
+          <a:bodyPr wrap="square" lIns="13716" tIns="13716" rIns="13716" bIns="13716" anchor="t">
             <a:noAutofit/>
           </a:bodyPr>
           <a:lstStyle/>
@@ -17563,6 +17583,7 @@
           <a:lstStyle/>
           <a:p>
             <a:pPr algn="ctr"/>
+            <a:endParaRPr/>
           </a:p>
         </p:txBody>
       </p:sp>
@@ -17574,16 +17595,16 @@
         </p:nvSpPr>
         <p:spPr>
           <a:xfrm>
-            <a:off x="1078992" y="4837176"/>
-            <a:ext cx="3246120" cy="237744"/>
-          </a:xfrm>
-          <a:prstGeom prst="rect">
-            <a:avLst/>
-          </a:prstGeom>
-          <a:noFill/>
-        </p:spPr>
-        <p:txBody>
-          <a:bodyPr wrap="square" lIns="13716" rIns="13716" tIns="13716" bIns="13716" anchor="t">
+            <a:off x="1078992" y="4809744"/>
+            <a:ext cx="3246120" cy="365760"/>
+          </a:xfrm>
+          <a:prstGeom prst="rect">
+            <a:avLst/>
+          </a:prstGeom>
+          <a:noFill/>
+        </p:spPr>
+        <p:txBody>
+          <a:bodyPr wrap="square" lIns="13716" tIns="13716" rIns="13716" bIns="13716" anchor="t">
             <a:noAutofit/>
           </a:bodyPr>
           <a:lstStyle/>
@@ -17637,6 +17658,7 @@
           <a:lstStyle/>
           <a:p>
             <a:pPr algn="ctr"/>
+            <a:endParaRPr/>
           </a:p>
         </p:txBody>
       </p:sp>
@@ -17648,16 +17670,16 @@
         </p:nvSpPr>
         <p:spPr>
           <a:xfrm>
-            <a:off x="1078992" y="5404103"/>
-            <a:ext cx="3246120" cy="237744"/>
-          </a:xfrm>
-          <a:prstGeom prst="rect">
-            <a:avLst/>
-          </a:prstGeom>
-          <a:noFill/>
-        </p:spPr>
-        <p:txBody>
-          <a:bodyPr wrap="square" lIns="13716" rIns="13716" tIns="13716" bIns="13716" anchor="t">
+            <a:off x="1078992" y="5376671"/>
+            <a:ext cx="3246120" cy="365760"/>
+          </a:xfrm>
+          <a:prstGeom prst="rect">
+            <a:avLst/>
+          </a:prstGeom>
+          <a:noFill/>
+        </p:spPr>
+        <p:txBody>
+          <a:bodyPr wrap="square" lIns="13716" tIns="13716" rIns="13716" bIns="13716" anchor="t">
             <a:noAutofit/>
           </a:bodyPr>
           <a:lstStyle/>
@@ -17720,6 +17742,7 @@
           <a:lstStyle/>
           <a:p>
             <a:pPr algn="ctr"/>
+            <a:endParaRPr/>
           </a:p>
         </p:txBody>
       </p:sp>
@@ -17740,7 +17763,7 @@
           <a:noFill/>
         </p:spPr>
         <p:txBody>
-          <a:bodyPr wrap="square" lIns="13716" rIns="13716" tIns="13716" bIns="13716" anchor="t">
+          <a:bodyPr wrap="square" lIns="13716" tIns="13716" rIns="13716" bIns="13716" anchor="t">
             <a:noAutofit/>
           </a:bodyPr>
           <a:lstStyle/>
@@ -17794,6 +17817,7 @@
           <a:lstStyle/>
           <a:p>
             <a:pPr algn="ctr"/>
+            <a:endParaRPr/>
           </a:p>
         </p:txBody>
       </p:sp>
@@ -17805,16 +17829,16 @@
         </p:nvSpPr>
         <p:spPr>
           <a:xfrm>
-            <a:off x="5660136" y="3703320"/>
-            <a:ext cx="3246120" cy="237744"/>
-          </a:xfrm>
-          <a:prstGeom prst="rect">
-            <a:avLst/>
-          </a:prstGeom>
-          <a:noFill/>
-        </p:spPr>
-        <p:txBody>
-          <a:bodyPr wrap="square" lIns="13716" rIns="13716" tIns="13716" bIns="13716" anchor="t">
+            <a:off x="5660136" y="3675888"/>
+            <a:ext cx="3246120" cy="365760"/>
+          </a:xfrm>
+          <a:prstGeom prst="rect">
+            <a:avLst/>
+          </a:prstGeom>
+          <a:noFill/>
+        </p:spPr>
+        <p:txBody>
+          <a:bodyPr wrap="square" lIns="13716" tIns="13716" rIns="13716" bIns="13716" anchor="t">
             <a:noAutofit/>
           </a:bodyPr>
           <a:lstStyle/>
@@ -17868,6 +17892,7 @@
           <a:lstStyle/>
           <a:p>
             <a:pPr algn="ctr"/>
+            <a:endParaRPr/>
           </a:p>
         </p:txBody>
       </p:sp>
@@ -17879,16 +17904,16 @@
         </p:nvSpPr>
         <p:spPr>
           <a:xfrm>
-            <a:off x="5660136" y="4270248"/>
-            <a:ext cx="3246120" cy="237744"/>
-          </a:xfrm>
-          <a:prstGeom prst="rect">
-            <a:avLst/>
-          </a:prstGeom>
-          <a:noFill/>
-        </p:spPr>
-        <p:txBody>
-          <a:bodyPr wrap="square" lIns="13716" rIns="13716" tIns="13716" bIns="13716" anchor="t">
+            <a:off x="5660136" y="4242816"/>
+            <a:ext cx="3246120" cy="365760"/>
+          </a:xfrm>
+          <a:prstGeom prst="rect">
+            <a:avLst/>
+          </a:prstGeom>
+          <a:noFill/>
+        </p:spPr>
+        <p:txBody>
+          <a:bodyPr wrap="square" lIns="13716" tIns="13716" rIns="13716" bIns="13716" anchor="t">
             <a:noAutofit/>
           </a:bodyPr>
           <a:lstStyle/>
@@ -17942,6 +17967,7 @@
           <a:lstStyle/>
           <a:p>
             <a:pPr algn="ctr"/>
+            <a:endParaRPr/>
           </a:p>
         </p:txBody>
       </p:sp>
@@ -17953,16 +17979,16 @@
         </p:nvSpPr>
         <p:spPr>
           <a:xfrm>
-            <a:off x="5660136" y="4837176"/>
-            <a:ext cx="3246120" cy="237744"/>
-          </a:xfrm>
-          <a:prstGeom prst="rect">
-            <a:avLst/>
-          </a:prstGeom>
-          <a:noFill/>
-        </p:spPr>
-        <p:txBody>
-          <a:bodyPr wrap="square" lIns="13716" rIns="13716" tIns="13716" bIns="13716" anchor="t">
+            <a:off x="5660136" y="4809744"/>
+            <a:ext cx="3246120" cy="365760"/>
+          </a:xfrm>
+          <a:prstGeom prst="rect">
+            <a:avLst/>
+          </a:prstGeom>
+          <a:noFill/>
+        </p:spPr>
+        <p:txBody>
+          <a:bodyPr wrap="square" lIns="13716" tIns="13716" rIns="13716" bIns="13716" anchor="t">
             <a:noAutofit/>
           </a:bodyPr>
           <a:lstStyle/>
@@ -18016,6 +18042,7 @@
           <a:lstStyle/>
           <a:p>
             <a:pPr algn="ctr"/>
+            <a:endParaRPr/>
           </a:p>
         </p:txBody>
       </p:sp>
@@ -18027,16 +18054,16 @@
         </p:nvSpPr>
         <p:spPr>
           <a:xfrm>
-            <a:off x="5660136" y="5404103"/>
-            <a:ext cx="3246120" cy="237744"/>
-          </a:xfrm>
-          <a:prstGeom prst="rect">
-            <a:avLst/>
-          </a:prstGeom>
-          <a:noFill/>
-        </p:spPr>
-        <p:txBody>
-          <a:bodyPr wrap="square" lIns="13716" rIns="13716" tIns="13716" bIns="13716" anchor="t">
+            <a:off x="5660136" y="5376671"/>
+            <a:ext cx="3246120" cy="365760"/>
+          </a:xfrm>
+          <a:prstGeom prst="rect">
+            <a:avLst/>
+          </a:prstGeom>
+          <a:noFill/>
+        </p:spPr>
+        <p:txBody>
+          <a:bodyPr wrap="square" lIns="13716" tIns="13716" rIns="13716" bIns="13716" anchor="t">
             <a:noAutofit/>
           </a:bodyPr>
           <a:lstStyle/>
@@ -18099,6 +18126,7 @@
           <a:lstStyle/>
           <a:p>
             <a:pPr algn="ctr"/>
+            <a:endParaRPr/>
           </a:p>
         </p:txBody>
       </p:sp>
@@ -18119,7 +18147,7 @@
           <a:noFill/>
         </p:spPr>
         <p:txBody>
-          <a:bodyPr wrap="square" lIns="13716" rIns="13716" tIns="13716" bIns="13716" anchor="t">
+          <a:bodyPr wrap="square" lIns="13716" tIns="13716" rIns="13716" bIns="13716" anchor="t">
             <a:noAutofit/>
           </a:bodyPr>
           <a:lstStyle/>
@@ -18173,6 +18201,7 @@
           <a:lstStyle/>
           <a:p>
             <a:pPr algn="ctr"/>
+            <a:endParaRPr/>
           </a:p>
         </p:txBody>
       </p:sp>
@@ -18184,16 +18213,16 @@
         </p:nvSpPr>
         <p:spPr>
           <a:xfrm>
-            <a:off x="10241280" y="3703320"/>
-            <a:ext cx="3246120" cy="237744"/>
-          </a:xfrm>
-          <a:prstGeom prst="rect">
-            <a:avLst/>
-          </a:prstGeom>
-          <a:noFill/>
-        </p:spPr>
-        <p:txBody>
-          <a:bodyPr wrap="square" lIns="13716" rIns="13716" tIns="13716" bIns="13716" anchor="t">
+            <a:off x="10241280" y="3675888"/>
+            <a:ext cx="3246120" cy="365760"/>
+          </a:xfrm>
+          <a:prstGeom prst="rect">
+            <a:avLst/>
+          </a:prstGeom>
+          <a:noFill/>
+        </p:spPr>
+        <p:txBody>
+          <a:bodyPr wrap="square" lIns="13716" tIns="13716" rIns="13716" bIns="13716" anchor="t">
             <a:noAutofit/>
           </a:bodyPr>
           <a:lstStyle/>
@@ -18247,6 +18276,7 @@
           <a:lstStyle/>
           <a:p>
             <a:pPr algn="ctr"/>
+            <a:endParaRPr/>
           </a:p>
         </p:txBody>
       </p:sp>
@@ -18258,16 +18288,16 @@
         </p:nvSpPr>
         <p:spPr>
           <a:xfrm>
-            <a:off x="10241280" y="4270248"/>
-            <a:ext cx="3246120" cy="237744"/>
-          </a:xfrm>
-          <a:prstGeom prst="rect">
-            <a:avLst/>
-          </a:prstGeom>
-          <a:noFill/>
-        </p:spPr>
-        <p:txBody>
-          <a:bodyPr wrap="square" lIns="13716" rIns="13716" tIns="13716" bIns="13716" anchor="t">
+            <a:off x="10241280" y="4242816"/>
+            <a:ext cx="3246120" cy="365760"/>
+          </a:xfrm>
+          <a:prstGeom prst="rect">
+            <a:avLst/>
+          </a:prstGeom>
+          <a:noFill/>
+        </p:spPr>
+        <p:txBody>
+          <a:bodyPr wrap="square" lIns="13716" tIns="13716" rIns="13716" bIns="13716" anchor="t">
             <a:noAutofit/>
           </a:bodyPr>
           <a:lstStyle/>
@@ -18321,6 +18351,7 @@
           <a:lstStyle/>
           <a:p>
             <a:pPr algn="ctr"/>
+            <a:endParaRPr/>
           </a:p>
         </p:txBody>
       </p:sp>
@@ -18332,16 +18363,16 @@
         </p:nvSpPr>
         <p:spPr>
           <a:xfrm>
-            <a:off x="10241280" y="4837176"/>
-            <a:ext cx="3246120" cy="237744"/>
-          </a:xfrm>
-          <a:prstGeom prst="rect">
-            <a:avLst/>
-          </a:prstGeom>
-          <a:noFill/>
-        </p:spPr>
-        <p:txBody>
-          <a:bodyPr wrap="square" lIns="13716" rIns="13716" tIns="13716" bIns="13716" anchor="t">
+            <a:off x="10241280" y="4809744"/>
+            <a:ext cx="3246120" cy="365760"/>
+          </a:xfrm>
+          <a:prstGeom prst="rect">
+            <a:avLst/>
+          </a:prstGeom>
+          <a:noFill/>
+        </p:spPr>
+        <p:txBody>
+          <a:bodyPr wrap="square" lIns="13716" tIns="13716" rIns="13716" bIns="13716" anchor="t">
             <a:noAutofit/>
           </a:bodyPr>
           <a:lstStyle/>
@@ -18395,6 +18426,7 @@
           <a:lstStyle/>
           <a:p>
             <a:pPr algn="ctr"/>
+            <a:endParaRPr/>
           </a:p>
         </p:txBody>
       </p:sp>
@@ -18406,16 +18438,16 @@
         </p:nvSpPr>
         <p:spPr>
           <a:xfrm>
-            <a:off x="10241280" y="5404103"/>
-            <a:ext cx="3246120" cy="237744"/>
-          </a:xfrm>
-          <a:prstGeom prst="rect">
-            <a:avLst/>
-          </a:prstGeom>
-          <a:noFill/>
-        </p:spPr>
-        <p:txBody>
-          <a:bodyPr wrap="square" lIns="13716" rIns="13716" tIns="13716" bIns="13716" anchor="t">
+            <a:off x="10241280" y="5376671"/>
+            <a:ext cx="3246120" cy="365760"/>
+          </a:xfrm>
+          <a:prstGeom prst="rect">
+            <a:avLst/>
+          </a:prstGeom>
+          <a:noFill/>
+        </p:spPr>
+        <p:txBody>
+          <a:bodyPr wrap="square" lIns="13716" tIns="13716" rIns="13716" bIns="13716" anchor="t">
             <a:noAutofit/>
           </a:bodyPr>
           <a:lstStyle/>
@@ -18504,7 +18536,7 @@
           <a:noFill/>
         </p:spPr>
         <p:txBody>
-          <a:bodyPr wrap="square" lIns="13716" rIns="13716" tIns="13716" bIns="13716" anchor="t">
+          <a:bodyPr wrap="square" lIns="13716" tIns="13716" rIns="13716" bIns="13716" anchor="t">
             <a:noAutofit/>
           </a:bodyPr>
           <a:lstStyle/>
@@ -18558,6 +18590,7 @@
           <a:lstStyle/>
           <a:p>
             <a:pPr algn="ctr"/>
+            <a:endParaRPr/>
           </a:p>
         </p:txBody>
       </p:sp>
@@ -18587,6 +18620,7 @@
           <a:lstStyle/>
           <a:p>
             <a:pPr algn="ctr"/>
+            <a:endParaRPr/>
           </a:p>
         </p:txBody>
       </p:sp>
@@ -18607,7 +18641,7 @@
           <a:noFill/>
         </p:spPr>
         <p:txBody>
-          <a:bodyPr wrap="square" lIns="13716" rIns="13716" tIns="13716" bIns="13716" anchor="t">
+          <a:bodyPr wrap="square" lIns="13716" tIns="13716" rIns="13716" bIns="13716" anchor="t">
             <a:noAutofit/>
           </a:bodyPr>
           <a:lstStyle/>
@@ -18644,7 +18678,7 @@
 </file>
 
 <file path=ppt/slides/slide8.xml><?xml version="1.0" encoding="utf-8"?>
-<p:sld xmlns:a="http://schemas.openxmlformats.org/drawingml/2006/main" xmlns:p="http://schemas.openxmlformats.org/presentationml/2006/main" xmlns:r="http://schemas.openxmlformats.org/officeDocument/2006/relationships">
+<p:sld xmlns:a="http://schemas.openxmlformats.org/drawingml/2006/main" xmlns:r="http://schemas.openxmlformats.org/officeDocument/2006/relationships" xmlns:p="http://schemas.openxmlformats.org/presentationml/2006/main">
   <p:cSld>
     <p:spTree>
       <p:nvGrpSpPr>
@@ -18652,7 +18686,14 @@
         <p:cNvGrpSpPr/>
         <p:nvPr/>
       </p:nvGrpSpPr>
-      <p:grpSpPr/>
+      <p:grpSpPr>
+        <a:xfrm>
+          <a:off x="0" y="0"/>
+          <a:ext cx="0" cy="0"/>
+          <a:chOff x="0" y="0"/>
+          <a:chExt cx="0" cy="0"/>
+        </a:xfrm>
+      </p:grpSpPr>
       <p:pic>
         <p:nvPicPr>
           <p:cNvPr id="2" name="Picture 1" descr="template2_background.png"/>
@@ -18662,7 +18703,7 @@
           <p:nvPr/>
         </p:nvPicPr>
         <p:blipFill>
-          <a:blip r:embed="rId2"/>
+          <a:blip r:embed="rId3"/>
           <a:stretch>
             <a:fillRect/>
           </a:stretch>
@@ -18694,7 +18735,7 @@
           <a:noFill/>
         </p:spPr>
         <p:txBody>
-          <a:bodyPr wrap="square" lIns="13716" rIns="13716" tIns="13716" bIns="13716" anchor="t">
+          <a:bodyPr wrap="square" lIns="13716" tIns="13716" rIns="13716" bIns="13716" anchor="t">
             <a:noAutofit/>
           </a:bodyPr>
           <a:lstStyle/>
@@ -18748,6 +18789,7 @@
           <a:lstStyle/>
           <a:p>
             <a:pPr algn="ctr"/>
+            <a:endParaRPr/>
           </a:p>
         </p:txBody>
       </p:sp>
@@ -18768,7 +18810,7 @@
           <a:noFill/>
         </p:spPr>
         <p:txBody>
-          <a:bodyPr wrap="square" lIns="13716" rIns="13716" tIns="13716" bIns="13716" anchor="t">
+          <a:bodyPr wrap="square" lIns="13716" tIns="13716" rIns="13716" bIns="13716" anchor="t">
             <a:noAutofit/>
           </a:bodyPr>
           <a:lstStyle/>
@@ -18813,7 +18855,7 @@
           <a:noFill/>
         </p:spPr>
         <p:txBody>
-          <a:bodyPr wrap="square" lIns="13716" rIns="13716" tIns="13716" bIns="13716" anchor="t">
+          <a:bodyPr wrap="square" lIns="13716" tIns="13716" rIns="13716" bIns="13716" anchor="t">
             <a:noAutofit/>
           </a:bodyPr>
           <a:lstStyle/>
@@ -18858,7 +18900,7 @@
           <a:noFill/>
         </p:spPr>
         <p:txBody>
-          <a:bodyPr wrap="square" lIns="13716" rIns="13716" tIns="13716" bIns="13716" anchor="t">
+          <a:bodyPr wrap="square" lIns="13716" tIns="13716" rIns="13716" bIns="13716" anchor="t">
             <a:noAutofit/>
           </a:bodyPr>
           <a:lstStyle/>
@@ -18912,6 +18954,7 @@
           <a:lstStyle/>
           <a:p>
             <a:pPr algn="ctr"/>
+            <a:endParaRPr/>
           </a:p>
         </p:txBody>
       </p:sp>
@@ -18932,7 +18975,7 @@
           <a:noFill/>
         </p:spPr>
         <p:txBody>
-          <a:bodyPr wrap="square" lIns="13716" rIns="13716" tIns="13716" bIns="13716" anchor="t">
+          <a:bodyPr wrap="square" lIns="13716" tIns="13716" rIns="13716" bIns="13716" anchor="t">
             <a:noAutofit/>
           </a:bodyPr>
           <a:lstStyle/>
@@ -18977,7 +19020,7 @@
           <a:noFill/>
         </p:spPr>
         <p:txBody>
-          <a:bodyPr wrap="square" lIns="13716" rIns="13716" tIns="13716" bIns="13716" anchor="t">
+          <a:bodyPr wrap="square" lIns="13716" tIns="13716" rIns="13716" bIns="13716" anchor="t">
             <a:noAutofit/>
           </a:bodyPr>
           <a:lstStyle/>
@@ -19022,7 +19065,7 @@
           <a:noFill/>
         </p:spPr>
         <p:txBody>
-          <a:bodyPr wrap="square" lIns="13716" rIns="13716" tIns="13716" bIns="13716" anchor="t">
+          <a:bodyPr wrap="square" lIns="13716" tIns="13716" rIns="13716" bIns="13716" anchor="t">
             <a:noAutofit/>
           </a:bodyPr>
           <a:lstStyle/>
@@ -19085,6 +19128,7 @@
           <a:lstStyle/>
           <a:p>
             <a:pPr algn="ctr"/>
+            <a:endParaRPr/>
           </a:p>
         </p:txBody>
       </p:sp>
@@ -19114,6 +19158,7 @@
           <a:lstStyle/>
           <a:p>
             <a:pPr algn="ctr"/>
+            <a:endParaRPr/>
           </a:p>
         </p:txBody>
       </p:sp>
@@ -19134,7 +19179,7 @@
           <a:noFill/>
         </p:spPr>
         <p:txBody>
-          <a:bodyPr wrap="square" lIns="13716" rIns="13716" tIns="13716" bIns="13716" anchor="t">
+          <a:bodyPr wrap="square" lIns="13716" tIns="13716" rIns="13716" bIns="13716" anchor="t">
             <a:noAutofit/>
           </a:bodyPr>
           <a:lstStyle/>
@@ -19179,7 +19224,7 @@
           <a:noFill/>
         </p:spPr>
         <p:txBody>
-          <a:bodyPr wrap="square" lIns="13716" rIns="13716" tIns="13716" bIns="13716" anchor="t">
+          <a:bodyPr wrap="square" lIns="13716" tIns="13716" rIns="13716" bIns="13716" anchor="t">
             <a:noAutofit/>
           </a:bodyPr>
           <a:lstStyle/>
@@ -19286,6 +19331,7 @@
           <a:lstStyle/>
           <a:p>
             <a:pPr algn="ctr"/>
+            <a:endParaRPr/>
           </a:p>
         </p:txBody>
       </p:sp>
@@ -19315,6 +19361,7 @@
           <a:lstStyle/>
           <a:p>
             <a:pPr algn="ctr"/>
+            <a:endParaRPr/>
           </a:p>
         </p:txBody>
       </p:sp>
@@ -19335,7 +19382,7 @@
           <a:noFill/>
         </p:spPr>
         <p:txBody>
-          <a:bodyPr wrap="square" lIns="13716" rIns="13716" tIns="13716" bIns="13716" anchor="t">
+          <a:bodyPr wrap="square" lIns="13716" tIns="13716" rIns="13716" bIns="13716" anchor="t">
             <a:noAutofit/>
           </a:bodyPr>
           <a:lstStyle/>
@@ -19380,7 +19427,7 @@
           <a:noFill/>
         </p:spPr>
         <p:txBody>
-          <a:bodyPr wrap="square" lIns="13716" rIns="13716" tIns="13716" bIns="13716" anchor="t">
+          <a:bodyPr wrap="square" lIns="13716" tIns="13716" rIns="13716" bIns="13716" anchor="t">
             <a:noAutofit/>
           </a:bodyPr>
           <a:lstStyle/>
@@ -19487,6 +19534,7 @@
           <a:lstStyle/>
           <a:p>
             <a:pPr algn="ctr"/>
+            <a:endParaRPr/>
           </a:p>
         </p:txBody>
       </p:sp>
@@ -19516,6 +19564,7 @@
           <a:lstStyle/>
           <a:p>
             <a:pPr algn="ctr"/>
+            <a:endParaRPr/>
           </a:p>
         </p:txBody>
       </p:sp>
@@ -19536,7 +19585,7 @@
           <a:noFill/>
         </p:spPr>
         <p:txBody>
-          <a:bodyPr wrap="square" lIns="13716" rIns="13716" tIns="13716" bIns="13716" anchor="t">
+          <a:bodyPr wrap="square" lIns="13716" tIns="13716" rIns="13716" bIns="13716" anchor="t">
             <a:noAutofit/>
           </a:bodyPr>
           <a:lstStyle/>
@@ -19581,7 +19630,7 @@
           <a:noFill/>
         </p:spPr>
         <p:txBody>
-          <a:bodyPr wrap="square" lIns="13716" rIns="13716" tIns="13716" bIns="13716" anchor="t">
+          <a:bodyPr wrap="square" lIns="13716" tIns="13716" rIns="13716" bIns="13716" anchor="t">
             <a:noAutofit/>
           </a:bodyPr>
           <a:lstStyle/>
@@ -19688,6 +19737,7 @@
           <a:lstStyle/>
           <a:p>
             <a:pPr algn="ctr"/>
+            <a:endParaRPr/>
           </a:p>
         </p:txBody>
       </p:sp>
@@ -19717,6 +19767,7 @@
           <a:lstStyle/>
           <a:p>
             <a:pPr algn="ctr"/>
+            <a:endParaRPr/>
           </a:p>
         </p:txBody>
       </p:sp>
@@ -19737,7 +19788,7 @@
           <a:noFill/>
         </p:spPr>
         <p:txBody>
-          <a:bodyPr wrap="square" lIns="13716" rIns="13716" tIns="13716" bIns="13716" anchor="t">
+          <a:bodyPr wrap="square" lIns="13716" tIns="13716" rIns="13716" bIns="13716" anchor="t">
             <a:noAutofit/>
           </a:bodyPr>
           <a:lstStyle/>
@@ -19782,7 +19833,7 @@
           <a:noFill/>
         </p:spPr>
         <p:txBody>
-          <a:bodyPr wrap="square" lIns="13716" rIns="13716" tIns="13716" bIns="13716" anchor="t">
+          <a:bodyPr wrap="square" lIns="13716" tIns="13716" rIns="13716" bIns="13716" anchor="t">
             <a:noAutofit/>
           </a:bodyPr>
           <a:lstStyle/>
@@ -19867,6 +19918,7 @@
           <a:lstStyle/>
           <a:p>
             <a:pPr algn="ctr"/>
+            <a:endParaRPr/>
           </a:p>
         </p:txBody>
       </p:sp>
@@ -19887,7 +19939,7 @@
           <a:noFill/>
         </p:spPr>
         <p:txBody>
-          <a:bodyPr wrap="square" lIns="13716" rIns="13716" tIns="13716" bIns="13716" anchor="t">
+          <a:bodyPr wrap="square" lIns="13716" tIns="13716" rIns="13716" bIns="13716" anchor="t">
             <a:noAutofit/>
           </a:bodyPr>
           <a:lstStyle/>
@@ -19941,6 +19993,7 @@
           <a:lstStyle/>
           <a:p>
             <a:pPr algn="ctr"/>
+            <a:endParaRPr/>
           </a:p>
         </p:txBody>
       </p:sp>
@@ -19961,7 +20014,7 @@
           <a:noFill/>
         </p:spPr>
         <p:txBody>
-          <a:bodyPr wrap="square" lIns="13716" rIns="13716" tIns="13716" bIns="13716" anchor="t">
+          <a:bodyPr wrap="square" lIns="13716" tIns="13716" rIns="13716" bIns="13716" anchor="t">
             <a:noAutofit/>
           </a:bodyPr>
           <a:lstStyle/>
@@ -20015,6 +20068,7 @@
           <a:lstStyle/>
           <a:p>
             <a:pPr algn="ctr"/>
+            <a:endParaRPr/>
           </a:p>
         </p:txBody>
       </p:sp>
@@ -20035,7 +20089,7 @@
           <a:noFill/>
         </p:spPr>
         <p:txBody>
-          <a:bodyPr wrap="square" lIns="13716" rIns="13716" tIns="13716" bIns="13716" anchor="t">
+          <a:bodyPr wrap="square" lIns="13716" tIns="13716" rIns="13716" bIns="13716" anchor="t">
             <a:noAutofit/>
           </a:bodyPr>
           <a:lstStyle/>
@@ -20089,6 +20143,7 @@
           <a:lstStyle/>
           <a:p>
             <a:pPr algn="ctr"/>
+            <a:endParaRPr/>
           </a:p>
         </p:txBody>
       </p:sp>
@@ -20109,7 +20164,7 @@
           <a:noFill/>
         </p:spPr>
         <p:txBody>
-          <a:bodyPr wrap="square" lIns="13716" rIns="13716" tIns="13716" bIns="13716" anchor="t">
+          <a:bodyPr wrap="square" lIns="13716" tIns="13716" rIns="13716" bIns="13716" anchor="t">
             <a:noAutofit/>
           </a:bodyPr>
           <a:lstStyle/>
@@ -20163,6 +20218,7 @@
           <a:lstStyle/>
           <a:p>
             <a:pPr algn="ctr"/>
+            <a:endParaRPr/>
           </a:p>
         </p:txBody>
       </p:sp>
@@ -20183,7 +20239,7 @@
           <a:noFill/>
         </p:spPr>
         <p:txBody>
-          <a:bodyPr wrap="square" lIns="13716" rIns="13716" tIns="13716" bIns="13716" anchor="t">
+          <a:bodyPr wrap="square" lIns="13716" tIns="13716" rIns="13716" bIns="13716" anchor="t">
             <a:noAutofit/>
           </a:bodyPr>
           <a:lstStyle/>
@@ -20246,6 +20302,7 @@
           <a:lstStyle/>
           <a:p>
             <a:pPr algn="ctr"/>
+            <a:endParaRPr/>
           </a:p>
         </p:txBody>
       </p:sp>
@@ -20266,7 +20323,7 @@
           <a:noFill/>
         </p:spPr>
         <p:txBody>
-          <a:bodyPr wrap="square" lIns="13716" rIns="13716" tIns="13716" bIns="13716" anchor="t">
+          <a:bodyPr wrap="square" lIns="13716" tIns="13716" rIns="13716" bIns="13716" anchor="t">
             <a:noAutofit/>
           </a:bodyPr>
           <a:lstStyle/>
@@ -20320,6 +20377,7 @@
           <a:lstStyle/>
           <a:p>
             <a:pPr algn="ctr"/>
+            <a:endParaRPr/>
           </a:p>
         </p:txBody>
       </p:sp>
@@ -20340,7 +20398,7 @@
           <a:noFill/>
         </p:spPr>
         <p:txBody>
-          <a:bodyPr wrap="square" lIns="13716" rIns="13716" tIns="13716" bIns="13716" anchor="t">
+          <a:bodyPr wrap="square" lIns="13716" tIns="13716" rIns="13716" bIns="13716" anchor="t">
             <a:noAutofit/>
           </a:bodyPr>
           <a:lstStyle/>
@@ -20394,6 +20452,7 @@
           <a:lstStyle/>
           <a:p>
             <a:pPr algn="ctr"/>
+            <a:endParaRPr/>
           </a:p>
         </p:txBody>
       </p:sp>
@@ -20414,7 +20473,7 @@
           <a:noFill/>
         </p:spPr>
         <p:txBody>
-          <a:bodyPr wrap="square" lIns="13716" rIns="13716" tIns="13716" bIns="13716" anchor="t">
+          <a:bodyPr wrap="square" lIns="13716" tIns="13716" rIns="13716" bIns="13716" anchor="t">
             <a:noAutofit/>
           </a:bodyPr>
           <a:lstStyle/>
@@ -20468,6 +20527,7 @@
           <a:lstStyle/>
           <a:p>
             <a:pPr algn="ctr"/>
+            <a:endParaRPr/>
           </a:p>
         </p:txBody>
       </p:sp>
@@ -20488,7 +20548,7 @@
           <a:noFill/>
         </p:spPr>
         <p:txBody>
-          <a:bodyPr wrap="square" lIns="13716" rIns="13716" tIns="13716" bIns="13716" anchor="t">
+          <a:bodyPr wrap="square" lIns="13716" tIns="13716" rIns="13716" bIns="13716" anchor="t">
             <a:noAutofit/>
           </a:bodyPr>
           <a:lstStyle/>
@@ -20542,6 +20602,7 @@
           <a:lstStyle/>
           <a:p>
             <a:pPr algn="ctr"/>
+            <a:endParaRPr/>
           </a:p>
         </p:txBody>
       </p:sp>
@@ -20562,7 +20623,7 @@
           <a:noFill/>
         </p:spPr>
         <p:txBody>
-          <a:bodyPr wrap="square" lIns="13716" rIns="13716" tIns="13716" bIns="13716" anchor="t">
+          <a:bodyPr wrap="square" lIns="13716" tIns="13716" rIns="13716" bIns="13716" anchor="t">
             <a:noAutofit/>
           </a:bodyPr>
           <a:lstStyle/>
@@ -20616,6 +20677,7 @@
           <a:lstStyle/>
           <a:p>
             <a:pPr algn="ctr"/>
+            <a:endParaRPr/>
           </a:p>
         </p:txBody>
       </p:sp>
@@ -20645,6 +20707,7 @@
           <a:lstStyle/>
           <a:p>
             <a:pPr algn="ctr"/>
+            <a:endParaRPr/>
           </a:p>
         </p:txBody>
       </p:sp>
@@ -20665,7 +20728,7 @@
           <a:noFill/>
         </p:spPr>
         <p:txBody>
-          <a:bodyPr wrap="square" lIns="13716" rIns="13716" tIns="13716" bIns="13716" anchor="t">
+          <a:bodyPr wrap="square" lIns="13716" tIns="13716" rIns="13716" bIns="13716" anchor="t">
             <a:noAutofit/>
           </a:bodyPr>
           <a:lstStyle/>
@@ -20702,7 +20765,7 @@
 </file>
 
 <file path=ppt/slides/slide9.xml><?xml version="1.0" encoding="utf-8"?>
-<p:sld xmlns:a="http://schemas.openxmlformats.org/drawingml/2006/main" xmlns:p="http://schemas.openxmlformats.org/presentationml/2006/main" xmlns:r="http://schemas.openxmlformats.org/officeDocument/2006/relationships">
+<p:sld xmlns:a="http://schemas.openxmlformats.org/drawingml/2006/main" xmlns:r="http://schemas.openxmlformats.org/officeDocument/2006/relationships" xmlns:p="http://schemas.openxmlformats.org/presentationml/2006/main">
   <p:cSld>
     <p:spTree>
       <p:nvGrpSpPr>
@@ -20710,7 +20773,14 @@
         <p:cNvGrpSpPr/>
         <p:nvPr/>
       </p:nvGrpSpPr>
-      <p:grpSpPr/>
+      <p:grpSpPr>
+        <a:xfrm>
+          <a:off x="0" y="0"/>
+          <a:ext cx="0" cy="0"/>
+          <a:chOff x="0" y="0"/>
+          <a:chExt cx="0" cy="0"/>
+        </a:xfrm>
+      </p:grpSpPr>
       <p:pic>
         <p:nvPicPr>
           <p:cNvPr id="2" name="Picture 1" descr="template2_background.png"/>
@@ -20720,7 +20790,7 @@
           <p:nvPr/>
         </p:nvPicPr>
         <p:blipFill>
-          <a:blip r:embed="rId2"/>
+          <a:blip r:embed="rId3"/>
           <a:stretch>
             <a:fillRect/>
           </a:stretch>
@@ -20752,7 +20822,7 @@
           <a:noFill/>
         </p:spPr>
         <p:txBody>
-          <a:bodyPr wrap="square" lIns="13716" rIns="13716" tIns="13716" bIns="13716" anchor="t">
+          <a:bodyPr wrap="square" lIns="13716" tIns="13716" rIns="13716" bIns="13716" anchor="t">
             <a:noAutofit/>
           </a:bodyPr>
           <a:lstStyle/>
@@ -20806,6 +20876,7 @@
           <a:lstStyle/>
           <a:p>
             <a:pPr algn="ctr"/>
+            <a:endParaRPr/>
           </a:p>
         </p:txBody>
       </p:sp>
@@ -20826,7 +20897,7 @@
           <a:noFill/>
         </p:spPr>
         <p:txBody>
-          <a:bodyPr wrap="square" lIns="13716" rIns="13716" tIns="13716" bIns="13716" anchor="t">
+          <a:bodyPr wrap="square" lIns="13716" tIns="13716" rIns="13716" bIns="13716" anchor="t">
             <a:noAutofit/>
           </a:bodyPr>
           <a:lstStyle/>
@@ -20871,7 +20942,7 @@
           <a:noFill/>
         </p:spPr>
         <p:txBody>
-          <a:bodyPr wrap="square" lIns="13716" rIns="13716" tIns="13716" bIns="13716" anchor="t">
+          <a:bodyPr wrap="square" lIns="13716" tIns="13716" rIns="13716" bIns="13716" anchor="t">
             <a:noAutofit/>
           </a:bodyPr>
           <a:lstStyle/>
@@ -20916,7 +20987,7 @@
           <a:noFill/>
         </p:spPr>
         <p:txBody>
-          <a:bodyPr wrap="square" lIns="13716" rIns="13716" tIns="13716" bIns="13716" anchor="t">
+          <a:bodyPr wrap="square" lIns="13716" tIns="13716" rIns="13716" bIns="13716" anchor="t">
             <a:noAutofit/>
           </a:bodyPr>
           <a:lstStyle/>
@@ -20970,6 +21041,7 @@
           <a:lstStyle/>
           <a:p>
             <a:pPr algn="ctr"/>
+            <a:endParaRPr/>
           </a:p>
         </p:txBody>
       </p:sp>
@@ -20990,7 +21062,7 @@
           <a:noFill/>
         </p:spPr>
         <p:txBody>
-          <a:bodyPr wrap="square" lIns="13716" rIns="13716" tIns="13716" bIns="13716" anchor="t">
+          <a:bodyPr wrap="square" lIns="13716" tIns="13716" rIns="13716" bIns="13716" anchor="t">
             <a:noAutofit/>
           </a:bodyPr>
           <a:lstStyle/>
@@ -21035,7 +21107,7 @@
           <a:noFill/>
         </p:spPr>
         <p:txBody>
-          <a:bodyPr wrap="square" lIns="13716" rIns="13716" tIns="13716" bIns="13716" anchor="t">
+          <a:bodyPr wrap="square" lIns="13716" tIns="13716" rIns="13716" bIns="13716" anchor="t">
             <a:noAutofit/>
           </a:bodyPr>
           <a:lstStyle/>
@@ -21080,7 +21152,7 @@
           <a:noFill/>
         </p:spPr>
         <p:txBody>
-          <a:bodyPr wrap="square" lIns="13716" rIns="13716" tIns="13716" bIns="13716" anchor="t">
+          <a:bodyPr wrap="square" lIns="13716" tIns="13716" rIns="13716" bIns="13716" anchor="t">
             <a:noAutofit/>
           </a:bodyPr>
           <a:lstStyle/>
@@ -21134,6 +21206,7 @@
           <a:lstStyle/>
           <a:p>
             <a:pPr algn="ctr"/>
+            <a:endParaRPr/>
           </a:p>
         </p:txBody>
       </p:sp>
@@ -21154,7 +21227,7 @@
           <a:noFill/>
         </p:spPr>
         <p:txBody>
-          <a:bodyPr wrap="square" lIns="13716" rIns="13716" tIns="13716" bIns="13716" anchor="t">
+          <a:bodyPr wrap="square" lIns="13716" tIns="13716" rIns="13716" bIns="13716" anchor="t">
             <a:noAutofit/>
           </a:bodyPr>
           <a:lstStyle/>
@@ -21208,6 +21281,7 @@
           <a:lstStyle/>
           <a:p>
             <a:pPr algn="ctr"/>
+            <a:endParaRPr/>
           </a:p>
         </p:txBody>
       </p:sp>
@@ -21228,7 +21302,7 @@
           <a:noFill/>
         </p:spPr>
         <p:txBody>
-          <a:bodyPr wrap="square" lIns="13716" rIns="13716" tIns="13716" bIns="13716" anchor="t">
+          <a:bodyPr wrap="square" lIns="13716" tIns="13716" rIns="13716" bIns="13716" anchor="t">
             <a:noAutofit/>
           </a:bodyPr>
           <a:lstStyle/>
@@ -21282,6 +21356,7 @@
           <a:lstStyle/>
           <a:p>
             <a:pPr algn="ctr"/>
+            <a:endParaRPr/>
           </a:p>
         </p:txBody>
       </p:sp>
@@ -21302,7 +21377,7 @@
           <a:noFill/>
         </p:spPr>
         <p:txBody>
-          <a:bodyPr wrap="square" lIns="13716" rIns="13716" tIns="13716" bIns="13716" anchor="t">
+          <a:bodyPr wrap="square" lIns="13716" tIns="13716" rIns="13716" bIns="13716" anchor="t">
             <a:noAutofit/>
           </a:bodyPr>
           <a:lstStyle/>
@@ -21356,6 +21431,7 @@
           <a:lstStyle/>
           <a:p>
             <a:pPr algn="ctr"/>
+            <a:endParaRPr/>
           </a:p>
         </p:txBody>
       </p:sp>
@@ -21376,7 +21452,7 @@
           <a:noFill/>
         </p:spPr>
         <p:txBody>
-          <a:bodyPr wrap="square" lIns="13716" rIns="13716" tIns="13716" bIns="13716" anchor="t">
+          <a:bodyPr wrap="square" lIns="13716" tIns="13716" rIns="13716" bIns="13716" anchor="t">
             <a:noAutofit/>
           </a:bodyPr>
           <a:lstStyle/>
@@ -21430,6 +21506,7 @@
           <a:lstStyle/>
           <a:p>
             <a:pPr algn="ctr"/>
+            <a:endParaRPr/>
           </a:p>
         </p:txBody>
       </p:sp>
@@ -21450,7 +21527,7 @@
           <a:noFill/>
         </p:spPr>
         <p:txBody>
-          <a:bodyPr wrap="square" lIns="13716" rIns="13716" tIns="13716" bIns="13716" anchor="t">
+          <a:bodyPr wrap="square" lIns="13716" tIns="13716" rIns="13716" bIns="13716" anchor="t">
             <a:noAutofit/>
           </a:bodyPr>
           <a:lstStyle/>
@@ -21504,6 +21581,7 @@
           <a:lstStyle/>
           <a:p>
             <a:pPr algn="ctr"/>
+            <a:endParaRPr/>
           </a:p>
         </p:txBody>
       </p:sp>
@@ -21524,7 +21602,7 @@
           <a:noFill/>
         </p:spPr>
         <p:txBody>
-          <a:bodyPr wrap="square" lIns="13716" rIns="13716" tIns="13716" bIns="13716" anchor="t">
+          <a:bodyPr wrap="square" lIns="13716" tIns="13716" rIns="13716" bIns="13716" anchor="t">
             <a:noAutofit/>
           </a:bodyPr>
           <a:lstStyle/>
@@ -21578,6 +21656,7 @@
           <a:lstStyle/>
           <a:p>
             <a:pPr algn="ctr"/>
+            <a:endParaRPr/>
           </a:p>
         </p:txBody>
       </p:sp>
@@ -21598,7 +21677,7 @@
           <a:noFill/>
         </p:spPr>
         <p:txBody>
-          <a:bodyPr wrap="square" lIns="13716" rIns="13716" tIns="13716" bIns="13716" anchor="t">
+          <a:bodyPr wrap="square" lIns="13716" tIns="13716" rIns="13716" bIns="13716" anchor="t">
             <a:noAutofit/>
           </a:bodyPr>
           <a:lstStyle/>
@@ -21652,6 +21731,7 @@
           <a:lstStyle/>
           <a:p>
             <a:pPr algn="ctr"/>
+            <a:endParaRPr/>
           </a:p>
         </p:txBody>
       </p:sp>
@@ -21672,7 +21752,7 @@
           <a:noFill/>
         </p:spPr>
         <p:txBody>
-          <a:bodyPr wrap="square" lIns="13716" rIns="13716" tIns="13716" bIns="13716" anchor="t">
+          <a:bodyPr wrap="square" lIns="13716" tIns="13716" rIns="13716" bIns="13716" anchor="t">
             <a:noAutofit/>
           </a:bodyPr>
           <a:lstStyle/>
@@ -21726,6 +21806,7 @@
           <a:lstStyle/>
           <a:p>
             <a:pPr algn="ctr"/>
+            <a:endParaRPr/>
           </a:p>
         </p:txBody>
       </p:sp>
@@ -21746,7 +21827,7 @@
           <a:noFill/>
         </p:spPr>
         <p:txBody>
-          <a:bodyPr wrap="square" lIns="13716" rIns="13716" tIns="13716" bIns="13716" anchor="t">
+          <a:bodyPr wrap="square" lIns="13716" tIns="13716" rIns="13716" bIns="13716" anchor="t">
             <a:noAutofit/>
           </a:bodyPr>
           <a:lstStyle/>
@@ -21800,6 +21881,7 @@
           <a:lstStyle/>
           <a:p>
             <a:pPr algn="ctr"/>
+            <a:endParaRPr/>
           </a:p>
         </p:txBody>
       </p:sp>
@@ -21820,7 +21902,7 @@
           <a:noFill/>
         </p:spPr>
         <p:txBody>
-          <a:bodyPr wrap="square" lIns="13716" rIns="13716" tIns="13716" bIns="13716" anchor="t">
+          <a:bodyPr wrap="square" lIns="13716" tIns="13716" rIns="13716" bIns="13716" anchor="t">
             <a:noAutofit/>
           </a:bodyPr>
           <a:lstStyle/>
@@ -21874,6 +21956,7 @@
           <a:lstStyle/>
           <a:p>
             <a:pPr algn="ctr"/>
+            <a:endParaRPr/>
           </a:p>
         </p:txBody>
       </p:sp>
@@ -21894,7 +21977,7 @@
           <a:noFill/>
         </p:spPr>
         <p:txBody>
-          <a:bodyPr wrap="square" lIns="13716" rIns="13716" tIns="13716" bIns="13716" anchor="t">
+          <a:bodyPr wrap="square" lIns="13716" tIns="13716" rIns="13716" bIns="13716" anchor="t">
             <a:noAutofit/>
           </a:bodyPr>
           <a:lstStyle/>
@@ -21948,6 +22031,7 @@
           <a:lstStyle/>
           <a:p>
             <a:pPr algn="ctr"/>
+            <a:endParaRPr/>
           </a:p>
         </p:txBody>
       </p:sp>
@@ -21968,7 +22052,7 @@
           <a:noFill/>
         </p:spPr>
         <p:txBody>
-          <a:bodyPr wrap="square" lIns="13716" rIns="13716" tIns="13716" bIns="13716" anchor="t">
+          <a:bodyPr wrap="square" lIns="13716" tIns="13716" rIns="13716" bIns="13716" anchor="t">
             <a:noAutofit/>
           </a:bodyPr>
           <a:lstStyle/>
@@ -22022,6 +22106,7 @@
           <a:lstStyle/>
           <a:p>
             <a:pPr algn="ctr"/>
+            <a:endParaRPr/>
           </a:p>
         </p:txBody>
       </p:sp>
@@ -22042,7 +22127,7 @@
           <a:noFill/>
         </p:spPr>
         <p:txBody>
-          <a:bodyPr wrap="square" lIns="13716" rIns="13716" tIns="13716" bIns="13716" anchor="t">
+          <a:bodyPr wrap="square" lIns="13716" tIns="13716" rIns="13716" bIns="13716" anchor="t">
             <a:noAutofit/>
           </a:bodyPr>
           <a:lstStyle/>
@@ -22096,6 +22181,7 @@
           <a:lstStyle/>
           <a:p>
             <a:pPr algn="ctr"/>
+            <a:endParaRPr/>
           </a:p>
         </p:txBody>
       </p:sp>
@@ -22116,7 +22202,7 @@
           <a:noFill/>
         </p:spPr>
         <p:txBody>
-          <a:bodyPr wrap="square" lIns="13716" rIns="13716" tIns="13716" bIns="13716" anchor="t">
+          <a:bodyPr wrap="square" lIns="13716" tIns="13716" rIns="13716" bIns="13716" anchor="t">
             <a:noAutofit/>
           </a:bodyPr>
           <a:lstStyle/>
@@ -22170,6 +22256,7 @@
           <a:lstStyle/>
           <a:p>
             <a:pPr algn="ctr"/>
+            <a:endParaRPr/>
           </a:p>
         </p:txBody>
       </p:sp>
@@ -22190,7 +22277,7 @@
           <a:noFill/>
         </p:spPr>
         <p:txBody>
-          <a:bodyPr wrap="square" lIns="13716" rIns="13716" tIns="13716" bIns="13716" anchor="t">
+          <a:bodyPr wrap="square" lIns="13716" tIns="13716" rIns="13716" bIns="13716" anchor="t">
             <a:noAutofit/>
           </a:bodyPr>
           <a:lstStyle/>
@@ -22244,6 +22331,7 @@
           <a:lstStyle/>
           <a:p>
             <a:pPr algn="ctr"/>
+            <a:endParaRPr/>
           </a:p>
         </p:txBody>
       </p:sp>
@@ -22264,7 +22352,7 @@
           <a:noFill/>
         </p:spPr>
         <p:txBody>
-          <a:bodyPr wrap="square" lIns="13716" rIns="13716" tIns="13716" bIns="13716" anchor="t">
+          <a:bodyPr wrap="square" lIns="13716" tIns="13716" rIns="13716" bIns="13716" anchor="t">
             <a:noAutofit/>
           </a:bodyPr>
           <a:lstStyle/>
@@ -22318,6 +22406,7 @@
           <a:lstStyle/>
           <a:p>
             <a:pPr algn="ctr"/>
+            <a:endParaRPr/>
           </a:p>
         </p:txBody>
       </p:sp>
@@ -22347,6 +22436,7 @@
           <a:lstStyle/>
           <a:p>
             <a:pPr algn="ctr"/>
+            <a:endParaRPr/>
           </a:p>
         </p:txBody>
       </p:sp>
@@ -22367,7 +22457,7 @@
           <a:noFill/>
         </p:spPr>
         <p:txBody>
-          <a:bodyPr wrap="square" lIns="13716" rIns="13716" tIns="13716" bIns="13716" anchor="t">
+          <a:bodyPr wrap="square" lIns="13716" tIns="13716" rIns="13716" bIns="13716" anchor="t">
             <a:noAutofit/>
           </a:bodyPr>
           <a:lstStyle/>
@@ -22724,7 +22814,7 @@
 </file>
 
 <file path=ppt/theme/theme2.xml><?xml version="1.0" encoding="utf-8"?>
-<a:theme xmlns:a="http://schemas.openxmlformats.org/drawingml/2006/main" name="Office Theme">
+<a:theme xmlns:a="http://schemas.openxmlformats.org/drawingml/2006/main" name="Office 主题​​">
   <a:themeElements>
     <a:clrScheme name="Office">
       <a:dk1>
@@ -22734,44 +22824,44 @@
         <a:sysClr val="window" lastClr="FFFFFF"/>
       </a:lt1>
       <a:dk2>
-        <a:srgbClr val="1F497D"/>
+        <a:srgbClr val="0E2841"/>
       </a:dk2>
       <a:lt2>
-        <a:srgbClr val="EEECE1"/>
+        <a:srgbClr val="E8E8E8"/>
       </a:lt2>
       <a:accent1>
-        <a:srgbClr val="4F81BD"/>
+        <a:srgbClr val="156082"/>
       </a:accent1>
       <a:accent2>
-        <a:srgbClr val="C0504D"/>
+        <a:srgbClr val="E97132"/>
       </a:accent2>
       <a:accent3>
-        <a:srgbClr val="9BBB59"/>
+        <a:srgbClr val="196B24"/>
       </a:accent3>
       <a:accent4>
-        <a:srgbClr val="8064A2"/>
+        <a:srgbClr val="0F9ED5"/>
       </a:accent4>
       <a:accent5>
-        <a:srgbClr val="4BACC6"/>
+        <a:srgbClr val="A02B93"/>
       </a:accent5>
       <a:accent6>
-        <a:srgbClr val="F79646"/>
+        <a:srgbClr val="4EA72E"/>
       </a:accent6>
       <a:hlink>
-        <a:srgbClr val="0000FF"/>
+        <a:srgbClr val="467886"/>
       </a:hlink>
       <a:folHlink>
-        <a:srgbClr val="800080"/>
+        <a:srgbClr val="96607D"/>
       </a:folHlink>
     </a:clrScheme>
     <a:fontScheme name="Office">
       <a:majorFont>
-        <a:latin typeface="Calibri"/>
+        <a:latin typeface="等线 Light" panose="02110004020202020204"/>
         <a:ea typeface=""/>
         <a:cs typeface=""/>
-        <a:font script="Jpan" typeface="ＭＳ Ｐゴシック"/>
+        <a:font script="Jpan" typeface="游ゴシック Light"/>
         <a:font script="Hang" typeface="맑은 고딕"/>
-        <a:font script="Hans" typeface="宋体"/>
+        <a:font script="Hans" typeface="等线 Light"/>
         <a:font script="Hant" typeface="新細明體"/>
         <a:font script="Arab" typeface="Times New Roman"/>
         <a:font script="Hebr" typeface="Times New Roman"/>
@@ -22799,14 +22889,31 @@
         <a:font script="Viet" typeface="Times New Roman"/>
         <a:font script="Uigh" typeface="Microsoft Uighur"/>
         <a:font script="Geor" typeface="Sylfaen"/>
+        <a:font script="Armn" typeface="Arial"/>
+        <a:font script="Bugi" typeface="Leelawadee UI"/>
+        <a:font script="Bopo" typeface="Microsoft JhengHei"/>
+        <a:font script="Java" typeface="Javanese Text"/>
+        <a:font script="Lisu" typeface="Segoe UI"/>
+        <a:font script="Mymr" typeface="Myanmar Text"/>
+        <a:font script="Nkoo" typeface="Ebrima"/>
+        <a:font script="Olck" typeface="Nirmala UI"/>
+        <a:font script="Osma" typeface="Ebrima"/>
+        <a:font script="Phag" typeface="Phagspa"/>
+        <a:font script="Syrn" typeface="Estrangelo Edessa"/>
+        <a:font script="Syrj" typeface="Estrangelo Edessa"/>
+        <a:font script="Syre" typeface="Estrangelo Edessa"/>
+        <a:font script="Sora" typeface="Nirmala UI"/>
+        <a:font script="Tale" typeface="Microsoft Tai Le"/>
+        <a:font script="Talu" typeface="Microsoft New Tai Lue"/>
+        <a:font script="Tfng" typeface="Ebrima"/>
       </a:majorFont>
       <a:minorFont>
-        <a:latin typeface="Calibri"/>
+        <a:latin typeface="等线" panose="02110004020202020204"/>
         <a:ea typeface=""/>
         <a:cs typeface=""/>
-        <a:font script="Jpan" typeface="ＭＳ Ｐゴシック"/>
+        <a:font script="Jpan" typeface="游ゴシック"/>
         <a:font script="Hang" typeface="맑은 고딕"/>
-        <a:font script="Hans" typeface="宋体"/>
+        <a:font script="Hans" typeface="等线"/>
         <a:font script="Hant" typeface="新細明體"/>
         <a:font script="Arab" typeface="Arial"/>
         <a:font script="Hebr" typeface="Arial"/>
@@ -22834,6 +22941,23 @@
         <a:font script="Viet" typeface="Arial"/>
         <a:font script="Uigh" typeface="Microsoft Uighur"/>
         <a:font script="Geor" typeface="Sylfaen"/>
+        <a:font script="Armn" typeface="Arial"/>
+        <a:font script="Bugi" typeface="Leelawadee UI"/>
+        <a:font script="Bopo" typeface="Microsoft JhengHei"/>
+        <a:font script="Java" typeface="Javanese Text"/>
+        <a:font script="Lisu" typeface="Segoe UI"/>
+        <a:font script="Mymr" typeface="Myanmar Text"/>
+        <a:font script="Nkoo" typeface="Ebrima"/>
+        <a:font script="Olck" typeface="Nirmala UI"/>
+        <a:font script="Osma" typeface="Ebrima"/>
+        <a:font script="Phag" typeface="Phagspa"/>
+        <a:font script="Syrn" typeface="Estrangelo Edessa"/>
+        <a:font script="Syrj" typeface="Estrangelo Edessa"/>
+        <a:font script="Syre" typeface="Estrangelo Edessa"/>
+        <a:font script="Sora" typeface="Nirmala UI"/>
+        <a:font script="Tale" typeface="Microsoft Tai Le"/>
+        <a:font script="Talu" typeface="Microsoft New Tai Lue"/>
+        <a:font script="Tfng" typeface="Ebrima"/>
       </a:minorFont>
     </a:fontScheme>
     <a:fmtScheme name="Office">
@@ -22845,180 +22969,136 @@
           <a:gsLst>
             <a:gs pos="0">
               <a:schemeClr val="phClr">
-                <a:tint val="50000"/>
-                <a:satMod val="300000"/>
+                <a:lumMod val="110000"/>
+                <a:satMod val="105000"/>
+                <a:tint val="67000"/>
               </a:schemeClr>
             </a:gs>
-            <a:gs pos="35000">
+            <a:gs pos="50000">
               <a:schemeClr val="phClr">
-                <a:tint val="37000"/>
-                <a:satMod val="300000"/>
+                <a:lumMod val="105000"/>
+                <a:satMod val="103000"/>
+                <a:tint val="73000"/>
               </a:schemeClr>
             </a:gs>
             <a:gs pos="100000">
               <a:schemeClr val="phClr">
-                <a:tint val="15000"/>
-                <a:satMod val="350000"/>
+                <a:lumMod val="105000"/>
+                <a:satMod val="109000"/>
+                <a:tint val="81000"/>
               </a:schemeClr>
             </a:gs>
           </a:gsLst>
-          <a:lin ang="16200000" scaled="1"/>
+          <a:lin ang="5400000" scaled="0"/>
         </a:gradFill>
         <a:gradFill rotWithShape="1">
           <a:gsLst>
             <a:gs pos="0">
               <a:schemeClr val="phClr">
-                <a:tint val="100000"/>
+                <a:satMod val="103000"/>
+                <a:lumMod val="102000"/>
+                <a:tint val="94000"/>
+              </a:schemeClr>
+            </a:gs>
+            <a:gs pos="50000">
+              <a:schemeClr val="phClr">
+                <a:satMod val="110000"/>
+                <a:lumMod val="100000"/>
                 <a:shade val="100000"/>
-                <a:satMod val="130000"/>
               </a:schemeClr>
             </a:gs>
             <a:gs pos="100000">
               <a:schemeClr val="phClr">
-                <a:tint val="50000"/>
-                <a:shade val="100000"/>
-                <a:satMod val="350000"/>
+                <a:lumMod val="99000"/>
+                <a:satMod val="120000"/>
+                <a:shade val="78000"/>
               </a:schemeClr>
             </a:gs>
           </a:gsLst>
-          <a:lin ang="16200000" scaled="0"/>
+          <a:lin ang="5400000" scaled="0"/>
         </a:gradFill>
       </a:fillStyleLst>
       <a:lnStyleLst>
-        <a:ln w="9525" cap="flat" cmpd="sng" algn="ctr">
+        <a:ln w="12700" cap="flat" cmpd="sng" algn="ctr">
           <a:solidFill>
-            <a:schemeClr val="phClr">
-              <a:shade val="95000"/>
-              <a:satMod val="105000"/>
-            </a:schemeClr>
+            <a:schemeClr val="phClr"/>
           </a:solidFill>
           <a:prstDash val="solid"/>
+          <a:miter lim="800000"/>
+        </a:ln>
+        <a:ln w="19050" cap="flat" cmpd="sng" algn="ctr">
+          <a:solidFill>
+            <a:schemeClr val="phClr"/>
+          </a:solidFill>
+          <a:prstDash val="solid"/>
+          <a:miter lim="800000"/>
         </a:ln>
         <a:ln w="25400" cap="flat" cmpd="sng" algn="ctr">
           <a:solidFill>
             <a:schemeClr val="phClr"/>
           </a:solidFill>
           <a:prstDash val="solid"/>
-        </a:ln>
-        <a:ln w="38100" cap="flat" cmpd="sng" algn="ctr">
-          <a:solidFill>
-            <a:schemeClr val="phClr"/>
-          </a:solidFill>
-          <a:prstDash val="solid"/>
+          <a:miter lim="800000"/>
         </a:ln>
       </a:lnStyleLst>
       <a:effectStyleLst>
         <a:effectStyle>
+          <a:effectLst/>
+        </a:effectStyle>
+        <a:effectStyle>
+          <a:effectLst/>
+        </a:effectStyle>
+        <a:effectStyle>
           <a:effectLst>
-            <a:outerShdw blurRad="40000" dist="20000" dir="5400000" rotWithShape="0">
+            <a:outerShdw blurRad="57150" dist="19050" dir="5400000" algn="ctr" rotWithShape="0">
               <a:srgbClr val="000000">
-                <a:alpha val="38000"/>
+                <a:alpha val="63000"/>
               </a:srgbClr>
             </a:outerShdw>
           </a:effectLst>
-        </a:effectStyle>
-        <a:effectStyle>
-          <a:effectLst>
-            <a:outerShdw blurRad="40000" dist="23000" dir="5400000" rotWithShape="0">
-              <a:srgbClr val="000000">
-                <a:alpha val="35000"/>
-              </a:srgbClr>
-            </a:outerShdw>
-          </a:effectLst>
-        </a:effectStyle>
-        <a:effectStyle>
-          <a:effectLst>
-            <a:outerShdw blurRad="40000" dist="23000" dir="5400000" rotWithShape="0">
-              <a:srgbClr val="000000">
-                <a:alpha val="35000"/>
-              </a:srgbClr>
-            </a:outerShdw>
-          </a:effectLst>
-          <a:scene3d>
-            <a:camera prst="orthographicFront">
-              <a:rot lat="0" lon="0" rev="0"/>
-            </a:camera>
-            <a:lightRig rig="threePt" dir="t">
-              <a:rot lat="0" lon="0" rev="1200000"/>
-            </a:lightRig>
-          </a:scene3d>
-          <a:sp3d>
-            <a:bevelT w="63500" h="25400"/>
-          </a:sp3d>
         </a:effectStyle>
       </a:effectStyleLst>
       <a:bgFillStyleLst>
         <a:solidFill>
           <a:schemeClr val="phClr"/>
         </a:solidFill>
+        <a:solidFill>
+          <a:schemeClr val="phClr">
+            <a:tint val="95000"/>
+            <a:satMod val="170000"/>
+          </a:schemeClr>
+        </a:solidFill>
         <a:gradFill rotWithShape="1">
           <a:gsLst>
             <a:gs pos="0">
               <a:schemeClr val="phClr">
-                <a:tint val="40000"/>
-                <a:satMod val="350000"/>
+                <a:tint val="93000"/>
+                <a:satMod val="150000"/>
+                <a:shade val="98000"/>
+                <a:lumMod val="102000"/>
               </a:schemeClr>
             </a:gs>
-            <a:gs pos="40000">
+            <a:gs pos="50000">
               <a:schemeClr val="phClr">
-                <a:tint val="45000"/>
-                <a:shade val="99000"/>
-                <a:satMod val="350000"/>
+                <a:tint val="98000"/>
+                <a:satMod val="130000"/>
+                <a:shade val="90000"/>
+                <a:lumMod val="103000"/>
               </a:schemeClr>
             </a:gs>
             <a:gs pos="100000">
               <a:schemeClr val="phClr">
-                <a:shade val="20000"/>
-                <a:satMod val="255000"/>
+                <a:shade val="63000"/>
+                <a:satMod val="120000"/>
               </a:schemeClr>
             </a:gs>
           </a:gsLst>
-          <a:path path="circle">
-            <a:fillToRect l="50000" t="-80000" r="50000" b="180000"/>
-          </a:path>
-        </a:gradFill>
-        <a:gradFill rotWithShape="1">
-          <a:gsLst>
-            <a:gs pos="0">
-              <a:schemeClr val="phClr">
-                <a:tint val="80000"/>
-                <a:satMod val="300000"/>
-              </a:schemeClr>
-            </a:gs>
-            <a:gs pos="100000">
-              <a:schemeClr val="phClr">
-                <a:shade val="30000"/>
-                <a:satMod val="200000"/>
-              </a:schemeClr>
-            </a:gs>
-          </a:gsLst>
-          <a:path path="circle">
-            <a:fillToRect l="50000" t="50000" r="50000" b="50000"/>
-          </a:path>
+          <a:lin ang="5400000" scaled="0"/>
         </a:gradFill>
       </a:bgFillStyleLst>
     </a:fmtScheme>
   </a:themeElements>
   <a:objectDefaults>
-    <a:spDef>
-      <a:spPr/>
-      <a:bodyPr/>
-      <a:lstStyle/>
-      <a:style>
-        <a:lnRef idx="1">
-          <a:schemeClr val="accent1"/>
-        </a:lnRef>
-        <a:fillRef idx="3">
-          <a:schemeClr val="accent1"/>
-        </a:fillRef>
-        <a:effectRef idx="2">
-          <a:schemeClr val="accent1"/>
-        </a:effectRef>
-        <a:fontRef idx="minor">
-          <a:schemeClr val="lt1"/>
-        </a:fontRef>
-      </a:style>
-    </a:spDef>
     <a:lnDef>
       <a:spPr/>
       <a:bodyPr/>
@@ -23040,5 +23120,10 @@
     </a:lnDef>
   </a:objectDefaults>
   <a:extraClrSchemeLst/>
+  <a:extLst>
+    <a:ext uri="{05A4C25C-085E-4340-85A3-A5531E510DB2}">
+      <thm15:themeFamily xmlns:thm15="http://schemas.microsoft.com/office/thememl/2012/main" name="Office Theme" id="{2E142A2C-CD16-42D6-873A-C26D2A0506FA}" vid="{1BDDFF52-6CD6-40A5-AB3C-68EB2F1E4D0A}"/>
+    </a:ext>
+  </a:extLst>
 </a:theme>
 </file>